--- a/tuning-six-layers-zh.pptx
+++ b/tuning-six-layers-zh.pptx
@@ -14,6 +14,8 @@
     <p:sldId id="262" r:id="rId13"/>
     <p:sldId id="263" r:id="rId14"/>
     <p:sldId id="264" r:id="rId15"/>
+    <p:sldId id="265" r:id="rId16"/>
+    <p:sldId id="266" r:id="rId17"/>
   </p:sldIdLst>
   <p:sldSz cx="12191695" cy="6858000" type="screen4x3"/>
   <p:notesSz cx="6858000" cy="9144000"/>
@@ -500,16 +502,16 @@
                   <c:v>单卡</c:v>
                 </c:pt>
                 <c:pt idx="1">
-                  <c:v>单卡 + 上限 160</c:v>
+                  <c:v>单卡 + LTO</c:v>
                 </c:pt>
                 <c:pt idx="2">
-                  <c:v>2 卡</c:v>
+                  <c:v>2 卡 + rdma</c:v>
                 </c:pt>
                 <c:pt idx="3">
-                  <c:v>2 卡 + rdma</c:v>
+                  <c:v>2 卡 + rdma + 上限 160</c:v>
                 </c:pt>
                 <c:pt idx="4">
-                  <c:v>2 卡 + rdma + 上限 160</c:v>
+                  <c:v>2 卡 + rdma + LTO</c:v>
                 </c:pt>
               </c:strCache>
             </c:strRef>
@@ -524,16 +526,16 @@
                   <c:v>1.0</c:v>
                 </c:pt>
                 <c:pt idx="1">
-                  <c:v>1.0645539906103287</c:v>
+                  <c:v>1.3144418872266972</c:v>
                 </c:pt>
                 <c:pt idx="2">
-                  <c:v>1.6401446654611211</c:v>
+                  <c:v>1.841596130592503</c:v>
                 </c:pt>
                 <c:pt idx="3">
-                  <c:v>1.849510603588907</c:v>
+                  <c:v>2.027962716378162</c:v>
                 </c:pt>
                 <c:pt idx="4">
-                  <c:v>1.977758395115569</c:v>
+                  <c:v>2.402208201892744</c:v>
                 </c:pt>
               </c:numCache>
             </c:numRef>
@@ -613,7 +615,7 @@
       <c:valAx>
         <c:axId val="-2113994440"/>
         <c:scaling>
-          <c:max val="2.2"/>
+          <c:max val="2.6"/>
           <c:min val="0.0"/>
         </c:scaling>
         <c:delete val="0"/>
@@ -3910,7 +3912,7 @@
                 <a:ea typeface="Microsoft YaHei"/>
                 <a:cs typeface="Microsoft YaHei"/>
               </a:rPr>
-              <a:t>MFC 上游主线 3ef5e1ee · 2026-10-21 实测</a:t>
+              <a:t>MFC 上游主线 3ef5e1ee · 2026-10-21、10-24 实测</a:t>
             </a:r>
           </a:p>
         </p:txBody>
@@ -4044,7 +4046,7 @@
                 <a:ea typeface="Microsoft YaHei"/>
                 <a:cs typeface="Microsoft YaHei"/>
               </a:rPr>
-              <a:t>1.98×</a:t>
+              <a:t>2.40×</a:t>
             </a:r>
           </a:p>
         </p:txBody>
@@ -4120,7 +4122,7 @@
                 <a:ea typeface="Microsoft YaHei"/>
                 <a:cs typeface="Microsoft YaHei"/>
               </a:rPr>
-              <a:t>+ 寄存器上限 160</a:t>
+              <a:t>+ 链接时优化（LTO）</a:t>
             </a:r>
           </a:p>
         </p:txBody>
@@ -4177,7 +4179,7 @@
 </p:sld>
 </file>
 
-<file path=ppt/slides/slide2.xml><?xml version="1.0" encoding="utf-8"?>
+<file path=ppt/slides/slide10.xml><?xml version="1.0" encoding="utf-8"?>
 <p:sld xmlns:a="http://schemas.openxmlformats.org/drawingml/2006/main" xmlns:p="http://schemas.openxmlformats.org/presentationml/2006/main" xmlns:r="http://schemas.openxmlformats.org/officeDocument/2006/relationships">
   <p:cSld>
     <p:spTree>
@@ -4270,7 +4272,7 @@
                 <a:ea typeface="Microsoft YaHei"/>
                 <a:cs typeface="Microsoft YaHei"/>
               </a:rPr>
-              <a:t>六层全貌：收益在第三层和第四层</a:t>
+              <a:t>第六层 GPU 系统设置：没有 root，只能记录</a:t>
             </a:r>
           </a:p>
         </p:txBody>
@@ -4314,7 +4316,7 @@
                 <a:ea typeface="Microsoft YaHei"/>
                 <a:cs typeface="Microsoft YaHei"/>
               </a:rPr>
-              <a:t>全貌　2 / 9</a:t>
+              <a:t>第六层　10 / 11</a:t>
             </a:r>
           </a:p>
         </p:txBody>
@@ -4354,6 +4356,1799 @@
           </a:fontRef>
         </p:style>
       </p:cxnSp>
+      <p:graphicFrame>
+        <p:nvGraphicFramePr>
+          <p:cNvPr id="6" name="Table 5"/>
+          <p:cNvGraphicFramePr>
+            <a:graphicFrameLocks noGrp="1"/>
+          </p:cNvGraphicFramePr>
+          <p:nvPr/>
+        </p:nvGraphicFramePr>
+        <p:xfrm>
+          <a:off x="548640" y="1325880"/>
+          <a:ext cx="11091672" cy="2267712"/>
+        </p:xfrm>
+        <a:graphic>
+          <a:graphicData uri="http://schemas.openxmlformats.org/drawingml/2006/table">
+            <a:tbl>
+              <a:tblPr firstRow="1" bandRow="1">
+                <a:tableStyleId>{5C22544A-7EE6-4342-B048-85BDC9FD1C3A}</a:tableStyleId>
+              </a:tblPr>
+              <a:tblGrid>
+                <a:gridCol w="2194560"/>
+                <a:gridCol w="4206240"/>
+                <a:gridCol w="4690872"/>
+              </a:tblGrid>
+              <a:tr h="566928">
+                <a:tc>
+                  <a:txBody>
+                    <a:bodyPr wrap="square" anchor="ctr" lIns="73152" rIns="73152" tIns="36576" bIns="36576">
+                      <a:noAutofit/>
+                    </a:bodyPr>
+                    <a:lstStyle/>
+                    <a:p>
+                      <a:pPr algn="l">
+                        <a:lnSpc>
+                          <a:spcPct val="115000"/>
+                        </a:lnSpc>
+                        <a:spcAft>
+                          <a:spcPts val="0"/>
+                        </a:spcAft>
+                      </a:pPr>
+                      <a:r>
+                        <a:rPr sz="1500" b="1">
+                          <a:solidFill>
+                            <a:srgbClr val="FFFFFF"/>
+                          </a:solidFill>
+                          <a:latin typeface="Microsoft YaHei"/>
+                          <a:ea typeface="Microsoft YaHei"/>
+                          <a:cs typeface="Microsoft YaHei"/>
+                        </a:rPr>
+                        <a:t>项目</a:t>
+                      </a:r>
+                    </a:p>
+                  </a:txBody>
+                  <a:tcPr marL="91440" marR="91440" marT="27432" marB="27432" anchor="ctr">
+                    <a:solidFill>
+                      <a:srgbClr val="1E3A5F"/>
+                    </a:solidFill>
+                  </a:tcPr>
+                </a:tc>
+                <a:tc>
+                  <a:txBody>
+                    <a:bodyPr wrap="square" anchor="ctr" lIns="73152" rIns="73152" tIns="36576" bIns="36576">
+                      <a:noAutofit/>
+                    </a:bodyPr>
+                    <a:lstStyle/>
+                    <a:p>
+                      <a:pPr algn="l">
+                        <a:lnSpc>
+                          <a:spcPct val="115000"/>
+                        </a:lnSpc>
+                        <a:spcAft>
+                          <a:spcPts val="0"/>
+                        </a:spcAft>
+                      </a:pPr>
+                      <a:r>
+                        <a:rPr sz="1500" b="1">
+                          <a:solidFill>
+                            <a:srgbClr val="FFFFFF"/>
+                          </a:solidFill>
+                          <a:latin typeface="Microsoft YaHei"/>
+                          <a:ea typeface="Microsoft YaHei"/>
+                          <a:cs typeface="Microsoft YaHei"/>
+                        </a:rPr>
+                        <a:t>现状</a:t>
+                      </a:r>
+                    </a:p>
+                  </a:txBody>
+                  <a:tcPr marL="91440" marR="91440" marT="27432" marB="27432" anchor="ctr">
+                    <a:solidFill>
+                      <a:srgbClr val="1E3A5F"/>
+                    </a:solidFill>
+                  </a:tcPr>
+                </a:tc>
+                <a:tc>
+                  <a:txBody>
+                    <a:bodyPr wrap="square" anchor="ctr" lIns="73152" rIns="73152" tIns="36576" bIns="36576">
+                      <a:noAutofit/>
+                    </a:bodyPr>
+                    <a:lstStyle/>
+                    <a:p>
+                      <a:pPr algn="l">
+                        <a:lnSpc>
+                          <a:spcPct val="115000"/>
+                        </a:lnSpc>
+                        <a:spcAft>
+                          <a:spcPts val="0"/>
+                        </a:spcAft>
+                      </a:pPr>
+                      <a:r>
+                        <a:rPr sz="1500" b="1">
+                          <a:solidFill>
+                            <a:srgbClr val="FFFFFF"/>
+                          </a:solidFill>
+                          <a:latin typeface="Microsoft YaHei"/>
+                          <a:ea typeface="Microsoft YaHei"/>
+                          <a:cs typeface="Microsoft YaHei"/>
+                        </a:rPr>
+                        <a:t>能改吗</a:t>
+                      </a:r>
+                    </a:p>
+                  </a:txBody>
+                  <a:tcPr marL="91440" marR="91440" marT="27432" marB="27432" anchor="ctr">
+                    <a:solidFill>
+                      <a:srgbClr val="1E3A5F"/>
+                    </a:solidFill>
+                  </a:tcPr>
+                </a:tc>
+              </a:tr>
+              <a:tr h="566928">
+                <a:tc>
+                  <a:txBody>
+                    <a:bodyPr wrap="square" anchor="ctr" lIns="73152" rIns="73152" tIns="36576" bIns="36576">
+                      <a:noAutofit/>
+                    </a:bodyPr>
+                    <a:lstStyle/>
+                    <a:p>
+                      <a:pPr algn="l">
+                        <a:lnSpc>
+                          <a:spcPct val="115000"/>
+                        </a:lnSpc>
+                        <a:spcAft>
+                          <a:spcPts val="0"/>
+                        </a:spcAft>
+                      </a:pPr>
+                      <a:r>
+                        <a:rPr sz="1500" b="1">
+                          <a:solidFill>
+                            <a:srgbClr val="1F2937"/>
+                          </a:solidFill>
+                          <a:latin typeface="Microsoft YaHei"/>
+                          <a:ea typeface="Microsoft YaHei"/>
+                          <a:cs typeface="Microsoft YaHei"/>
+                        </a:rPr>
+                        <a:t>功耗上限</a:t>
+                      </a:r>
+                    </a:p>
+                  </a:txBody>
+                  <a:tcPr marL="91440" marR="91440" marT="27432" marB="27432" anchor="ctr">
+                    <a:solidFill>
+                      <a:srgbClr val="F8FAFC"/>
+                    </a:solidFill>
+                  </a:tcPr>
+                </a:tc>
+                <a:tc>
+                  <a:txBody>
+                    <a:bodyPr wrap="square" anchor="ctr" lIns="73152" rIns="73152" tIns="36576" bIns="36576">
+                      <a:noAutofit/>
+                    </a:bodyPr>
+                    <a:lstStyle/>
+                    <a:p>
+                      <a:pPr algn="l">
+                        <a:lnSpc>
+                          <a:spcPct val="115000"/>
+                        </a:lnSpc>
+                        <a:spcAft>
+                          <a:spcPts val="0"/>
+                        </a:spcAft>
+                      </a:pPr>
+                      <a:r>
+                        <a:rPr sz="1500" b="0">
+                          <a:solidFill>
+                            <a:srgbClr val="1F2937"/>
+                          </a:solidFill>
+                          <a:latin typeface="Microsoft YaHei"/>
+                          <a:ea typeface="Microsoft YaHei"/>
+                          <a:cs typeface="Microsoft YaHei"/>
+                        </a:rPr>
+                        <a:t>400 W，已是允许的最大值</a:t>
+                      </a:r>
+                    </a:p>
+                  </a:txBody>
+                  <a:tcPr marL="91440" marR="91440" marT="27432" marB="27432" anchor="ctr">
+                    <a:solidFill>
+                      <a:srgbClr val="F8FAFC"/>
+                    </a:solidFill>
+                  </a:tcPr>
+                </a:tc>
+                <a:tc>
+                  <a:txBody>
+                    <a:bodyPr wrap="square" anchor="ctr" lIns="73152" rIns="73152" tIns="36576" bIns="36576">
+                      <a:noAutofit/>
+                    </a:bodyPr>
+                    <a:lstStyle/>
+                    <a:p>
+                      <a:pPr algn="l">
+                        <a:lnSpc>
+                          <a:spcPct val="115000"/>
+                        </a:lnSpc>
+                        <a:spcAft>
+                          <a:spcPts val="0"/>
+                        </a:spcAft>
+                      </a:pPr>
+                      <a:r>
+                        <a:rPr sz="1500" b="1">
+                          <a:solidFill>
+                            <a:srgbClr val="DC2626"/>
+                          </a:solidFill>
+                          <a:latin typeface="Microsoft YaHei"/>
+                          <a:ea typeface="Microsoft YaHei"/>
+                          <a:cs typeface="Microsoft YaHei"/>
+                        </a:rPr>
+                        <a:t>不能再调高</a:t>
+                      </a:r>
+                    </a:p>
+                  </a:txBody>
+                  <a:tcPr marL="91440" marR="91440" marT="27432" marB="27432" anchor="ctr">
+                    <a:solidFill>
+                      <a:srgbClr val="F8FAFC"/>
+                    </a:solidFill>
+                  </a:tcPr>
+                </a:tc>
+              </a:tr>
+              <a:tr h="566928">
+                <a:tc>
+                  <a:txBody>
+                    <a:bodyPr wrap="square" anchor="ctr" lIns="73152" rIns="73152" tIns="36576" bIns="36576">
+                      <a:noAutofit/>
+                    </a:bodyPr>
+                    <a:lstStyle/>
+                    <a:p>
+                      <a:pPr algn="l">
+                        <a:lnSpc>
+                          <a:spcPct val="115000"/>
+                        </a:lnSpc>
+                        <a:spcAft>
+                          <a:spcPts val="0"/>
+                        </a:spcAft>
+                      </a:pPr>
+                      <a:r>
+                        <a:rPr sz="1500" b="1">
+                          <a:solidFill>
+                            <a:srgbClr val="1F2937"/>
+                          </a:solidFill>
+                          <a:latin typeface="Microsoft YaHei"/>
+                          <a:ea typeface="Microsoft YaHei"/>
+                          <a:cs typeface="Microsoft YaHei"/>
+                        </a:rPr>
+                        <a:t>GPU 时钟</a:t>
+                      </a:r>
+                    </a:p>
+                  </a:txBody>
+                  <a:tcPr marL="91440" marR="91440" marT="27432" marB="27432" anchor="ctr">
+                    <a:solidFill>
+                      <a:srgbClr val="FFFFFF"/>
+                    </a:solidFill>
+                  </a:tcPr>
+                </a:tc>
+                <a:tc>
+                  <a:txBody>
+                    <a:bodyPr wrap="square" anchor="ctr" lIns="73152" rIns="73152" tIns="36576" bIns="36576">
+                      <a:noAutofit/>
+                    </a:bodyPr>
+                    <a:lstStyle/>
+                    <a:p>
+                      <a:pPr algn="l">
+                        <a:lnSpc>
+                          <a:spcPct val="115000"/>
+                        </a:lnSpc>
+                        <a:spcAft>
+                          <a:spcPts val="0"/>
+                        </a:spcAft>
+                      </a:pPr>
+                      <a:r>
+                        <a:rPr sz="1500" b="0">
+                          <a:solidFill>
+                            <a:srgbClr val="1F2937"/>
+                          </a:solidFill>
+                          <a:latin typeface="Microsoft YaHei"/>
+                          <a:ea typeface="Microsoft YaHei"/>
+                          <a:cs typeface="Microsoft YaHei"/>
+                        </a:rPr>
+                        <a:t>没有锁定</a:t>
+                      </a:r>
+                    </a:p>
+                  </a:txBody>
+                  <a:tcPr marL="91440" marR="91440" marT="27432" marB="27432" anchor="ctr">
+                    <a:solidFill>
+                      <a:srgbClr val="FFFFFF"/>
+                    </a:solidFill>
+                  </a:tcPr>
+                </a:tc>
+                <a:tc>
+                  <a:txBody>
+                    <a:bodyPr wrap="square" anchor="ctr" lIns="73152" rIns="73152" tIns="36576" bIns="36576">
+                      <a:noAutofit/>
+                    </a:bodyPr>
+                    <a:lstStyle/>
+                    <a:p>
+                      <a:pPr algn="l">
+                        <a:lnSpc>
+                          <a:spcPct val="115000"/>
+                        </a:lnSpc>
+                        <a:spcAft>
+                          <a:spcPts val="0"/>
+                        </a:spcAft>
+                      </a:pPr>
+                      <a:r>
+                        <a:rPr sz="1500" b="1">
+                          <a:solidFill>
+                            <a:srgbClr val="DC2626"/>
+                          </a:solidFill>
+                          <a:latin typeface="Microsoft YaHei"/>
+                          <a:ea typeface="Microsoft YaHei"/>
+                          <a:cs typeface="Microsoft YaHei"/>
+                        </a:rPr>
+                        <a:t>锁频需要 root</a:t>
+                      </a:r>
+                    </a:p>
+                  </a:txBody>
+                  <a:tcPr marL="91440" marR="91440" marT="27432" marB="27432" anchor="ctr">
+                    <a:solidFill>
+                      <a:srgbClr val="FFFFFF"/>
+                    </a:solidFill>
+                  </a:tcPr>
+                </a:tc>
+              </a:tr>
+              <a:tr h="566928">
+                <a:tc>
+                  <a:txBody>
+                    <a:bodyPr wrap="square" anchor="ctr" lIns="73152" rIns="73152" tIns="36576" bIns="36576">
+                      <a:noAutofit/>
+                    </a:bodyPr>
+                    <a:lstStyle/>
+                    <a:p>
+                      <a:pPr algn="l">
+                        <a:lnSpc>
+                          <a:spcPct val="115000"/>
+                        </a:lnSpc>
+                        <a:spcAft>
+                          <a:spcPts val="0"/>
+                        </a:spcAft>
+                      </a:pPr>
+                      <a:r>
+                        <a:rPr sz="1500" b="1">
+                          <a:solidFill>
+                            <a:srgbClr val="1F2937"/>
+                          </a:solidFill>
+                          <a:latin typeface="Microsoft YaHei"/>
+                          <a:ea typeface="Microsoft YaHei"/>
+                          <a:cs typeface="Microsoft YaHei"/>
+                        </a:rPr>
+                        <a:t>持久模式</a:t>
+                      </a:r>
+                    </a:p>
+                  </a:txBody>
+                  <a:tcPr marL="91440" marR="91440" marT="27432" marB="27432" anchor="ctr">
+                    <a:solidFill>
+                      <a:srgbClr val="F8FAFC"/>
+                    </a:solidFill>
+                  </a:tcPr>
+                </a:tc>
+                <a:tc>
+                  <a:txBody>
+                    <a:bodyPr wrap="square" anchor="ctr" lIns="73152" rIns="73152" tIns="36576" bIns="36576">
+                      <a:noAutofit/>
+                    </a:bodyPr>
+                    <a:lstStyle/>
+                    <a:p>
+                      <a:pPr algn="l">
+                        <a:lnSpc>
+                          <a:spcPct val="115000"/>
+                        </a:lnSpc>
+                        <a:spcAft>
+                          <a:spcPts val="0"/>
+                        </a:spcAft>
+                      </a:pPr>
+                      <a:r>
+                        <a:rPr sz="1500" b="0">
+                          <a:solidFill>
+                            <a:srgbClr val="1F2937"/>
+                          </a:solidFill>
+                          <a:latin typeface="Microsoft YaHei"/>
+                          <a:ea typeface="Microsoft YaHei"/>
+                          <a:cs typeface="Microsoft YaHei"/>
+                        </a:rPr>
+                        <a:t>关闭</a:t>
+                      </a:r>
+                    </a:p>
+                  </a:txBody>
+                  <a:tcPr marL="91440" marR="91440" marT="27432" marB="27432" anchor="ctr">
+                    <a:solidFill>
+                      <a:srgbClr val="F8FAFC"/>
+                    </a:solidFill>
+                  </a:tcPr>
+                </a:tc>
+                <a:tc>
+                  <a:txBody>
+                    <a:bodyPr wrap="square" anchor="ctr" lIns="73152" rIns="73152" tIns="36576" bIns="36576">
+                      <a:noAutofit/>
+                    </a:bodyPr>
+                    <a:lstStyle/>
+                    <a:p>
+                      <a:pPr algn="l">
+                        <a:lnSpc>
+                          <a:spcPct val="115000"/>
+                        </a:lnSpc>
+                        <a:spcAft>
+                          <a:spcPts val="0"/>
+                        </a:spcAft>
+                      </a:pPr>
+                      <a:r>
+                        <a:rPr sz="1500" b="1">
+                          <a:solidFill>
+                            <a:srgbClr val="DC2626"/>
+                          </a:solidFill>
+                          <a:latin typeface="Microsoft YaHei"/>
+                          <a:ea typeface="Microsoft YaHei"/>
+                          <a:cs typeface="Microsoft YaHei"/>
+                        </a:rPr>
+                        <a:t>需要 root</a:t>
+                      </a:r>
+                    </a:p>
+                  </a:txBody>
+                  <a:tcPr marL="91440" marR="91440" marT="27432" marB="27432" anchor="ctr">
+                    <a:solidFill>
+                      <a:srgbClr val="F8FAFC"/>
+                    </a:solidFill>
+                  </a:tcPr>
+                </a:tc>
+              </a:tr>
+            </a:tbl>
+          </a:graphicData>
+        </a:graphic>
+      </p:graphicFrame>
+      <p:sp>
+        <p:nvSpPr>
+          <p:cNvPr id="7" name="TextBox 6"/>
+          <p:cNvSpPr txBox="1"/>
+          <p:nvPr/>
+        </p:nvSpPr>
+        <p:spPr>
+          <a:xfrm>
+            <a:off x="548640" y="4343400"/>
+            <a:ext cx="11155680" cy="1097280"/>
+          </a:xfrm>
+          <a:prstGeom prst="rect">
+            <a:avLst/>
+          </a:prstGeom>
+          <a:noFill/>
+        </p:spPr>
+        <p:txBody>
+          <a:bodyPr wrap="square" anchor="t" lIns="73152" rIns="73152" tIns="36576" bIns="36576">
+            <a:noAutofit/>
+          </a:bodyPr>
+          <a:lstStyle/>
+          <a:p>
+            <a:pPr algn="l">
+              <a:lnSpc>
+                <a:spcPct val="130000"/>
+              </a:lnSpc>
+              <a:spcAft>
+                <a:spcPts val="0"/>
+              </a:spcAft>
+            </a:pPr>
+            <a:r>
+              <a:rPr sz="1500" b="0">
+                <a:solidFill>
+                  <a:srgbClr val="64748B"/>
+                </a:solidFill>
+                <a:latin typeface="Microsoft YaHei"/>
+                <a:ea typeface="Microsoft YaHei"/>
+                <a:cs typeface="Microsoft YaHei"/>
+              </a:rPr>
+              <a:t>满载时功耗中位数 397 W（26 次采样里 18 次封顶），SM 时钟中位数 1770 MHz：GPU 基本顶在功耗上限上（mjx 采样）</a:t>
+            </a:r>
+          </a:p>
+        </p:txBody>
+      </p:sp>
+      <p:sp>
+        <p:nvSpPr>
+          <p:cNvPr id="8" name="Rectangle 7"/>
+          <p:cNvSpPr/>
+          <p:nvPr/>
+        </p:nvSpPr>
+        <p:spPr>
+          <a:xfrm>
+            <a:off x="457200" y="5989320"/>
+            <a:ext cx="11274552" cy="566928"/>
+          </a:xfrm>
+          <a:prstGeom prst="rect">
+            <a:avLst/>
+          </a:prstGeom>
+          <a:solidFill>
+            <a:srgbClr val="F1F5F9"/>
+          </a:solidFill>
+          <a:ln>
+            <a:noFill/>
+          </a:ln>
+          <a:effectLst/>
+        </p:spPr>
+        <p:style>
+          <a:lnRef idx="1">
+            <a:schemeClr val="accent1"/>
+          </a:lnRef>
+          <a:fillRef idx="3">
+            <a:schemeClr val="accent1"/>
+          </a:fillRef>
+          <a:effectRef idx="2">
+            <a:schemeClr val="accent1"/>
+          </a:effectRef>
+          <a:fontRef idx="minor">
+            <a:schemeClr val="lt1"/>
+          </a:fontRef>
+        </p:style>
+        <p:txBody>
+          <a:bodyPr rtlCol="0" anchor="ctr"/>
+          <a:lstStyle/>
+          <a:p>
+            <a:pPr algn="ctr"/>
+          </a:p>
+        </p:txBody>
+      </p:sp>
+      <p:sp>
+        <p:nvSpPr>
+          <p:cNvPr id="9" name="Rectangle 8"/>
+          <p:cNvSpPr/>
+          <p:nvPr/>
+        </p:nvSpPr>
+        <p:spPr>
+          <a:xfrm>
+            <a:off x="457200" y="5989320"/>
+            <a:ext cx="73152" cy="566928"/>
+          </a:xfrm>
+          <a:prstGeom prst="rect">
+            <a:avLst/>
+          </a:prstGeom>
+          <a:solidFill>
+            <a:srgbClr val="F97316"/>
+          </a:solidFill>
+          <a:ln>
+            <a:noFill/>
+          </a:ln>
+          <a:effectLst/>
+        </p:spPr>
+        <p:style>
+          <a:lnRef idx="1">
+            <a:schemeClr val="accent1"/>
+          </a:lnRef>
+          <a:fillRef idx="3">
+            <a:schemeClr val="accent1"/>
+          </a:fillRef>
+          <a:effectRef idx="2">
+            <a:schemeClr val="accent1"/>
+          </a:effectRef>
+          <a:fontRef idx="minor">
+            <a:schemeClr val="lt1"/>
+          </a:fontRef>
+        </p:style>
+        <p:txBody>
+          <a:bodyPr rtlCol="0" anchor="ctr"/>
+          <a:lstStyle/>
+          <a:p>
+            <a:pPr algn="ctr"/>
+          </a:p>
+        </p:txBody>
+      </p:sp>
+      <p:sp>
+        <p:nvSpPr>
+          <p:cNvPr id="10" name="TextBox 9"/>
+          <p:cNvSpPr txBox="1"/>
+          <p:nvPr/>
+        </p:nvSpPr>
+        <p:spPr>
+          <a:xfrm>
+            <a:off x="640080" y="5989320"/>
+            <a:ext cx="11018520" cy="566928"/>
+          </a:xfrm>
+          <a:prstGeom prst="rect">
+            <a:avLst/>
+          </a:prstGeom>
+          <a:noFill/>
+        </p:spPr>
+        <p:txBody>
+          <a:bodyPr wrap="square" anchor="ctr" lIns="73152" rIns="73152" tIns="36576" bIns="36576">
+            <a:noAutofit/>
+          </a:bodyPr>
+          <a:lstStyle/>
+          <a:p>
+            <a:pPr algn="l">
+              <a:lnSpc>
+                <a:spcPct val="115000"/>
+              </a:lnSpc>
+              <a:spcAft>
+                <a:spcPts val="0"/>
+              </a:spcAft>
+            </a:pPr>
+            <a:r>
+              <a:rPr sz="1600" b="0">
+                <a:solidFill>
+                  <a:srgbClr val="1F2937"/>
+                </a:solidFill>
+                <a:latin typeface="Microsoft YaHei"/>
+                <a:ea typeface="Microsoft YaHei"/>
+                <a:cs typeface="Microsoft YaHei"/>
+              </a:rPr>
+              <a:t>每次运行前后记录 GPU 的时钟、温度和功耗，用来排查异常结果</a:t>
+            </a:r>
+          </a:p>
+        </p:txBody>
+      </p:sp>
+    </p:spTree>
+  </p:cSld>
+  <p:clrMapOvr>
+    <a:masterClrMapping/>
+  </p:clrMapOvr>
+</p:sld>
+</file>
+
+<file path=ppt/slides/slide11.xml><?xml version="1.0" encoding="utf-8"?>
+<p:sld xmlns:a="http://schemas.openxmlformats.org/drawingml/2006/main" xmlns:p="http://schemas.openxmlformats.org/presentationml/2006/main" xmlns:r="http://schemas.openxmlformats.org/officeDocument/2006/relationships">
+  <p:cSld>
+    <p:spTree>
+      <p:nvGrpSpPr>
+        <p:cNvPr id="1" name=""/>
+        <p:cNvGrpSpPr/>
+        <p:nvPr/>
+      </p:nvGrpSpPr>
+      <p:grpSpPr/>
+      <p:sp>
+        <p:nvSpPr>
+          <p:cNvPr id="2" name="Rectangle 1"/>
+          <p:cNvSpPr/>
+          <p:nvPr/>
+        </p:nvSpPr>
+        <p:spPr>
+          <a:xfrm>
+            <a:off x="274320" y="347472"/>
+            <a:ext cx="82296" cy="457200"/>
+          </a:xfrm>
+          <a:prstGeom prst="rect">
+            <a:avLst/>
+          </a:prstGeom>
+          <a:solidFill>
+            <a:srgbClr val="F97316"/>
+          </a:solidFill>
+          <a:ln>
+            <a:noFill/>
+          </a:ln>
+          <a:effectLst/>
+        </p:spPr>
+        <p:style>
+          <a:lnRef idx="1">
+            <a:schemeClr val="accent1"/>
+          </a:lnRef>
+          <a:fillRef idx="3">
+            <a:schemeClr val="accent1"/>
+          </a:fillRef>
+          <a:effectRef idx="2">
+            <a:schemeClr val="accent1"/>
+          </a:effectRef>
+          <a:fontRef idx="minor">
+            <a:schemeClr val="lt1"/>
+          </a:fontRef>
+        </p:style>
+        <p:txBody>
+          <a:bodyPr rtlCol="0" anchor="ctr"/>
+          <a:lstStyle/>
+          <a:p>
+            <a:pPr algn="ctr"/>
+          </a:p>
+        </p:txBody>
+      </p:sp>
+      <p:sp>
+        <p:nvSpPr>
+          <p:cNvPr id="3" name="TextBox 2"/>
+          <p:cNvSpPr txBox="1"/>
+          <p:nvPr/>
+        </p:nvSpPr>
+        <p:spPr>
+          <a:xfrm>
+            <a:off x="457200" y="237744"/>
+            <a:ext cx="9509760" cy="676656"/>
+          </a:xfrm>
+          <a:prstGeom prst="rect">
+            <a:avLst/>
+          </a:prstGeom>
+          <a:noFill/>
+        </p:spPr>
+        <p:txBody>
+          <a:bodyPr wrap="square" anchor="ctr" lIns="73152" rIns="73152" tIns="36576" bIns="36576">
+            <a:noAutofit/>
+          </a:bodyPr>
+          <a:lstStyle/>
+          <a:p>
+            <a:pPr algn="l">
+              <a:lnSpc>
+                <a:spcPct val="115000"/>
+              </a:lnSpc>
+              <a:spcAft>
+                <a:spcPts val="0"/>
+              </a:spcAft>
+            </a:pPr>
+            <a:r>
+              <a:rPr sz="2600" b="1">
+                <a:solidFill>
+                  <a:srgbClr val="1E3A5F"/>
+                </a:solidFill>
+                <a:latin typeface="Microsoft YaHei"/>
+                <a:ea typeface="Microsoft YaHei"/>
+                <a:cs typeface="Microsoft YaHei"/>
+              </a:rPr>
+              <a:t>叠加起来：2 卡 2.40 倍，输出逐位一致</a:t>
+            </a:r>
+          </a:p>
+        </p:txBody>
+      </p:sp>
+      <p:sp>
+        <p:nvSpPr>
+          <p:cNvPr id="4" name="TextBox 3"/>
+          <p:cNvSpPr txBox="1"/>
+          <p:nvPr/>
+        </p:nvSpPr>
+        <p:spPr>
+          <a:xfrm>
+            <a:off x="9784080" y="310896"/>
+            <a:ext cx="2103120" cy="457200"/>
+          </a:xfrm>
+          <a:prstGeom prst="rect">
+            <a:avLst/>
+          </a:prstGeom>
+          <a:noFill/>
+        </p:spPr>
+        <p:txBody>
+          <a:bodyPr wrap="square" anchor="ctr" lIns="73152" rIns="73152" tIns="36576" bIns="36576">
+            <a:noAutofit/>
+          </a:bodyPr>
+          <a:lstStyle/>
+          <a:p>
+            <a:pPr algn="r">
+              <a:lnSpc>
+                <a:spcPct val="115000"/>
+              </a:lnSpc>
+              <a:spcAft>
+                <a:spcPts val="0"/>
+              </a:spcAft>
+            </a:pPr>
+            <a:r>
+              <a:rPr sz="1200" b="0">
+                <a:solidFill>
+                  <a:srgbClr val="64748B"/>
+                </a:solidFill>
+                <a:latin typeface="Microsoft YaHei"/>
+                <a:ea typeface="Microsoft YaHei"/>
+                <a:cs typeface="Microsoft YaHei"/>
+              </a:rPr>
+              <a:t>总结　11 / 11</a:t>
+            </a:r>
+          </a:p>
+        </p:txBody>
+      </p:sp>
+      <p:cxnSp>
+        <p:nvCxnSpPr>
+          <p:cNvPr id="5" name="Connector 4"/>
+          <p:cNvCxnSpPr/>
+          <p:nvPr/>
+        </p:nvCxnSpPr>
+        <p:spPr>
+          <a:xfrm>
+            <a:off x="457200" y="969264"/>
+            <a:ext cx="11274552" cy="0"/>
+          </a:xfrm>
+          <a:prstGeom prst="line">
+            <a:avLst/>
+          </a:prstGeom>
+          <a:ln w="12700">
+            <a:solidFill>
+              <a:srgbClr val="E2E8F0"/>
+            </a:solidFill>
+          </a:ln>
+        </p:spPr>
+        <p:style>
+          <a:lnRef idx="2">
+            <a:schemeClr val="accent1"/>
+          </a:lnRef>
+          <a:fillRef idx="0">
+            <a:schemeClr val="accent1"/>
+          </a:fillRef>
+          <a:effectRef idx="1">
+            <a:schemeClr val="accent1"/>
+          </a:effectRef>
+          <a:fontRef idx="minor">
+            <a:schemeClr val="tx1"/>
+          </a:fontRef>
+        </p:style>
+      </p:cxnSp>
+      <p:sp>
+        <p:nvSpPr>
+          <p:cNvPr id="6" name="TextBox 5"/>
+          <p:cNvSpPr txBox="1"/>
+          <p:nvPr/>
+        </p:nvSpPr>
+        <p:spPr>
+          <a:xfrm>
+            <a:off x="548640" y="1143000"/>
+            <a:ext cx="6583680" cy="365760"/>
+          </a:xfrm>
+          <a:prstGeom prst="rect">
+            <a:avLst/>
+          </a:prstGeom>
+          <a:noFill/>
+        </p:spPr>
+        <p:txBody>
+          <a:bodyPr wrap="square" anchor="t" lIns="73152" rIns="73152" tIns="36576" bIns="36576">
+            <a:noAutofit/>
+          </a:bodyPr>
+          <a:lstStyle/>
+          <a:p>
+            <a:pPr algn="l">
+              <a:lnSpc>
+                <a:spcPct val="115000"/>
+              </a:lnSpc>
+              <a:spcAft>
+                <a:spcPts val="0"/>
+              </a:spcAft>
+            </a:pPr>
+            <a:r>
+              <a:rPr sz="1400" b="0">
+                <a:solidFill>
+                  <a:srgbClr val="64748B"/>
+                </a:solidFill>
+                <a:latin typeface="Microsoft YaHei"/>
+                <a:ea typeface="Microsoft YaHei"/>
+                <a:cs typeface="Microsoft YaHei"/>
+              </a:rPr>
+              <a:t>相对单卡基线的加速比（10-24，每项 3 次平均）</a:t>
+            </a:r>
+          </a:p>
+        </p:txBody>
+      </p:sp>
+      <p:graphicFrame>
+        <p:nvGraphicFramePr>
+          <p:cNvPr id="7" name="Chart 6"/>
+          <p:cNvGraphicFramePr>
+            <a:graphicFrameLocks noGrp="1"/>
+          </p:cNvGraphicFramePr>
+          <p:nvPr/>
+        </p:nvGraphicFramePr>
+        <p:xfrm>
+          <a:off x="411480" y="1463040"/>
+          <a:ext cx="6812280" cy="4343400"/>
+        </p:xfrm>
+        <a:graphic>
+          <a:graphicData uri="http://schemas.openxmlformats.org/drawingml/2006/chart">
+            <c:chart xmlns:c="http://schemas.openxmlformats.org/drawingml/2006/chart" r:id="rId2"/>
+          </a:graphicData>
+        </a:graphic>
+      </p:graphicFrame>
+      <p:sp>
+        <p:nvSpPr>
+          <p:cNvPr id="8" name="Rectangle 7"/>
+          <p:cNvSpPr/>
+          <p:nvPr/>
+        </p:nvSpPr>
+        <p:spPr>
+          <a:xfrm>
+            <a:off x="7543800" y="1188720"/>
+            <a:ext cx="73152" cy="1371600"/>
+          </a:xfrm>
+          <a:prstGeom prst="rect">
+            <a:avLst/>
+          </a:prstGeom>
+          <a:solidFill>
+            <a:srgbClr val="16A34A"/>
+          </a:solidFill>
+          <a:ln>
+            <a:noFill/>
+          </a:ln>
+          <a:effectLst/>
+        </p:spPr>
+        <p:style>
+          <a:lnRef idx="1">
+            <a:schemeClr val="accent1"/>
+          </a:lnRef>
+          <a:fillRef idx="3">
+            <a:schemeClr val="accent1"/>
+          </a:fillRef>
+          <a:effectRef idx="2">
+            <a:schemeClr val="accent1"/>
+          </a:effectRef>
+          <a:fontRef idx="minor">
+            <a:schemeClr val="lt1"/>
+          </a:fontRef>
+        </p:style>
+        <p:txBody>
+          <a:bodyPr rtlCol="0" anchor="ctr"/>
+          <a:lstStyle/>
+          <a:p>
+            <a:pPr algn="ctr"/>
+          </a:p>
+        </p:txBody>
+      </p:sp>
+      <p:sp>
+        <p:nvSpPr>
+          <p:cNvPr id="9" name="TextBox 8"/>
+          <p:cNvSpPr txBox="1"/>
+          <p:nvPr/>
+        </p:nvSpPr>
+        <p:spPr>
+          <a:xfrm>
+            <a:off x="7726679" y="1170432"/>
+            <a:ext cx="4023360" cy="411480"/>
+          </a:xfrm>
+          <a:prstGeom prst="rect">
+            <a:avLst/>
+          </a:prstGeom>
+          <a:noFill/>
+        </p:spPr>
+        <p:txBody>
+          <a:bodyPr wrap="square" anchor="t" lIns="73152" rIns="73152" tIns="36576" bIns="36576">
+            <a:noAutofit/>
+          </a:bodyPr>
+          <a:lstStyle/>
+          <a:p>
+            <a:pPr algn="l">
+              <a:lnSpc>
+                <a:spcPct val="115000"/>
+              </a:lnSpc>
+              <a:spcAft>
+                <a:spcPts val="0"/>
+              </a:spcAft>
+            </a:pPr>
+            <a:r>
+              <a:rPr sz="1700" b="1">
+                <a:solidFill>
+                  <a:srgbClr val="16A34A"/>
+                </a:solidFill>
+                <a:latin typeface="Microsoft YaHei"/>
+                <a:ea typeface="Microsoft YaHei"/>
+                <a:cs typeface="Microsoft YaHei"/>
+              </a:rPr>
+              <a:t>推荐设置</a:t>
+            </a:r>
+          </a:p>
+        </p:txBody>
+      </p:sp>
+      <p:sp>
+        <p:nvSpPr>
+          <p:cNvPr id="10" name="TextBox 9"/>
+          <p:cNvSpPr txBox="1"/>
+          <p:nvPr/>
+        </p:nvSpPr>
+        <p:spPr>
+          <a:xfrm>
+            <a:off x="7726679" y="1572768"/>
+            <a:ext cx="4023360" cy="1005840"/>
+          </a:xfrm>
+          <a:prstGeom prst="rect">
+            <a:avLst/>
+          </a:prstGeom>
+          <a:noFill/>
+        </p:spPr>
+        <p:txBody>
+          <a:bodyPr wrap="square" anchor="t" lIns="73152" rIns="73152" tIns="36576" bIns="36576">
+            <a:noAutofit/>
+          </a:bodyPr>
+          <a:lstStyle/>
+          <a:p>
+            <a:pPr algn="l">
+              <a:lnSpc>
+                <a:spcPct val="115000"/>
+              </a:lnSpc>
+              <a:spcAft>
+                <a:spcPts val="300"/>
+              </a:spcAft>
+            </a:pPr>
+            <a:r>
+              <a:rPr sz="1400" b="0">
+                <a:solidFill>
+                  <a:srgbClr val="1F2937"/>
+                </a:solidFill>
+                <a:latin typeface="Consolas"/>
+                <a:ea typeface="Microsoft YaHei"/>
+                <a:cs typeface="Microsoft YaHei"/>
+              </a:rPr>
+              <a:t>FFLAGS=-gpu=lto,cuda13.0</a:t>
+            </a:r>
+            <a:r>
+              <a:rPr sz="1400" b="0">
+                <a:solidFill>
+                  <a:srgbClr val="1F2937"/>
+                </a:solidFill>
+                <a:latin typeface="Microsoft YaHei"/>
+                <a:ea typeface="Microsoft YaHei"/>
+                <a:cs typeface="Microsoft YaHei"/>
+              </a:rPr>
+              <a:t>，不加寄存器上限</a:t>
+            </a:r>
+          </a:p>
+          <a:p>
+            <a:pPr algn="l">
+              <a:lnSpc>
+                <a:spcPct val="115000"/>
+              </a:lnSpc>
+              <a:spcAft>
+                <a:spcPts val="300"/>
+              </a:spcAft>
+            </a:pPr>
+            <a:r>
+              <a:rPr sz="1400" b="0">
+                <a:solidFill>
+                  <a:srgbClr val="1F2937"/>
+                </a:solidFill>
+                <a:latin typeface="Microsoft YaHei"/>
+                <a:ea typeface="Microsoft YaHei"/>
+                <a:cs typeface="Microsoft YaHei"/>
+              </a:rPr>
+              <a:t>每卡 1 个 rank，绑 NUMA 0 的核</a:t>
+            </a:r>
+          </a:p>
+          <a:p>
+            <a:pPr algn="l">
+              <a:lnSpc>
+                <a:spcPct val="115000"/>
+              </a:lnSpc>
+              <a:spcAft>
+                <a:spcPts val="300"/>
+              </a:spcAft>
+            </a:pPr>
+            <a:r>
+              <a:rPr sz="1400" b="0">
+                <a:solidFill>
+                  <a:srgbClr val="1F2937"/>
+                </a:solidFill>
+                <a:latin typeface="Microsoft YaHei"/>
+                <a:ea typeface="Microsoft YaHei"/>
+                <a:cs typeface="Microsoft YaHei"/>
+              </a:rPr>
+              <a:t>（如果允许）</a:t>
+            </a:r>
+            <a:r>
+              <a:rPr sz="1400" b="0">
+                <a:solidFill>
+                  <a:srgbClr val="1F2937"/>
+                </a:solidFill>
+                <a:latin typeface="Consolas"/>
+                <a:ea typeface="Microsoft YaHei"/>
+                <a:cs typeface="Microsoft YaHei"/>
+              </a:rPr>
+              <a:t>rdma_mpi = 'T'</a:t>
+            </a:r>
+          </a:p>
+        </p:txBody>
+      </p:sp>
+      <p:sp>
+        <p:nvSpPr>
+          <p:cNvPr id="11" name="Rectangle 10"/>
+          <p:cNvSpPr/>
+          <p:nvPr/>
+        </p:nvSpPr>
+        <p:spPr>
+          <a:xfrm>
+            <a:off x="7543800" y="2761488"/>
+            <a:ext cx="73152" cy="1371600"/>
+          </a:xfrm>
+          <a:prstGeom prst="rect">
+            <a:avLst/>
+          </a:prstGeom>
+          <a:solidFill>
+            <a:srgbClr val="D97706"/>
+          </a:solidFill>
+          <a:ln>
+            <a:noFill/>
+          </a:ln>
+          <a:effectLst/>
+        </p:spPr>
+        <p:style>
+          <a:lnRef idx="1">
+            <a:schemeClr val="accent1"/>
+          </a:lnRef>
+          <a:fillRef idx="3">
+            <a:schemeClr val="accent1"/>
+          </a:fillRef>
+          <a:effectRef idx="2">
+            <a:schemeClr val="accent1"/>
+          </a:effectRef>
+          <a:fontRef idx="minor">
+            <a:schemeClr val="lt1"/>
+          </a:fontRef>
+        </p:style>
+        <p:txBody>
+          <a:bodyPr rtlCol="0" anchor="ctr"/>
+          <a:lstStyle/>
+          <a:p>
+            <a:pPr algn="ctr"/>
+          </a:p>
+        </p:txBody>
+      </p:sp>
+      <p:sp>
+        <p:nvSpPr>
+          <p:cNvPr id="12" name="TextBox 11"/>
+          <p:cNvSpPr txBox="1"/>
+          <p:nvPr/>
+        </p:nvSpPr>
+        <p:spPr>
+          <a:xfrm>
+            <a:off x="7726679" y="2743200"/>
+            <a:ext cx="4023360" cy="411480"/>
+          </a:xfrm>
+          <a:prstGeom prst="rect">
+            <a:avLst/>
+          </a:prstGeom>
+          <a:noFill/>
+        </p:spPr>
+        <p:txBody>
+          <a:bodyPr wrap="square" anchor="t" lIns="73152" rIns="73152" tIns="36576" bIns="36576">
+            <a:noAutofit/>
+          </a:bodyPr>
+          <a:lstStyle/>
+          <a:p>
+            <a:pPr algn="l">
+              <a:lnSpc>
+                <a:spcPct val="115000"/>
+              </a:lnSpc>
+              <a:spcAft>
+                <a:spcPts val="0"/>
+              </a:spcAft>
+            </a:pPr>
+            <a:r>
+              <a:rPr sz="1700" b="1">
+                <a:solidFill>
+                  <a:srgbClr val="D97706"/>
+                </a:solidFill>
+                <a:latin typeface="Microsoft YaHei"/>
+                <a:ea typeface="Microsoft YaHei"/>
+                <a:cs typeface="Microsoft YaHei"/>
+              </a:rPr>
+              <a:t>待测</a:t>
+            </a:r>
+          </a:p>
+        </p:txBody>
+      </p:sp>
+      <p:sp>
+        <p:nvSpPr>
+          <p:cNvPr id="13" name="TextBox 12"/>
+          <p:cNvSpPr txBox="1"/>
+          <p:nvPr/>
+        </p:nvSpPr>
+        <p:spPr>
+          <a:xfrm>
+            <a:off x="7726679" y="3145536"/>
+            <a:ext cx="4023360" cy="1005840"/>
+          </a:xfrm>
+          <a:prstGeom prst="rect">
+            <a:avLst/>
+          </a:prstGeom>
+          <a:noFill/>
+        </p:spPr>
+        <p:txBody>
+          <a:bodyPr wrap="square" anchor="t" lIns="73152" rIns="73152" tIns="36576" bIns="36576">
+            <a:noAutofit/>
+          </a:bodyPr>
+          <a:lstStyle/>
+          <a:p>
+            <a:pPr algn="l">
+              <a:lnSpc>
+                <a:spcPct val="115000"/>
+              </a:lnSpc>
+              <a:spcAft>
+                <a:spcPts val="300"/>
+              </a:spcAft>
+            </a:pPr>
+            <a:r>
+              <a:rPr sz="1400" b="0">
+                <a:solidFill>
+                  <a:srgbClr val="1F2937"/>
+                </a:solidFill>
+                <a:latin typeface="Microsoft YaHei"/>
+                <a:ea typeface="Microsoft YaHei"/>
+                <a:cs typeface="Microsoft YaHei"/>
+              </a:rPr>
+              <a:t>带 LTO 跑一遍 </a:t>
+            </a:r>
+            <a:r>
+              <a:rPr sz="1400" b="0">
+                <a:solidFill>
+                  <a:srgbClr val="1F2937"/>
+                </a:solidFill>
+                <a:latin typeface="Consolas"/>
+                <a:ea typeface="Microsoft YaHei"/>
+                <a:cs typeface="Microsoft YaHei"/>
+              </a:rPr>
+              <a:t>./mfc.sh test</a:t>
+            </a:r>
+          </a:p>
+          <a:p>
+            <a:pPr algn="l">
+              <a:lnSpc>
+                <a:spcPct val="115000"/>
+              </a:lnSpc>
+              <a:spcAft>
+                <a:spcPts val="300"/>
+              </a:spcAft>
+            </a:pPr>
+            <a:r>
+              <a:rPr sz="1400" b="0">
+                <a:solidFill>
+                  <a:srgbClr val="1F2937"/>
+                </a:solidFill>
+                <a:latin typeface="Microsoft YaHei"/>
+                <a:ea typeface="Microsoft YaHei"/>
+                <a:cs typeface="Microsoft YaHei"/>
+              </a:rPr>
+              <a:t>其他算例上的 2 卡 + </a:t>
+            </a:r>
+            <a:r>
+              <a:rPr sz="1400" b="0">
+                <a:solidFill>
+                  <a:srgbClr val="1F2937"/>
+                </a:solidFill>
+                <a:latin typeface="Consolas"/>
+                <a:ea typeface="Microsoft YaHei"/>
+                <a:cs typeface="Microsoft YaHei"/>
+              </a:rPr>
+              <a:t>rdma_mpi</a:t>
+            </a:r>
+          </a:p>
+          <a:p>
+            <a:pPr algn="l">
+              <a:lnSpc>
+                <a:spcPct val="115000"/>
+              </a:lnSpc>
+              <a:spcAft>
+                <a:spcPts val="300"/>
+              </a:spcAft>
+            </a:pPr>
+            <a:r>
+              <a:rPr sz="1400" b="0">
+                <a:solidFill>
+                  <a:srgbClr val="1F2937"/>
+                </a:solidFill>
+                <a:latin typeface="Consolas"/>
+                <a:ea typeface="Microsoft YaHei"/>
+                <a:cs typeface="Microsoft YaHei"/>
+              </a:rPr>
+              <a:t>-O3</a:t>
+            </a:r>
+            <a:r>
+              <a:rPr sz="1400" b="0">
+                <a:solidFill>
+                  <a:srgbClr val="1F2937"/>
+                </a:solidFill>
+                <a:latin typeface="Microsoft YaHei"/>
+                <a:ea typeface="Microsoft YaHei"/>
+                <a:cs typeface="Microsoft YaHei"/>
+              </a:rPr>
+              <a:t> 换成 </a:t>
+            </a:r>
+            <a:r>
+              <a:rPr sz="1400" b="0">
+                <a:solidFill>
+                  <a:srgbClr val="1F2937"/>
+                </a:solidFill>
+                <a:latin typeface="Consolas"/>
+                <a:ea typeface="Microsoft YaHei"/>
+                <a:cs typeface="Microsoft YaHei"/>
+              </a:rPr>
+              <a:t>-O2</a:t>
+            </a:r>
+          </a:p>
+        </p:txBody>
+      </p:sp>
+      <p:sp>
+        <p:nvSpPr>
+          <p:cNvPr id="14" name="Rectangle 13"/>
+          <p:cNvSpPr/>
+          <p:nvPr/>
+        </p:nvSpPr>
+        <p:spPr>
+          <a:xfrm>
+            <a:off x="7543800" y="4334256"/>
+            <a:ext cx="73152" cy="1371600"/>
+          </a:xfrm>
+          <a:prstGeom prst="rect">
+            <a:avLst/>
+          </a:prstGeom>
+          <a:solidFill>
+            <a:srgbClr val="1E3A5F"/>
+          </a:solidFill>
+          <a:ln>
+            <a:noFill/>
+          </a:ln>
+          <a:effectLst/>
+        </p:spPr>
+        <p:style>
+          <a:lnRef idx="1">
+            <a:schemeClr val="accent1"/>
+          </a:lnRef>
+          <a:fillRef idx="3">
+            <a:schemeClr val="accent1"/>
+          </a:fillRef>
+          <a:effectRef idx="2">
+            <a:schemeClr val="accent1"/>
+          </a:effectRef>
+          <a:fontRef idx="minor">
+            <a:schemeClr val="lt1"/>
+          </a:fontRef>
+        </p:style>
+        <p:txBody>
+          <a:bodyPr rtlCol="0" anchor="ctr"/>
+          <a:lstStyle/>
+          <a:p>
+            <a:pPr algn="ctr"/>
+          </a:p>
+        </p:txBody>
+      </p:sp>
+      <p:sp>
+        <p:nvSpPr>
+          <p:cNvPr id="15" name="TextBox 14"/>
+          <p:cNvSpPr txBox="1"/>
+          <p:nvPr/>
+        </p:nvSpPr>
+        <p:spPr>
+          <a:xfrm>
+            <a:off x="7726679" y="4315968"/>
+            <a:ext cx="4023360" cy="411480"/>
+          </a:xfrm>
+          <a:prstGeom prst="rect">
+            <a:avLst/>
+          </a:prstGeom>
+          <a:noFill/>
+        </p:spPr>
+        <p:txBody>
+          <a:bodyPr wrap="square" anchor="t" lIns="73152" rIns="73152" tIns="36576" bIns="36576">
+            <a:noAutofit/>
+          </a:bodyPr>
+          <a:lstStyle/>
+          <a:p>
+            <a:pPr algn="l">
+              <a:lnSpc>
+                <a:spcPct val="115000"/>
+              </a:lnSpc>
+              <a:spcAft>
+                <a:spcPts val="0"/>
+              </a:spcAft>
+            </a:pPr>
+            <a:r>
+              <a:rPr sz="1700" b="1">
+                <a:solidFill>
+                  <a:srgbClr val="1E3A5F"/>
+                </a:solidFill>
+                <a:latin typeface="Microsoft YaHei"/>
+                <a:ea typeface="Microsoft YaHei"/>
+                <a:cs typeface="Microsoft YaHei"/>
+              </a:rPr>
+              <a:t>待讨论</a:t>
+            </a:r>
+          </a:p>
+        </p:txBody>
+      </p:sp>
+      <p:sp>
+        <p:nvSpPr>
+          <p:cNvPr id="16" name="TextBox 15"/>
+          <p:cNvSpPr txBox="1"/>
+          <p:nvPr/>
+        </p:nvSpPr>
+        <p:spPr>
+          <a:xfrm>
+            <a:off x="7726679" y="4718304"/>
+            <a:ext cx="4023360" cy="1005840"/>
+          </a:xfrm>
+          <a:prstGeom prst="rect">
+            <a:avLst/>
+          </a:prstGeom>
+          <a:noFill/>
+        </p:spPr>
+        <p:txBody>
+          <a:bodyPr wrap="square" anchor="t" lIns="73152" rIns="73152" tIns="36576" bIns="36576">
+            <a:noAutofit/>
+          </a:bodyPr>
+          <a:lstStyle/>
+          <a:p>
+            <a:pPr algn="l">
+              <a:lnSpc>
+                <a:spcPct val="115000"/>
+              </a:lnSpc>
+              <a:spcAft>
+                <a:spcPts val="300"/>
+              </a:spcAft>
+            </a:pPr>
+            <a:r>
+              <a:rPr sz="1400" b="0">
+                <a:solidFill>
+                  <a:srgbClr val="1F2937"/>
+                </a:solidFill>
+                <a:latin typeface="Microsoft YaHei"/>
+                <a:ea typeface="Microsoft YaHei"/>
+                <a:cs typeface="Microsoft YaHei"/>
+              </a:rPr>
+              <a:t>LTO 当默认构建选项</a:t>
+            </a:r>
+          </a:p>
+          <a:p>
+            <a:pPr algn="l">
+              <a:lnSpc>
+                <a:spcPct val="115000"/>
+              </a:lnSpc>
+              <a:spcAft>
+                <a:spcPts val="300"/>
+              </a:spcAft>
+            </a:pPr>
+            <a:r>
+              <a:rPr sz="1400" b="0">
+                <a:solidFill>
+                  <a:srgbClr val="1F2937"/>
+                </a:solidFill>
+                <a:latin typeface="Microsoft YaHei"/>
+                <a:ea typeface="Microsoft YaHei"/>
+                <a:cs typeface="Microsoft YaHei"/>
+              </a:rPr>
+              <a:t>能不能改算例里的性能字段</a:t>
+            </a:r>
+          </a:p>
+          <a:p>
+            <a:pPr algn="l">
+              <a:lnSpc>
+                <a:spcPct val="115000"/>
+              </a:lnSpc>
+              <a:spcAft>
+                <a:spcPts val="300"/>
+              </a:spcAft>
+            </a:pPr>
+            <a:r>
+              <a:rPr sz="1400" b="0">
+                <a:solidFill>
+                  <a:srgbClr val="1F2937"/>
+                </a:solidFill>
+                <a:latin typeface="Consolas"/>
+                <a:ea typeface="Microsoft YaHei"/>
+                <a:cs typeface="Microsoft YaHei"/>
+              </a:rPr>
+              <a:t>--single</a:t>
+            </a:r>
+            <a:r>
+              <a:rPr sz="1400" b="0">
+                <a:solidFill>
+                  <a:srgbClr val="1F2937"/>
+                </a:solidFill>
+                <a:latin typeface="Microsoft YaHei"/>
+                <a:ea typeface="Microsoft YaHei"/>
+                <a:cs typeface="Microsoft YaHei"/>
+              </a:rPr>
+              <a:t> 的精度能不能接受</a:t>
+            </a:r>
+          </a:p>
+        </p:txBody>
+      </p:sp>
+      <p:sp>
+        <p:nvSpPr>
+          <p:cNvPr id="17" name="Rectangle 16"/>
+          <p:cNvSpPr/>
+          <p:nvPr/>
+        </p:nvSpPr>
+        <p:spPr>
+          <a:xfrm>
+            <a:off x="457200" y="5989320"/>
+            <a:ext cx="11274552" cy="566928"/>
+          </a:xfrm>
+          <a:prstGeom prst="rect">
+            <a:avLst/>
+          </a:prstGeom>
+          <a:solidFill>
+            <a:srgbClr val="F1F5F9"/>
+          </a:solidFill>
+          <a:ln>
+            <a:noFill/>
+          </a:ln>
+          <a:effectLst/>
+        </p:spPr>
+        <p:style>
+          <a:lnRef idx="1">
+            <a:schemeClr val="accent1"/>
+          </a:lnRef>
+          <a:fillRef idx="3">
+            <a:schemeClr val="accent1"/>
+          </a:fillRef>
+          <a:effectRef idx="2">
+            <a:schemeClr val="accent1"/>
+          </a:effectRef>
+          <a:fontRef idx="minor">
+            <a:schemeClr val="lt1"/>
+          </a:fontRef>
+        </p:style>
+        <p:txBody>
+          <a:bodyPr rtlCol="0" anchor="ctr"/>
+          <a:lstStyle/>
+          <a:p>
+            <a:pPr algn="ctr"/>
+          </a:p>
+        </p:txBody>
+      </p:sp>
+      <p:sp>
+        <p:nvSpPr>
+          <p:cNvPr id="18" name="Rectangle 17"/>
+          <p:cNvSpPr/>
+          <p:nvPr/>
+        </p:nvSpPr>
+        <p:spPr>
+          <a:xfrm>
+            <a:off x="457200" y="5989320"/>
+            <a:ext cx="73152" cy="566928"/>
+          </a:xfrm>
+          <a:prstGeom prst="rect">
+            <a:avLst/>
+          </a:prstGeom>
+          <a:solidFill>
+            <a:srgbClr val="F97316"/>
+          </a:solidFill>
+          <a:ln>
+            <a:noFill/>
+          </a:ln>
+          <a:effectLst/>
+        </p:spPr>
+        <p:style>
+          <a:lnRef idx="1">
+            <a:schemeClr val="accent1"/>
+          </a:lnRef>
+          <a:fillRef idx="3">
+            <a:schemeClr val="accent1"/>
+          </a:fillRef>
+          <a:effectRef idx="2">
+            <a:schemeClr val="accent1"/>
+          </a:effectRef>
+          <a:fontRef idx="minor">
+            <a:schemeClr val="lt1"/>
+          </a:fontRef>
+        </p:style>
+        <p:txBody>
+          <a:bodyPr rtlCol="0" anchor="ctr"/>
+          <a:lstStyle/>
+          <a:p>
+            <a:pPr algn="ctr"/>
+          </a:p>
+        </p:txBody>
+      </p:sp>
+      <p:sp>
+        <p:nvSpPr>
+          <p:cNvPr id="19" name="TextBox 18"/>
+          <p:cNvSpPr txBox="1"/>
+          <p:nvPr/>
+        </p:nvSpPr>
+        <p:spPr>
+          <a:xfrm>
+            <a:off x="640080" y="5989320"/>
+            <a:ext cx="11018520" cy="566928"/>
+          </a:xfrm>
+          <a:prstGeom prst="rect">
+            <a:avLst/>
+          </a:prstGeom>
+          <a:noFill/>
+        </p:spPr>
+        <p:txBody>
+          <a:bodyPr wrap="square" anchor="ctr" lIns="73152" rIns="73152" tIns="36576" bIns="36576">
+            <a:noAutofit/>
+          </a:bodyPr>
+          <a:lstStyle/>
+          <a:p>
+            <a:pPr algn="l">
+              <a:lnSpc>
+                <a:spcPct val="115000"/>
+              </a:lnSpc>
+              <a:spcAft>
+                <a:spcPts val="0"/>
+              </a:spcAft>
+            </a:pPr>
+            <a:r>
+              <a:rPr sz="1600" b="0">
+                <a:solidFill>
+                  <a:srgbClr val="1F2937"/>
+                </a:solidFill>
+                <a:latin typeface="Microsoft YaHei"/>
+                <a:ea typeface="Microsoft YaHei"/>
+                <a:cs typeface="Microsoft YaHei"/>
+              </a:rPr>
+              <a:t>LTO 在四个官方算例上都快 20%–28%；正式采用前，还要带着它跑一遍 </a:t>
+            </a:r>
+            <a:r>
+              <a:rPr sz="1600" b="0">
+                <a:solidFill>
+                  <a:srgbClr val="1F2937"/>
+                </a:solidFill>
+                <a:latin typeface="Consolas"/>
+                <a:ea typeface="Microsoft YaHei"/>
+                <a:cs typeface="Microsoft YaHei"/>
+              </a:rPr>
+              <a:t>./mfc.sh test</a:t>
+            </a:r>
+          </a:p>
+        </p:txBody>
+      </p:sp>
+    </p:spTree>
+  </p:cSld>
+  <p:clrMapOvr>
+    <a:masterClrMapping/>
+  </p:clrMapOvr>
+</p:sld>
+</file>
+
+<file path=ppt/slides/slide2.xml><?xml version="1.0" encoding="utf-8"?>
+<p:sld xmlns:a="http://schemas.openxmlformats.org/drawingml/2006/main" xmlns:p="http://schemas.openxmlformats.org/presentationml/2006/main" xmlns:r="http://schemas.openxmlformats.org/officeDocument/2006/relationships">
+  <p:cSld>
+    <p:spTree>
+      <p:nvGrpSpPr>
+        <p:cNvPr id="1" name=""/>
+        <p:cNvGrpSpPr/>
+        <p:nvPr/>
+      </p:nvGrpSpPr>
+      <p:grpSpPr/>
+      <p:sp>
+        <p:nvSpPr>
+          <p:cNvPr id="2" name="Rectangle 1"/>
+          <p:cNvSpPr/>
+          <p:nvPr/>
+        </p:nvSpPr>
+        <p:spPr>
+          <a:xfrm>
+            <a:off x="274320" y="347472"/>
+            <a:ext cx="82296" cy="457200"/>
+          </a:xfrm>
+          <a:prstGeom prst="rect">
+            <a:avLst/>
+          </a:prstGeom>
+          <a:solidFill>
+            <a:srgbClr val="F97316"/>
+          </a:solidFill>
+          <a:ln>
+            <a:noFill/>
+          </a:ln>
+          <a:effectLst/>
+        </p:spPr>
+        <p:style>
+          <a:lnRef idx="1">
+            <a:schemeClr val="accent1"/>
+          </a:lnRef>
+          <a:fillRef idx="3">
+            <a:schemeClr val="accent1"/>
+          </a:fillRef>
+          <a:effectRef idx="2">
+            <a:schemeClr val="accent1"/>
+          </a:effectRef>
+          <a:fontRef idx="minor">
+            <a:schemeClr val="lt1"/>
+          </a:fontRef>
+        </p:style>
+        <p:txBody>
+          <a:bodyPr rtlCol="0" anchor="ctr"/>
+          <a:lstStyle/>
+          <a:p>
+            <a:pPr algn="ctr"/>
+          </a:p>
+        </p:txBody>
+      </p:sp>
+      <p:sp>
+        <p:nvSpPr>
+          <p:cNvPr id="3" name="TextBox 2"/>
+          <p:cNvSpPr txBox="1"/>
+          <p:nvPr/>
+        </p:nvSpPr>
+        <p:spPr>
+          <a:xfrm>
+            <a:off x="457200" y="237744"/>
+            <a:ext cx="9509760" cy="676656"/>
+          </a:xfrm>
+          <a:prstGeom prst="rect">
+            <a:avLst/>
+          </a:prstGeom>
+          <a:noFill/>
+        </p:spPr>
+        <p:txBody>
+          <a:bodyPr wrap="square" anchor="ctr" lIns="73152" rIns="73152" tIns="36576" bIns="36576">
+            <a:noAutofit/>
+          </a:bodyPr>
+          <a:lstStyle/>
+          <a:p>
+            <a:pPr algn="l">
+              <a:lnSpc>
+                <a:spcPct val="115000"/>
+              </a:lnSpc>
+              <a:spcAft>
+                <a:spcPts val="0"/>
+              </a:spcAft>
+            </a:pPr>
+            <a:r>
+              <a:rPr sz="2600" b="1">
+                <a:solidFill>
+                  <a:srgbClr val="1E3A5F"/>
+                </a:solidFill>
+                <a:latin typeface="Microsoft YaHei"/>
+                <a:ea typeface="Microsoft YaHei"/>
+                <a:cs typeface="Microsoft YaHei"/>
+              </a:rPr>
+              <a:t>六层全貌：收益在第三层和第四层</a:t>
+            </a:r>
+          </a:p>
+        </p:txBody>
+      </p:sp>
+      <p:sp>
+        <p:nvSpPr>
+          <p:cNvPr id="4" name="TextBox 3"/>
+          <p:cNvSpPr txBox="1"/>
+          <p:nvPr/>
+        </p:nvSpPr>
+        <p:spPr>
+          <a:xfrm>
+            <a:off x="9784080" y="310896"/>
+            <a:ext cx="2103120" cy="457200"/>
+          </a:xfrm>
+          <a:prstGeom prst="rect">
+            <a:avLst/>
+          </a:prstGeom>
+          <a:noFill/>
+        </p:spPr>
+        <p:txBody>
+          <a:bodyPr wrap="square" anchor="ctr" lIns="73152" rIns="73152" tIns="36576" bIns="36576">
+            <a:noAutofit/>
+          </a:bodyPr>
+          <a:lstStyle/>
+          <a:p>
+            <a:pPr algn="r">
+              <a:lnSpc>
+                <a:spcPct val="115000"/>
+              </a:lnSpc>
+              <a:spcAft>
+                <a:spcPts val="0"/>
+              </a:spcAft>
+            </a:pPr>
+            <a:r>
+              <a:rPr sz="1200" b="0">
+                <a:solidFill>
+                  <a:srgbClr val="64748B"/>
+                </a:solidFill>
+                <a:latin typeface="Microsoft YaHei"/>
+                <a:ea typeface="Microsoft YaHei"/>
+                <a:cs typeface="Microsoft YaHei"/>
+              </a:rPr>
+              <a:t>全貌　2 / 11</a:t>
+            </a:r>
+          </a:p>
+        </p:txBody>
+      </p:sp>
+      <p:cxnSp>
+        <p:nvCxnSpPr>
+          <p:cNvPr id="5" name="Connector 4"/>
+          <p:cNvCxnSpPr/>
+          <p:nvPr/>
+        </p:nvCxnSpPr>
+        <p:spPr>
+          <a:xfrm>
+            <a:off x="457200" y="969264"/>
+            <a:ext cx="11274552" cy="0"/>
+          </a:xfrm>
+          <a:prstGeom prst="line">
+            <a:avLst/>
+          </a:prstGeom>
+          <a:ln w="12700">
+            <a:solidFill>
+              <a:srgbClr val="E2E8F0"/>
+            </a:solidFill>
+          </a:ln>
+        </p:spPr>
+        <p:style>
+          <a:lnRef idx="2">
+            <a:schemeClr val="accent1"/>
+          </a:lnRef>
+          <a:fillRef idx="0">
+            <a:schemeClr val="accent1"/>
+          </a:fillRef>
+          <a:effectRef idx="1">
+            <a:schemeClr val="accent1"/>
+          </a:effectRef>
+          <a:fontRef idx="minor">
+            <a:schemeClr val="tx1"/>
+          </a:fontRef>
+        </p:style>
+      </p:cxnSp>
       <p:sp>
         <p:nvSpPr>
           <p:cNvPr id="6" name="TextBox 5"/>
@@ -4723,7 +6518,7 @@
                 <a:ea typeface="Microsoft YaHei"/>
                 <a:cs typeface="Microsoft YaHei"/>
               </a:rPr>
-              <a:t>26.9 和 25.9 一样快（+0.2%）</a:t>
+              <a:t>26.9 不更快，加了 LTO 也一样</a:t>
             </a:r>
           </a:p>
         </p:txBody>
@@ -5189,7 +6984,7 @@
                 <a:ea typeface="Microsoft YaHei"/>
                 <a:cs typeface="Microsoft YaHei"/>
               </a:rPr>
-              <a:t>：寄存器上限、缓存策略等</a:t>
+              <a:t>：LTO、寄存器上限等</a:t>
             </a:r>
           </a:p>
         </p:txBody>
@@ -5299,7 +7094,7 @@
                 <a:ea typeface="Microsoft YaHei"/>
                 <a:cs typeface="Microsoft YaHei"/>
               </a:rPr>
-              <a:t>寄存器上限 160：快 6.1%，结果不变</a:t>
+              <a:t>LTO：四个官方算例快 20%–28%</a:t>
             </a:r>
           </a:p>
         </p:txBody>
@@ -5765,7 +7560,7 @@
                 <a:ea typeface="Microsoft YaHei"/>
                 <a:cs typeface="Microsoft YaHei"/>
               </a:rPr>
-              <a:t>rank 数、GPU 分配、绑核、环境变量</a:t>
+              <a:t>rank 数、GPU 分配、绑核、MPS</a:t>
             </a:r>
           </a:p>
         </p:txBody>
@@ -5875,7 +7670,7 @@
                 <a:ea typeface="Microsoft YaHei"/>
                 <a:cs typeface="Microsoft YaHei"/>
               </a:rPr>
-              <a:t>每卡 1 个 rank；绑核在噪声内</a:t>
+              <a:t>每卡 1 个 rank；MPS 多 rank 不更快</a:t>
             </a:r>
           </a:p>
         </p:txBody>
@@ -6042,7 +7837,7 @@
                 <a:ea typeface="Microsoft YaHei"/>
                 <a:cs typeface="Microsoft YaHei"/>
               </a:rPr>
-              <a:t>时钟、功耗上限、MPS</a:t>
+              <a:t>时钟、功耗上限、持久模式</a:t>
             </a:r>
           </a:p>
         </p:txBody>
@@ -6231,7 +8026,7 @@
                 <a:ea typeface="Microsoft YaHei"/>
                 <a:cs typeface="Microsoft YaHei"/>
               </a:rPr>
-              <a:t>指标 grindtime：每个格点、每个方程、每次右端项计算的纳秒数，越小越快。单卡基线 0.4535；每项测 3 次取平均，噪声约 1%。</a:t>
+              <a:t>指标 grindtime：每个格点、每个方程、每次右端项计算的纳秒数，越小越快。单卡基线约 0.454；每项测 3 次取平均，和同一天的基线比，噪声约 1%。</a:t>
             </a:r>
           </a:p>
         </p:txBody>
@@ -6363,7 +8158,7 @@
                 <a:ea typeface="Microsoft YaHei"/>
                 <a:cs typeface="Microsoft YaHei"/>
               </a:rPr>
-              <a:t>两项收益可以叠加：寄存器上限 160（单卡快 6.1%）+ </a:t>
+              <a:t>两项收益可以叠加：LTO（单卡快 24%）+ </a:t>
             </a:r>
             <a:r>
               <a:rPr sz="1600" b="0">
@@ -6385,7 +8180,7 @@
                 <a:ea typeface="Microsoft YaHei"/>
                 <a:cs typeface="Microsoft YaHei"/>
               </a:rPr>
-              <a:t>（2 卡快 12.2%）</a:t>
+              <a:t>（2 卡快 12%）；用了 LTO 就不要再加寄存器上限</a:t>
             </a:r>
           </a:p>
         </p:txBody>
@@ -6491,7 +8286,7 @@
                 <a:ea typeface="Microsoft YaHei"/>
                 <a:cs typeface="Microsoft YaHei"/>
               </a:rPr>
-              <a:t>第一层 工具链：NVHPC 26.9 没有更快</a:t>
+              <a:t>第一层 工具链：NVHPC 26.9 没有更快，LTO 两个版本都有效</a:t>
             </a:r>
           </a:p>
         </p:txBody>
@@ -6535,7 +8330,7 @@
                 <a:ea typeface="Microsoft YaHei"/>
                 <a:cs typeface="Microsoft YaHei"/>
               </a:rPr>
-              <a:t>第一层　3 / 9</a:t>
+              <a:t>第一层　3 / 11</a:t>
             </a:r>
           </a:p>
         </p:txBody>
@@ -6765,7 +8560,7 @@
                 <a:ea typeface="Microsoft YaHei"/>
                 <a:cs typeface="Microsoft YaHei"/>
               </a:rPr>
-              <a:t>实测（单卡）</a:t>
+              <a:t>实测 grindtime（10-24，每项 3 次平均）</a:t>
             </a:r>
           </a:p>
         </p:txBody>
@@ -6780,7 +8575,7 @@
         </p:nvGraphicFramePr>
         <p:xfrm>
           <a:off x="6217920" y="1783080"/>
-          <a:ext cx="5513832" cy="1700784"/>
+          <a:ext cx="5513832" cy="2194560"/>
         </p:xfrm>
         <a:graphic>
           <a:graphicData uri="http://schemas.openxmlformats.org/drawingml/2006/table">
@@ -6789,12 +8584,12 @@
                 <a:tableStyleId>{5C22544A-7EE6-4342-B048-85BDC9FD1C3A}</a:tableStyleId>
               </a:tblPr>
               <a:tblGrid>
-                <a:gridCol w="1097280"/>
-                <a:gridCol w="1371600"/>
-                <a:gridCol w="1280160"/>
-                <a:gridCol w="1764792"/>
+                <a:gridCol w="1325880"/>
+                <a:gridCol w="960120"/>
+                <a:gridCol w="1234440"/>
+                <a:gridCol w="1993392"/>
               </a:tblGrid>
-              <a:tr h="566928">
+              <a:tr h="548640">
                 <a:tc>
                   <a:txBody>
                     <a:bodyPr wrap="square" anchor="ctr" lIns="73152" rIns="73152" tIns="36576" bIns="36576">
@@ -6811,7 +8606,7 @@
                         </a:spcAft>
                       </a:pPr>
                       <a:r>
-                        <a:rPr sz="1600" b="1">
+                        <a:rPr sz="1500" b="1">
                           <a:solidFill>
                             <a:srgbClr val="FFFFFF"/>
                           </a:solidFill>
@@ -6845,7 +8640,7 @@
                         </a:spcAft>
                       </a:pPr>
                       <a:r>
-                        <a:rPr sz="1600" b="1">
+                        <a:rPr sz="1500" b="1">
                           <a:solidFill>
                             <a:srgbClr val="FFFFFF"/>
                           </a:solidFill>
@@ -6853,7 +8648,7 @@
                           <a:ea typeface="Microsoft YaHei"/>
                           <a:cs typeface="Microsoft YaHei"/>
                         </a:rPr>
-                        <a:t>grindtime</a:t>
+                        <a:t>单卡</a:t>
                       </a:r>
                     </a:p>
                   </a:txBody>
@@ -6879,7 +8674,7 @@
                         </a:spcAft>
                       </a:pPr>
                       <a:r>
-                        <a:rPr sz="1600" b="1">
+                        <a:rPr sz="1500" b="1">
                           <a:solidFill>
                             <a:srgbClr val="FFFFFF"/>
                           </a:solidFill>
@@ -6887,7 +8682,7 @@
                           <a:ea typeface="Microsoft YaHei"/>
                           <a:cs typeface="Microsoft YaHei"/>
                         </a:rPr>
-                        <a:t>与基线比</a:t>
+                        <a:t>单卡 + LTO</a:t>
                       </a:r>
                     </a:p>
                   </a:txBody>
@@ -6913,7 +8708,7 @@
                         </a:spcAft>
                       </a:pPr>
                       <a:r>
-                        <a:rPr sz="1600" b="1">
+                        <a:rPr sz="1500" b="1">
                           <a:solidFill>
                             <a:srgbClr val="FFFFFF"/>
                           </a:solidFill>
@@ -6921,7 +8716,7 @@
                           <a:ea typeface="Microsoft YaHei"/>
                           <a:cs typeface="Microsoft YaHei"/>
                         </a:rPr>
-                        <a:t>输出</a:t>
+                        <a:t>2 卡 + rdma + LTO</a:t>
                       </a:r>
                     </a:p>
                   </a:txBody>
@@ -6932,7 +8727,7 @@
                   </a:tcPr>
                 </a:tc>
               </a:tr>
-              <a:tr h="566928">
+              <a:tr h="548640">
                 <a:tc>
                   <a:txBody>
                     <a:bodyPr wrap="square" anchor="ctr" lIns="73152" rIns="73152" tIns="36576" bIns="36576">
@@ -6949,7 +8744,7 @@
                         </a:spcAft>
                       </a:pPr>
                       <a:r>
-                        <a:rPr sz="1600" b="1">
+                        <a:rPr sz="1500" b="1">
                           <a:solidFill>
                             <a:srgbClr val="1F2937"/>
                           </a:solidFill>
@@ -6983,7 +8778,7 @@
                         </a:spcAft>
                       </a:pPr>
                       <a:r>
-                        <a:rPr sz="1600" b="0">
+                        <a:rPr sz="1500" b="0">
                           <a:solidFill>
                             <a:srgbClr val="1F2937"/>
                           </a:solidFill>
@@ -7017,7 +8812,7 @@
                         </a:spcAft>
                       </a:pPr>
                       <a:r>
-                        <a:rPr sz="1600" b="0">
+                        <a:rPr sz="1500" b="0">
                           <a:solidFill>
                             <a:srgbClr val="1F2937"/>
                           </a:solidFill>
@@ -7025,7 +8820,7 @@
                           <a:ea typeface="Microsoft YaHei"/>
                           <a:cs typeface="Microsoft YaHei"/>
                         </a:rPr>
-                        <a:t>基线</a:t>
+                        <a:t>0.3466</a:t>
                       </a:r>
                     </a:p>
                   </a:txBody>
@@ -7051,7 +8846,7 @@
                         </a:spcAft>
                       </a:pPr>
                       <a:r>
-                        <a:rPr sz="1600" b="0">
+                        <a:rPr sz="1500" b="0">
                           <a:solidFill>
                             <a:srgbClr val="1F2937"/>
                           </a:solidFill>
@@ -7059,7 +8854,7 @@
                           <a:ea typeface="Microsoft YaHei"/>
                           <a:cs typeface="Microsoft YaHei"/>
                         </a:rPr>
-                        <a:t>—</a:t>
+                        <a:t>0.1857</a:t>
                       </a:r>
                     </a:p>
                   </a:txBody>
@@ -7070,7 +8865,7 @@
                   </a:tcPr>
                 </a:tc>
               </a:tr>
-              <a:tr h="566928">
+              <a:tr h="548640">
                 <a:tc>
                   <a:txBody>
                     <a:bodyPr wrap="square" anchor="ctr" lIns="73152" rIns="73152" tIns="36576" bIns="36576">
@@ -7087,7 +8882,7 @@
                         </a:spcAft>
                       </a:pPr>
                       <a:r>
-                        <a:rPr sz="1600" b="1">
+                        <a:rPr sz="1500" b="1">
                           <a:solidFill>
                             <a:srgbClr val="1F2937"/>
                           </a:solidFill>
@@ -7121,7 +8916,7 @@
                         </a:spcAft>
                       </a:pPr>
                       <a:r>
-                        <a:rPr sz="1600" b="0">
+                        <a:rPr sz="1500" b="0">
                           <a:solidFill>
                             <a:srgbClr val="1F2937"/>
                           </a:solidFill>
@@ -7129,7 +8924,7 @@
                           <a:ea typeface="Microsoft YaHei"/>
                           <a:cs typeface="Microsoft YaHei"/>
                         </a:rPr>
-                        <a:t>0.4544</a:t>
+                        <a:t>0.4573</a:t>
                       </a:r>
                     </a:p>
                   </a:txBody>
@@ -7155,15 +8950,15 @@
                         </a:spcAft>
                       </a:pPr>
                       <a:r>
-                        <a:rPr sz="1600" b="1">
+                        <a:rPr sz="1500" b="0">
                           <a:solidFill>
-                            <a:srgbClr val="64748B"/>
+                            <a:srgbClr val="1F2937"/>
                           </a:solidFill>
                           <a:latin typeface="Microsoft YaHei"/>
                           <a:ea typeface="Microsoft YaHei"/>
                           <a:cs typeface="Microsoft YaHei"/>
                         </a:rPr>
-                        <a:t>+0.2%</a:t>
+                        <a:t>0.3484</a:t>
                       </a:r>
                     </a:p>
                   </a:txBody>
@@ -7189,7 +8984,7 @@
                         </a:spcAft>
                       </a:pPr>
                       <a:r>
-                        <a:rPr sz="1600" b="0">
+                        <a:rPr sz="1500" b="0">
                           <a:solidFill>
                             <a:srgbClr val="1F2937"/>
                           </a:solidFill>
@@ -7197,7 +8992,7 @@
                           <a:ea typeface="Microsoft YaHei"/>
                           <a:cs typeface="Microsoft YaHei"/>
                         </a:rPr>
-                        <a:t>舍入级差异</a:t>
+                        <a:t>0.1881</a:t>
                       </a:r>
                     </a:p>
                   </a:txBody>
@@ -7208,6 +9003,144 @@
                   </a:tcPr>
                 </a:tc>
               </a:tr>
+              <a:tr h="548640">
+                <a:tc>
+                  <a:txBody>
+                    <a:bodyPr wrap="square" anchor="ctr" lIns="73152" rIns="73152" tIns="36576" bIns="36576">
+                      <a:noAutofit/>
+                    </a:bodyPr>
+                    <a:lstStyle/>
+                    <a:p>
+                      <a:pPr algn="l">
+                        <a:lnSpc>
+                          <a:spcPct val="115000"/>
+                        </a:lnSpc>
+                        <a:spcAft>
+                          <a:spcPts val="0"/>
+                        </a:spcAft>
+                      </a:pPr>
+                      <a:r>
+                        <a:rPr sz="1500" b="1">
+                          <a:solidFill>
+                            <a:srgbClr val="1F2937"/>
+                          </a:solidFill>
+                          <a:latin typeface="Microsoft YaHei"/>
+                          <a:ea typeface="Microsoft YaHei"/>
+                          <a:cs typeface="Microsoft YaHei"/>
+                        </a:rPr>
+                        <a:t>26.9 比 25.9</a:t>
+                      </a:r>
+                    </a:p>
+                  </a:txBody>
+                  <a:tcPr marL="91440" marR="91440" marT="27432" marB="27432" anchor="ctr">
+                    <a:solidFill>
+                      <a:srgbClr val="F8FAFC"/>
+                    </a:solidFill>
+                  </a:tcPr>
+                </a:tc>
+                <a:tc>
+                  <a:txBody>
+                    <a:bodyPr wrap="square" anchor="ctr" lIns="73152" rIns="73152" tIns="36576" bIns="36576">
+                      <a:noAutofit/>
+                    </a:bodyPr>
+                    <a:lstStyle/>
+                    <a:p>
+                      <a:pPr algn="l">
+                        <a:lnSpc>
+                          <a:spcPct val="115000"/>
+                        </a:lnSpc>
+                        <a:spcAft>
+                          <a:spcPts val="0"/>
+                        </a:spcAft>
+                      </a:pPr>
+                      <a:r>
+                        <a:rPr sz="1500" b="1">
+                          <a:solidFill>
+                            <a:srgbClr val="64748B"/>
+                          </a:solidFill>
+                          <a:latin typeface="Microsoft YaHei"/>
+                          <a:ea typeface="Microsoft YaHei"/>
+                          <a:cs typeface="Microsoft YaHei"/>
+                        </a:rPr>
+                        <a:t>+0.8%</a:t>
+                      </a:r>
+                    </a:p>
+                  </a:txBody>
+                  <a:tcPr marL="91440" marR="91440" marT="27432" marB="27432" anchor="ctr">
+                    <a:solidFill>
+                      <a:srgbClr val="F8FAFC"/>
+                    </a:solidFill>
+                  </a:tcPr>
+                </a:tc>
+                <a:tc>
+                  <a:txBody>
+                    <a:bodyPr wrap="square" anchor="ctr" lIns="73152" rIns="73152" tIns="36576" bIns="36576">
+                      <a:noAutofit/>
+                    </a:bodyPr>
+                    <a:lstStyle/>
+                    <a:p>
+                      <a:pPr algn="l">
+                        <a:lnSpc>
+                          <a:spcPct val="115000"/>
+                        </a:lnSpc>
+                        <a:spcAft>
+                          <a:spcPts val="0"/>
+                        </a:spcAft>
+                      </a:pPr>
+                      <a:r>
+                        <a:rPr sz="1500" b="1">
+                          <a:solidFill>
+                            <a:srgbClr val="64748B"/>
+                          </a:solidFill>
+                          <a:latin typeface="Microsoft YaHei"/>
+                          <a:ea typeface="Microsoft YaHei"/>
+                          <a:cs typeface="Microsoft YaHei"/>
+                        </a:rPr>
+                        <a:t>+0.5%</a:t>
+                      </a:r>
+                    </a:p>
+                  </a:txBody>
+                  <a:tcPr marL="91440" marR="91440" marT="27432" marB="27432" anchor="ctr">
+                    <a:solidFill>
+                      <a:srgbClr val="F8FAFC"/>
+                    </a:solidFill>
+                  </a:tcPr>
+                </a:tc>
+                <a:tc>
+                  <a:txBody>
+                    <a:bodyPr wrap="square" anchor="ctr" lIns="73152" rIns="73152" tIns="36576" bIns="36576">
+                      <a:noAutofit/>
+                    </a:bodyPr>
+                    <a:lstStyle/>
+                    <a:p>
+                      <a:pPr algn="l">
+                        <a:lnSpc>
+                          <a:spcPct val="115000"/>
+                        </a:lnSpc>
+                        <a:spcAft>
+                          <a:spcPts val="0"/>
+                        </a:spcAft>
+                      </a:pPr>
+                      <a:r>
+                        <a:rPr sz="1500" b="1">
+                          <a:solidFill>
+                            <a:srgbClr val="64748B"/>
+                          </a:solidFill>
+                          <a:latin typeface="Microsoft YaHei"/>
+                          <a:ea typeface="Microsoft YaHei"/>
+                          <a:cs typeface="Microsoft YaHei"/>
+                        </a:rPr>
+                        <a:t>+1.3%</a:t>
+                      </a:r>
+                    </a:p>
+                  </a:txBody>
+                  <a:tcPr marL="91440" marR="91440" marT="27432" marB="27432" anchor="ctr">
+                    <a:solidFill>
+                      <a:srgbClr val="F8FAFC"/>
+                    </a:solidFill>
+                  </a:tcPr>
+                </a:tc>
+              </a:tr>
             </a:tbl>
           </a:graphicData>
         </a:graphic>
@@ -7220,8 +9153,8 @@
         </p:nvSpPr>
         <p:spPr>
           <a:xfrm>
-            <a:off x="6217920" y="3703320"/>
-            <a:ext cx="5486400" cy="1097280"/>
+            <a:off x="6217920" y="4160520"/>
+            <a:ext cx="5486400" cy="1463040"/>
           </a:xfrm>
           <a:prstGeom prst="rect">
             <a:avLst/>
@@ -7239,7 +9172,7 @@
                 <a:spcPct val="130000"/>
               </a:lnSpc>
               <a:spcAft>
-                <a:spcPts val="0"/>
+                <a:spcPts val="600"/>
               </a:spcAft>
             </a:pPr>
             <a:r>
@@ -7251,7 +9184,7 @@
                 <a:ea typeface="Microsoft YaHei"/>
                 <a:cs typeface="Microsoft YaHei"/>
               </a:rPr>
-              <a:t>WENO kernel 每线程寄存器：26.9 用 200 个，25.9 用 196 个</a:t>
+              <a:t>两个版本的输出只差在舍入级；同一版本里 LTO 不改变输出</a:t>
             </a:r>
           </a:p>
           <a:p>
@@ -7260,7 +9193,7 @@
                 <a:spcPct val="130000"/>
               </a:lnSpc>
               <a:spcAft>
-                <a:spcPts val="0"/>
+                <a:spcPts val="600"/>
               </a:spcAft>
             </a:pPr>
             <a:r>
@@ -7268,22 +9201,22 @@
                 <a:solidFill>
                   <a:srgbClr val="64748B"/>
                 </a:solidFill>
+                <a:latin typeface="Consolas"/>
+                <a:ea typeface="Microsoft YaHei"/>
+                <a:cs typeface="Microsoft YaHei"/>
+              </a:rPr>
+              <a:t>-acc=nowait</a:t>
+            </a:r>
+            <a:r>
+              <a:rPr sz="1400" b="0">
+                <a:solidFill>
+                  <a:srgbClr val="64748B"/>
+                </a:solidFill>
                 <a:latin typeface="Microsoft YaHei"/>
                 <a:ea typeface="Microsoft YaHei"/>
                 <a:cs typeface="Microsoft YaHei"/>
               </a:rPr>
-              <a:t>第 30 步动量的最大相对误差 3.4 × 10</a:t>
-            </a:r>
-            <a:r>
-              <a:rPr sz="1400" b="0" baseline="30000">
-                <a:solidFill>
-                  <a:srgbClr val="64748B"/>
-                </a:solidFill>
-                <a:latin typeface="Microsoft YaHei"/>
-                <a:ea typeface="Microsoft YaHei"/>
-                <a:cs typeface="Microsoft YaHei"/>
-              </a:rPr>
-              <a:t>−11</a:t>
+              <a:t> 在两个版本里都不减少同步（26.9 也是 14,771 次）</a:t>
             </a:r>
           </a:p>
         </p:txBody>
@@ -7415,7 +9348,7 @@
                 <a:ea typeface="Microsoft YaHei"/>
                 <a:cs typeface="Microsoft YaHei"/>
               </a:rPr>
-              <a:t>继续用 25.9；换版本要重跑 </a:t>
+              <a:t>继续用 25.9 + LTO；换版本要重跑 </a:t>
             </a:r>
             <a:r>
               <a:rPr sz="1600" b="0">
@@ -7587,7 +9520,7 @@
                 <a:ea typeface="Microsoft YaHei"/>
                 <a:cs typeface="Microsoft YaHei"/>
               </a:rPr>
-              <a:t>第二层　4 / 9</a:t>
+              <a:t>第二层　4 / 11</a:t>
             </a:r>
           </a:p>
         </p:txBody>
@@ -9115,7 +11048,7 @@
                 <a:ea typeface="Microsoft YaHei"/>
                 <a:cs typeface="Microsoft YaHei"/>
               </a:rPr>
-              <a:t>第三层 编译器选项：寄存器上限 160 快 6.1%</a:t>
+              <a:t>第三层 编译器选项：链接时优化（LTO）快 24%</a:t>
             </a:r>
           </a:p>
         </p:txBody>
@@ -9159,7 +11092,2554 @@
                 <a:ea typeface="Microsoft YaHei"/>
                 <a:cs typeface="Microsoft YaHei"/>
               </a:rPr>
-              <a:t>第三层　5 / 9</a:t>
+              <a:t>第三层　5 / 11</a:t>
+            </a:r>
+          </a:p>
+        </p:txBody>
+      </p:sp>
+      <p:cxnSp>
+        <p:nvCxnSpPr>
+          <p:cNvPr id="5" name="Connector 4"/>
+          <p:cNvCxnSpPr/>
+          <p:nvPr/>
+        </p:nvCxnSpPr>
+        <p:spPr>
+          <a:xfrm>
+            <a:off x="457200" y="969264"/>
+            <a:ext cx="11274552" cy="0"/>
+          </a:xfrm>
+          <a:prstGeom prst="line">
+            <a:avLst/>
+          </a:prstGeom>
+          <a:ln w="12700">
+            <a:solidFill>
+              <a:srgbClr val="E2E8F0"/>
+            </a:solidFill>
+          </a:ln>
+        </p:spPr>
+        <p:style>
+          <a:lnRef idx="2">
+            <a:schemeClr val="accent1"/>
+          </a:lnRef>
+          <a:fillRef idx="0">
+            <a:schemeClr val="accent1"/>
+          </a:fillRef>
+          <a:effectRef idx="1">
+            <a:schemeClr val="accent1"/>
+          </a:effectRef>
+          <a:fontRef idx="minor">
+            <a:schemeClr val="tx1"/>
+          </a:fontRef>
+        </p:style>
+      </p:cxnSp>
+      <p:sp>
+        <p:nvSpPr>
+          <p:cNvPr id="6" name="TextBox 5"/>
+          <p:cNvSpPr txBox="1"/>
+          <p:nvPr/>
+        </p:nvSpPr>
+        <p:spPr>
+          <a:xfrm>
+            <a:off x="548640" y="1280160"/>
+            <a:ext cx="5760720" cy="457200"/>
+          </a:xfrm>
+          <a:prstGeom prst="rect">
+            <a:avLst/>
+          </a:prstGeom>
+          <a:noFill/>
+        </p:spPr>
+        <p:txBody>
+          <a:bodyPr wrap="square" anchor="t" lIns="73152" rIns="73152" tIns="36576" bIns="36576">
+            <a:noAutofit/>
+          </a:bodyPr>
+          <a:lstStyle/>
+          <a:p>
+            <a:pPr algn="l">
+              <a:lnSpc>
+                <a:spcPct val="115000"/>
+              </a:lnSpc>
+              <a:spcAft>
+                <a:spcPts val="0"/>
+              </a:spcAft>
+            </a:pPr>
+            <a:r>
+              <a:rPr sz="1800" b="1">
+                <a:solidFill>
+                  <a:srgbClr val="1E3A5F"/>
+                </a:solidFill>
+                <a:latin typeface="Microsoft YaHei"/>
+                <a:ea typeface="Microsoft YaHei"/>
+                <a:cs typeface="Microsoft YaHei"/>
+              </a:rPr>
+              <a:t>实测（10-24，每项 3 次平均）</a:t>
+            </a:r>
+          </a:p>
+        </p:txBody>
+      </p:sp>
+      <p:graphicFrame>
+        <p:nvGraphicFramePr>
+          <p:cNvPr id="7" name="Table 6"/>
+          <p:cNvGraphicFramePr>
+            <a:graphicFrameLocks noGrp="1"/>
+          </p:cNvGraphicFramePr>
+          <p:nvPr/>
+        </p:nvGraphicFramePr>
+        <p:xfrm>
+          <a:off x="548640" y="1783080"/>
+          <a:ext cx="5943600" cy="2834640"/>
+        </p:xfrm>
+        <a:graphic>
+          <a:graphicData uri="http://schemas.openxmlformats.org/drawingml/2006/table">
+            <a:tbl>
+              <a:tblPr firstRow="1" bandRow="1">
+                <a:tableStyleId>{5C22544A-7EE6-4342-B048-85BDC9FD1C3A}</a:tableStyleId>
+              </a:tblPr>
+              <a:tblGrid>
+                <a:gridCol w="2286000"/>
+                <a:gridCol w="1554480"/>
+                <a:gridCol w="2103120"/>
+              </a:tblGrid>
+              <a:tr h="566928">
+                <a:tc>
+                  <a:txBody>
+                    <a:bodyPr wrap="square" anchor="ctr" lIns="73152" rIns="73152" tIns="36576" bIns="36576">
+                      <a:noAutofit/>
+                    </a:bodyPr>
+                    <a:lstStyle/>
+                    <a:p>
+                      <a:pPr algn="l">
+                        <a:lnSpc>
+                          <a:spcPct val="115000"/>
+                        </a:lnSpc>
+                        <a:spcAft>
+                          <a:spcPts val="0"/>
+                        </a:spcAft>
+                      </a:pPr>
+                      <a:r>
+                        <a:rPr sz="1600" b="1">
+                          <a:solidFill>
+                            <a:srgbClr val="FFFFFF"/>
+                          </a:solidFill>
+                          <a:latin typeface="Microsoft YaHei"/>
+                          <a:ea typeface="Microsoft YaHei"/>
+                          <a:cs typeface="Microsoft YaHei"/>
+                        </a:rPr>
+                        <a:t>配置</a:t>
+                      </a:r>
+                    </a:p>
+                  </a:txBody>
+                  <a:tcPr marL="91440" marR="91440" marT="27432" marB="27432" anchor="ctr">
+                    <a:solidFill>
+                      <a:srgbClr val="1E3A5F"/>
+                    </a:solidFill>
+                  </a:tcPr>
+                </a:tc>
+                <a:tc>
+                  <a:txBody>
+                    <a:bodyPr wrap="square" anchor="ctr" lIns="73152" rIns="73152" tIns="36576" bIns="36576">
+                      <a:noAutofit/>
+                    </a:bodyPr>
+                    <a:lstStyle/>
+                    <a:p>
+                      <a:pPr algn="l">
+                        <a:lnSpc>
+                          <a:spcPct val="115000"/>
+                        </a:lnSpc>
+                        <a:spcAft>
+                          <a:spcPts val="0"/>
+                        </a:spcAft>
+                      </a:pPr>
+                      <a:r>
+                        <a:rPr sz="1600" b="1">
+                          <a:solidFill>
+                            <a:srgbClr val="FFFFFF"/>
+                          </a:solidFill>
+                          <a:latin typeface="Microsoft YaHei"/>
+                          <a:ea typeface="Microsoft YaHei"/>
+                          <a:cs typeface="Microsoft YaHei"/>
+                        </a:rPr>
+                        <a:t>单卡</a:t>
+                      </a:r>
+                    </a:p>
+                  </a:txBody>
+                  <a:tcPr marL="91440" marR="91440" marT="27432" marB="27432" anchor="ctr">
+                    <a:solidFill>
+                      <a:srgbClr val="1E3A5F"/>
+                    </a:solidFill>
+                  </a:tcPr>
+                </a:tc>
+                <a:tc>
+                  <a:txBody>
+                    <a:bodyPr wrap="square" anchor="ctr" lIns="73152" rIns="73152" tIns="36576" bIns="36576">
+                      <a:noAutofit/>
+                    </a:bodyPr>
+                    <a:lstStyle/>
+                    <a:p>
+                      <a:pPr algn="l">
+                        <a:lnSpc>
+                          <a:spcPct val="115000"/>
+                        </a:lnSpc>
+                        <a:spcAft>
+                          <a:spcPts val="0"/>
+                        </a:spcAft>
+                      </a:pPr>
+                      <a:r>
+                        <a:rPr sz="1600" b="1">
+                          <a:solidFill>
+                            <a:srgbClr val="FFFFFF"/>
+                          </a:solidFill>
+                          <a:latin typeface="Microsoft YaHei"/>
+                          <a:ea typeface="Microsoft YaHei"/>
+                          <a:cs typeface="Microsoft YaHei"/>
+                        </a:rPr>
+                        <a:t>2 卡 + </a:t>
+                      </a:r>
+                      <a:r>
+                        <a:rPr sz="1600" b="1">
+                          <a:solidFill>
+                            <a:srgbClr val="FFFFFF"/>
+                          </a:solidFill>
+                          <a:latin typeface="Consolas"/>
+                          <a:ea typeface="Microsoft YaHei"/>
+                          <a:cs typeface="Microsoft YaHei"/>
+                        </a:rPr>
+                        <a:t>rdma_mpi</a:t>
+                      </a:r>
+                    </a:p>
+                  </a:txBody>
+                  <a:tcPr marL="91440" marR="91440" marT="27432" marB="27432" anchor="ctr">
+                    <a:solidFill>
+                      <a:srgbClr val="1E3A5F"/>
+                    </a:solidFill>
+                  </a:tcPr>
+                </a:tc>
+              </a:tr>
+              <a:tr h="566928">
+                <a:tc>
+                  <a:txBody>
+                    <a:bodyPr wrap="square" anchor="ctr" lIns="73152" rIns="73152" tIns="36576" bIns="36576">
+                      <a:noAutofit/>
+                    </a:bodyPr>
+                    <a:lstStyle/>
+                    <a:p>
+                      <a:pPr algn="l">
+                        <a:lnSpc>
+                          <a:spcPct val="115000"/>
+                        </a:lnSpc>
+                        <a:spcAft>
+                          <a:spcPts val="0"/>
+                        </a:spcAft>
+                      </a:pPr>
+                      <a:r>
+                        <a:rPr sz="1600" b="1">
+                          <a:solidFill>
+                            <a:srgbClr val="1F2937"/>
+                          </a:solidFill>
+                          <a:latin typeface="Microsoft YaHei"/>
+                          <a:ea typeface="Microsoft YaHei"/>
+                          <a:cs typeface="Microsoft YaHei"/>
+                        </a:rPr>
+                        <a:t>基线 grindtime</a:t>
+                      </a:r>
+                    </a:p>
+                  </a:txBody>
+                  <a:tcPr marL="91440" marR="91440" marT="27432" marB="27432" anchor="ctr">
+                    <a:solidFill>
+                      <a:srgbClr val="F8FAFC"/>
+                    </a:solidFill>
+                  </a:tcPr>
+                </a:tc>
+                <a:tc>
+                  <a:txBody>
+                    <a:bodyPr wrap="square" anchor="ctr" lIns="73152" rIns="73152" tIns="36576" bIns="36576">
+                      <a:noAutofit/>
+                    </a:bodyPr>
+                    <a:lstStyle/>
+                    <a:p>
+                      <a:pPr algn="l">
+                        <a:lnSpc>
+                          <a:spcPct val="115000"/>
+                        </a:lnSpc>
+                        <a:spcAft>
+                          <a:spcPts val="0"/>
+                        </a:spcAft>
+                      </a:pPr>
+                      <a:r>
+                        <a:rPr sz="1600" b="0">
+                          <a:solidFill>
+                            <a:srgbClr val="1F2937"/>
+                          </a:solidFill>
+                          <a:latin typeface="Microsoft YaHei"/>
+                          <a:ea typeface="Microsoft YaHei"/>
+                          <a:cs typeface="Microsoft YaHei"/>
+                        </a:rPr>
+                        <a:t>0.4569</a:t>
+                      </a:r>
+                    </a:p>
+                  </a:txBody>
+                  <a:tcPr marL="91440" marR="91440" marT="27432" marB="27432" anchor="ctr">
+                    <a:solidFill>
+                      <a:srgbClr val="F8FAFC"/>
+                    </a:solidFill>
+                  </a:tcPr>
+                </a:tc>
+                <a:tc>
+                  <a:txBody>
+                    <a:bodyPr wrap="square" anchor="ctr" lIns="73152" rIns="73152" tIns="36576" bIns="36576">
+                      <a:noAutofit/>
+                    </a:bodyPr>
+                    <a:lstStyle/>
+                    <a:p>
+                      <a:pPr algn="l">
+                        <a:lnSpc>
+                          <a:spcPct val="115000"/>
+                        </a:lnSpc>
+                        <a:spcAft>
+                          <a:spcPts val="0"/>
+                        </a:spcAft>
+                      </a:pPr>
+                      <a:r>
+                        <a:rPr sz="1600" b="0">
+                          <a:solidFill>
+                            <a:srgbClr val="1F2937"/>
+                          </a:solidFill>
+                          <a:latin typeface="Microsoft YaHei"/>
+                          <a:ea typeface="Microsoft YaHei"/>
+                          <a:cs typeface="Microsoft YaHei"/>
+                        </a:rPr>
+                        <a:t>0.2481</a:t>
+                      </a:r>
+                    </a:p>
+                  </a:txBody>
+                  <a:tcPr marL="91440" marR="91440" marT="27432" marB="27432" anchor="ctr">
+                    <a:solidFill>
+                      <a:srgbClr val="F8FAFC"/>
+                    </a:solidFill>
+                  </a:tcPr>
+                </a:tc>
+              </a:tr>
+              <a:tr h="566928">
+                <a:tc>
+                  <a:txBody>
+                    <a:bodyPr wrap="square" anchor="ctr" lIns="73152" rIns="73152" tIns="36576" bIns="36576">
+                      <a:noAutofit/>
+                    </a:bodyPr>
+                    <a:lstStyle/>
+                    <a:p>
+                      <a:pPr algn="l">
+                        <a:lnSpc>
+                          <a:spcPct val="115000"/>
+                        </a:lnSpc>
+                        <a:spcAft>
+                          <a:spcPts val="0"/>
+                        </a:spcAft>
+                      </a:pPr>
+                      <a:r>
+                        <a:rPr sz="1600" b="1">
+                          <a:solidFill>
+                            <a:srgbClr val="1F2937"/>
+                          </a:solidFill>
+                          <a:latin typeface="Microsoft YaHei"/>
+                          <a:ea typeface="Microsoft YaHei"/>
+                          <a:cs typeface="Microsoft YaHei"/>
+                        </a:rPr>
+                        <a:t>寄存器上限 160</a:t>
+                      </a:r>
+                    </a:p>
+                  </a:txBody>
+                  <a:tcPr marL="91440" marR="91440" marT="27432" marB="27432" anchor="ctr">
+                    <a:solidFill>
+                      <a:srgbClr val="FFFFFF"/>
+                    </a:solidFill>
+                  </a:tcPr>
+                </a:tc>
+                <a:tc>
+                  <a:txBody>
+                    <a:bodyPr wrap="square" anchor="ctr" lIns="73152" rIns="73152" tIns="36576" bIns="36576">
+                      <a:noAutofit/>
+                    </a:bodyPr>
+                    <a:lstStyle/>
+                    <a:p>
+                      <a:pPr algn="l">
+                        <a:lnSpc>
+                          <a:spcPct val="115000"/>
+                        </a:lnSpc>
+                        <a:spcAft>
+                          <a:spcPts val="0"/>
+                        </a:spcAft>
+                      </a:pPr>
+                      <a:r>
+                        <a:rPr sz="1600" b="0">
+                          <a:solidFill>
+                            <a:srgbClr val="1F2937"/>
+                          </a:solidFill>
+                          <a:latin typeface="Microsoft YaHei"/>
+                          <a:ea typeface="Microsoft YaHei"/>
+                          <a:cs typeface="Microsoft YaHei"/>
+                        </a:rPr>
+                        <a:t>−6.5%</a:t>
+                      </a:r>
+                    </a:p>
+                  </a:txBody>
+                  <a:tcPr marL="91440" marR="91440" marT="27432" marB="27432" anchor="ctr">
+                    <a:solidFill>
+                      <a:srgbClr val="FFFFFF"/>
+                    </a:solidFill>
+                  </a:tcPr>
+                </a:tc>
+                <a:tc>
+                  <a:txBody>
+                    <a:bodyPr wrap="square" anchor="ctr" lIns="73152" rIns="73152" tIns="36576" bIns="36576">
+                      <a:noAutofit/>
+                    </a:bodyPr>
+                    <a:lstStyle/>
+                    <a:p>
+                      <a:pPr algn="l">
+                        <a:lnSpc>
+                          <a:spcPct val="115000"/>
+                        </a:lnSpc>
+                        <a:spcAft>
+                          <a:spcPts val="0"/>
+                        </a:spcAft>
+                      </a:pPr>
+                      <a:r>
+                        <a:rPr sz="1600" b="0">
+                          <a:solidFill>
+                            <a:srgbClr val="1F2937"/>
+                          </a:solidFill>
+                          <a:latin typeface="Microsoft YaHei"/>
+                          <a:ea typeface="Microsoft YaHei"/>
+                          <a:cs typeface="Microsoft YaHei"/>
+                        </a:rPr>
+                        <a:t>−9.2%</a:t>
+                      </a:r>
+                    </a:p>
+                  </a:txBody>
+                  <a:tcPr marL="91440" marR="91440" marT="27432" marB="27432" anchor="ctr">
+                    <a:solidFill>
+                      <a:srgbClr val="FFFFFF"/>
+                    </a:solidFill>
+                  </a:tcPr>
+                </a:tc>
+              </a:tr>
+              <a:tr h="566928">
+                <a:tc>
+                  <a:txBody>
+                    <a:bodyPr wrap="square" anchor="ctr" lIns="73152" rIns="73152" tIns="36576" bIns="36576">
+                      <a:noAutofit/>
+                    </a:bodyPr>
+                    <a:lstStyle/>
+                    <a:p>
+                      <a:pPr algn="l">
+                        <a:lnSpc>
+                          <a:spcPct val="115000"/>
+                        </a:lnSpc>
+                        <a:spcAft>
+                          <a:spcPts val="0"/>
+                        </a:spcAft>
+                      </a:pPr>
+                      <a:r>
+                        <a:rPr sz="1600" b="1">
+                          <a:solidFill>
+                            <a:srgbClr val="1F2937"/>
+                          </a:solidFill>
+                          <a:latin typeface="Microsoft YaHei"/>
+                          <a:ea typeface="Microsoft YaHei"/>
+                          <a:cs typeface="Microsoft YaHei"/>
+                        </a:rPr>
+                        <a:t>LTO</a:t>
+                      </a:r>
+                    </a:p>
+                  </a:txBody>
+                  <a:tcPr marL="91440" marR="91440" marT="27432" marB="27432" anchor="ctr">
+                    <a:solidFill>
+                      <a:srgbClr val="F8FAFC"/>
+                    </a:solidFill>
+                  </a:tcPr>
+                </a:tc>
+                <a:tc>
+                  <a:txBody>
+                    <a:bodyPr wrap="square" anchor="ctr" lIns="73152" rIns="73152" tIns="36576" bIns="36576">
+                      <a:noAutofit/>
+                    </a:bodyPr>
+                    <a:lstStyle/>
+                    <a:p>
+                      <a:pPr algn="l">
+                        <a:lnSpc>
+                          <a:spcPct val="115000"/>
+                        </a:lnSpc>
+                        <a:spcAft>
+                          <a:spcPts val="0"/>
+                        </a:spcAft>
+                      </a:pPr>
+                      <a:r>
+                        <a:rPr sz="1600" b="1">
+                          <a:solidFill>
+                            <a:srgbClr val="16A34A"/>
+                          </a:solidFill>
+                          <a:latin typeface="Microsoft YaHei"/>
+                          <a:ea typeface="Microsoft YaHei"/>
+                          <a:cs typeface="Microsoft YaHei"/>
+                        </a:rPr>
+                        <a:t>−23.9%</a:t>
+                      </a:r>
+                    </a:p>
+                  </a:txBody>
+                  <a:tcPr marL="91440" marR="91440" marT="27432" marB="27432" anchor="ctr">
+                    <a:solidFill>
+                      <a:srgbClr val="F8FAFC"/>
+                    </a:solidFill>
+                  </a:tcPr>
+                </a:tc>
+                <a:tc>
+                  <a:txBody>
+                    <a:bodyPr wrap="square" anchor="ctr" lIns="73152" rIns="73152" tIns="36576" bIns="36576">
+                      <a:noAutofit/>
+                    </a:bodyPr>
+                    <a:lstStyle/>
+                    <a:p>
+                      <a:pPr algn="l">
+                        <a:lnSpc>
+                          <a:spcPct val="115000"/>
+                        </a:lnSpc>
+                        <a:spcAft>
+                          <a:spcPts val="0"/>
+                        </a:spcAft>
+                      </a:pPr>
+                      <a:r>
+                        <a:rPr sz="1600" b="1">
+                          <a:solidFill>
+                            <a:srgbClr val="16A34A"/>
+                          </a:solidFill>
+                          <a:latin typeface="Microsoft YaHei"/>
+                          <a:ea typeface="Microsoft YaHei"/>
+                          <a:cs typeface="Microsoft YaHei"/>
+                        </a:rPr>
+                        <a:t>−23.3%</a:t>
+                      </a:r>
+                    </a:p>
+                  </a:txBody>
+                  <a:tcPr marL="91440" marR="91440" marT="27432" marB="27432" anchor="ctr">
+                    <a:solidFill>
+                      <a:srgbClr val="F8FAFC"/>
+                    </a:solidFill>
+                  </a:tcPr>
+                </a:tc>
+              </a:tr>
+              <a:tr h="566928">
+                <a:tc>
+                  <a:txBody>
+                    <a:bodyPr wrap="square" anchor="ctr" lIns="73152" rIns="73152" tIns="36576" bIns="36576">
+                      <a:noAutofit/>
+                    </a:bodyPr>
+                    <a:lstStyle/>
+                    <a:p>
+                      <a:pPr algn="l">
+                        <a:lnSpc>
+                          <a:spcPct val="115000"/>
+                        </a:lnSpc>
+                        <a:spcAft>
+                          <a:spcPts val="0"/>
+                        </a:spcAft>
+                      </a:pPr>
+                      <a:r>
+                        <a:rPr sz="1600" b="1">
+                          <a:solidFill>
+                            <a:srgbClr val="1F2937"/>
+                          </a:solidFill>
+                          <a:latin typeface="Microsoft YaHei"/>
+                          <a:ea typeface="Microsoft YaHei"/>
+                          <a:cs typeface="Microsoft YaHei"/>
+                        </a:rPr>
+                        <a:t>LTO + 上限 160</a:t>
+                      </a:r>
+                    </a:p>
+                  </a:txBody>
+                  <a:tcPr marL="91440" marR="91440" marT="27432" marB="27432" anchor="ctr">
+                    <a:solidFill>
+                      <a:srgbClr val="FFFFFF"/>
+                    </a:solidFill>
+                  </a:tcPr>
+                </a:tc>
+                <a:tc>
+                  <a:txBody>
+                    <a:bodyPr wrap="square" anchor="ctr" lIns="73152" rIns="73152" tIns="36576" bIns="36576">
+                      <a:noAutofit/>
+                    </a:bodyPr>
+                    <a:lstStyle/>
+                    <a:p>
+                      <a:pPr algn="l">
+                        <a:lnSpc>
+                          <a:spcPct val="115000"/>
+                        </a:lnSpc>
+                        <a:spcAft>
+                          <a:spcPts val="0"/>
+                        </a:spcAft>
+                      </a:pPr>
+                      <a:r>
+                        <a:rPr sz="1600" b="1">
+                          <a:solidFill>
+                            <a:srgbClr val="D97706"/>
+                          </a:solidFill>
+                          <a:latin typeface="Microsoft YaHei"/>
+                          <a:ea typeface="Microsoft YaHei"/>
+                          <a:cs typeface="Microsoft YaHei"/>
+                        </a:rPr>
+                        <a:t>−16.9%</a:t>
+                      </a:r>
+                    </a:p>
+                  </a:txBody>
+                  <a:tcPr marL="91440" marR="91440" marT="27432" marB="27432" anchor="ctr">
+                    <a:solidFill>
+                      <a:srgbClr val="FFFFFF"/>
+                    </a:solidFill>
+                  </a:tcPr>
+                </a:tc>
+                <a:tc>
+                  <a:txBody>
+                    <a:bodyPr wrap="square" anchor="ctr" lIns="73152" rIns="73152" tIns="36576" bIns="36576">
+                      <a:noAutofit/>
+                    </a:bodyPr>
+                    <a:lstStyle/>
+                    <a:p>
+                      <a:pPr algn="l">
+                        <a:lnSpc>
+                          <a:spcPct val="115000"/>
+                        </a:lnSpc>
+                        <a:spcAft>
+                          <a:spcPts val="0"/>
+                        </a:spcAft>
+                      </a:pPr>
+                      <a:r>
+                        <a:rPr sz="1600" b="1">
+                          <a:solidFill>
+                            <a:srgbClr val="D97706"/>
+                          </a:solidFill>
+                          <a:latin typeface="Microsoft YaHei"/>
+                          <a:ea typeface="Microsoft YaHei"/>
+                          <a:cs typeface="Microsoft YaHei"/>
+                        </a:rPr>
+                        <a:t>−16.5%</a:t>
+                      </a:r>
+                    </a:p>
+                  </a:txBody>
+                  <a:tcPr marL="91440" marR="91440" marT="27432" marB="27432" anchor="ctr">
+                    <a:solidFill>
+                      <a:srgbClr val="FFFFFF"/>
+                    </a:solidFill>
+                  </a:tcPr>
+                </a:tc>
+              </a:tr>
+            </a:tbl>
+          </a:graphicData>
+        </a:graphic>
+      </p:graphicFrame>
+      <p:sp>
+        <p:nvSpPr>
+          <p:cNvPr id="8" name="TextBox 7"/>
+          <p:cNvSpPr txBox="1"/>
+          <p:nvPr/>
+        </p:nvSpPr>
+        <p:spPr>
+          <a:xfrm>
+            <a:off x="548640" y="4709160"/>
+            <a:ext cx="5852160" cy="1188720"/>
+          </a:xfrm>
+          <a:prstGeom prst="rect">
+            <a:avLst/>
+          </a:prstGeom>
+          <a:noFill/>
+        </p:spPr>
+        <p:txBody>
+          <a:bodyPr wrap="square" anchor="t" lIns="73152" rIns="73152" tIns="36576" bIns="36576">
+            <a:noAutofit/>
+          </a:bodyPr>
+          <a:lstStyle/>
+          <a:p>
+            <a:pPr algn="l">
+              <a:lnSpc>
+                <a:spcPct val="120000"/>
+              </a:lnSpc>
+              <a:spcAft>
+                <a:spcPts val="200"/>
+              </a:spcAft>
+            </a:pPr>
+            <a:r>
+              <a:rPr sz="1300" b="0">
+                <a:solidFill>
+                  <a:srgbClr val="64748B"/>
+                </a:solidFill>
+                <a:latin typeface="Microsoft YaHei"/>
+                <a:ea typeface="Microsoft YaHei"/>
+                <a:cs typeface="Microsoft YaHei"/>
+              </a:rPr>
+              <a:t>对照：只加 </a:t>
+            </a:r>
+            <a:r>
+              <a:rPr sz="1300" b="0">
+                <a:solidFill>
+                  <a:srgbClr val="64748B"/>
+                </a:solidFill>
+                <a:latin typeface="Consolas"/>
+                <a:ea typeface="Microsoft YaHei"/>
+                <a:cs typeface="Microsoft YaHei"/>
+              </a:rPr>
+              <a:t>-gpu=cuda13.0</a:t>
+            </a:r>
+            <a:r>
+              <a:rPr sz="1300" b="0">
+                <a:solidFill>
+                  <a:srgbClr val="64748B"/>
+                </a:solidFill>
+                <a:latin typeface="Microsoft YaHei"/>
+                <a:ea typeface="Microsoft YaHei"/>
+                <a:cs typeface="Microsoft YaHei"/>
+              </a:rPr>
+              <a:t>、不开 LTO，生成的 GPU 代码和基线逐条相同</a:t>
+            </a:r>
+          </a:p>
+          <a:p>
+            <a:pPr algn="l">
+              <a:lnSpc>
+                <a:spcPct val="120000"/>
+              </a:lnSpc>
+              <a:spcAft>
+                <a:spcPts val="200"/>
+              </a:spcAft>
+            </a:pPr>
+            <a:r>
+              <a:rPr sz="1300" b="0">
+                <a:solidFill>
+                  <a:srgbClr val="64748B"/>
+                </a:solidFill>
+                <a:latin typeface="Microsoft YaHei"/>
+                <a:ea typeface="Microsoft YaHei"/>
+                <a:cs typeface="Microsoft YaHei"/>
+              </a:rPr>
+              <a:t>叠加变慢：上限管不到 LTO 在链接时生成的代码；</a:t>
+            </a:r>
+          </a:p>
+          <a:p>
+            <a:pPr algn="l">
+              <a:lnSpc>
+                <a:spcPct val="120000"/>
+              </a:lnSpc>
+              <a:spcAft>
+                <a:spcPts val="200"/>
+              </a:spcAft>
+            </a:pPr>
+            <a:r>
+              <a:rPr sz="1300" b="0">
+                <a:solidFill>
+                  <a:srgbClr val="64748B"/>
+                </a:solidFill>
+                <a:latin typeface="Microsoft YaHei"/>
+                <a:ea typeface="Microsoft YaHei"/>
+                <a:cs typeface="Microsoft YaHei"/>
+              </a:rPr>
+              <a:t>WENO 反而用到 174–178 个寄存器，退回每个 SM 2 个线程块</a:t>
+            </a:r>
+          </a:p>
+        </p:txBody>
+      </p:sp>
+      <p:sp>
+        <p:nvSpPr>
+          <p:cNvPr id="9" name="TextBox 8"/>
+          <p:cNvSpPr txBox="1"/>
+          <p:nvPr/>
+        </p:nvSpPr>
+        <p:spPr>
+          <a:xfrm>
+            <a:off x="6766560" y="1280160"/>
+            <a:ext cx="4937760" cy="457200"/>
+          </a:xfrm>
+          <a:prstGeom prst="rect">
+            <a:avLst/>
+          </a:prstGeom>
+          <a:noFill/>
+        </p:spPr>
+        <p:txBody>
+          <a:bodyPr wrap="square" anchor="t" lIns="73152" rIns="73152" tIns="36576" bIns="36576">
+            <a:noAutofit/>
+          </a:bodyPr>
+          <a:lstStyle/>
+          <a:p>
+            <a:pPr algn="l">
+              <a:lnSpc>
+                <a:spcPct val="115000"/>
+              </a:lnSpc>
+              <a:spcAft>
+                <a:spcPts val="0"/>
+              </a:spcAft>
+            </a:pPr>
+            <a:r>
+              <a:rPr sz="1800" b="1">
+                <a:solidFill>
+                  <a:srgbClr val="1E3A5F"/>
+                </a:solidFill>
+                <a:latin typeface="Microsoft YaHei"/>
+                <a:ea typeface="Microsoft YaHei"/>
+                <a:cs typeface="Microsoft YaHei"/>
+              </a:rPr>
+              <a:t>LTO 做了什么</a:t>
+            </a:r>
+          </a:p>
+        </p:txBody>
+      </p:sp>
+      <p:sp>
+        <p:nvSpPr>
+          <p:cNvPr id="10" name="TextBox 9"/>
+          <p:cNvSpPr txBox="1"/>
+          <p:nvPr/>
+        </p:nvSpPr>
+        <p:spPr>
+          <a:xfrm>
+            <a:off x="6766560" y="1783080"/>
+            <a:ext cx="4983480" cy="4023360"/>
+          </a:xfrm>
+          <a:prstGeom prst="rect">
+            <a:avLst/>
+          </a:prstGeom>
+          <a:noFill/>
+        </p:spPr>
+        <p:txBody>
+          <a:bodyPr wrap="square" anchor="t" lIns="73152" rIns="73152" tIns="36576" bIns="36576">
+            <a:noAutofit/>
+          </a:bodyPr>
+          <a:lstStyle/>
+          <a:p>
+            <a:pPr algn="l">
+              <a:lnSpc>
+                <a:spcPct val="120000"/>
+              </a:lnSpc>
+              <a:spcAft>
+                <a:spcPts val="1200"/>
+              </a:spcAft>
+            </a:pPr>
+            <a:r>
+              <a:rPr sz="1500" b="0">
+                <a:solidFill>
+                  <a:srgbClr val="1F2937"/>
+                </a:solidFill>
+                <a:latin typeface="Microsoft YaHei"/>
+                <a:ea typeface="Microsoft YaHei"/>
+                <a:cs typeface="Microsoft YaHei"/>
+              </a:rPr>
+              <a:t>•  平时每个文件单独编成 GPU 机器码，链接时只是拼起来；LTO 在链接时把所有文件合在一起重新优化</a:t>
+            </a:r>
+          </a:p>
+          <a:p>
+            <a:pPr algn="l">
+              <a:lnSpc>
+                <a:spcPct val="120000"/>
+              </a:lnSpc>
+              <a:spcAft>
+                <a:spcPts val="1200"/>
+              </a:spcAft>
+            </a:pPr>
+            <a:r>
+              <a:rPr sz="1500" b="0">
+                <a:solidFill>
+                  <a:srgbClr val="1F2937"/>
+                </a:solidFill>
+                <a:latin typeface="Microsoft YaHei"/>
+                <a:ea typeface="Microsoft YaHei"/>
+                <a:cs typeface="Microsoft YaHei"/>
+              </a:rPr>
+              <a:t>•  WENO（占 32% 时间）：寄存器约 190 → 160，每个 SM 的线程块 2 → 3，快约 28%</a:t>
+            </a:r>
+          </a:p>
+          <a:p>
+            <a:pPr algn="l">
+              <a:lnSpc>
+                <a:spcPct val="120000"/>
+              </a:lnSpc>
+              <a:spcAft>
+                <a:spcPts val="1200"/>
+              </a:spcAft>
+            </a:pPr>
+            <a:r>
+              <a:rPr sz="1500" b="0">
+                <a:solidFill>
+                  <a:srgbClr val="1F2937"/>
+                </a:solidFill>
+                <a:latin typeface="Microsoft YaHei"/>
+                <a:ea typeface="Microsoft YaHei"/>
+                <a:cs typeface="Microsoft YaHei"/>
+              </a:rPr>
+              <a:t>•  HLLC：寄存器差不多，但代码更高效，快约 40%</a:t>
+            </a:r>
+          </a:p>
+          <a:p>
+            <a:pPr algn="l">
+              <a:lnSpc>
+                <a:spcPct val="120000"/>
+              </a:lnSpc>
+              <a:spcAft>
+                <a:spcPts val="1200"/>
+              </a:spcAft>
+            </a:pPr>
+            <a:r>
+              <a:rPr sz="1500" b="0">
+                <a:solidFill>
+                  <a:srgbClr val="1F2937"/>
+                </a:solidFill>
+                <a:latin typeface="Microsoft YaHei"/>
+                <a:ea typeface="Microsoft YaHei"/>
+                <a:cs typeface="Microsoft YaHei"/>
+              </a:rPr>
+              <a:t>•  输出逐位一致；构建日志里的寄存器数是链接前的，看不出变化</a:t>
+            </a:r>
+          </a:p>
+        </p:txBody>
+      </p:sp>
+      <p:sp>
+        <p:nvSpPr>
+          <p:cNvPr id="11" name="Rectangle 10"/>
+          <p:cNvSpPr/>
+          <p:nvPr/>
+        </p:nvSpPr>
+        <p:spPr>
+          <a:xfrm>
+            <a:off x="457200" y="5989320"/>
+            <a:ext cx="11274552" cy="566928"/>
+          </a:xfrm>
+          <a:prstGeom prst="rect">
+            <a:avLst/>
+          </a:prstGeom>
+          <a:solidFill>
+            <a:srgbClr val="F1F5F9"/>
+          </a:solidFill>
+          <a:ln>
+            <a:noFill/>
+          </a:ln>
+          <a:effectLst/>
+        </p:spPr>
+        <p:style>
+          <a:lnRef idx="1">
+            <a:schemeClr val="accent1"/>
+          </a:lnRef>
+          <a:fillRef idx="3">
+            <a:schemeClr val="accent1"/>
+          </a:fillRef>
+          <a:effectRef idx="2">
+            <a:schemeClr val="accent1"/>
+          </a:effectRef>
+          <a:fontRef idx="minor">
+            <a:schemeClr val="lt1"/>
+          </a:fontRef>
+        </p:style>
+        <p:txBody>
+          <a:bodyPr rtlCol="0" anchor="ctr"/>
+          <a:lstStyle/>
+          <a:p>
+            <a:pPr algn="ctr"/>
+          </a:p>
+        </p:txBody>
+      </p:sp>
+      <p:sp>
+        <p:nvSpPr>
+          <p:cNvPr id="12" name="Rectangle 11"/>
+          <p:cNvSpPr/>
+          <p:nvPr/>
+        </p:nvSpPr>
+        <p:spPr>
+          <a:xfrm>
+            <a:off x="457200" y="5989320"/>
+            <a:ext cx="73152" cy="566928"/>
+          </a:xfrm>
+          <a:prstGeom prst="rect">
+            <a:avLst/>
+          </a:prstGeom>
+          <a:solidFill>
+            <a:srgbClr val="F97316"/>
+          </a:solidFill>
+          <a:ln>
+            <a:noFill/>
+          </a:ln>
+          <a:effectLst/>
+        </p:spPr>
+        <p:style>
+          <a:lnRef idx="1">
+            <a:schemeClr val="accent1"/>
+          </a:lnRef>
+          <a:fillRef idx="3">
+            <a:schemeClr val="accent1"/>
+          </a:fillRef>
+          <a:effectRef idx="2">
+            <a:schemeClr val="accent1"/>
+          </a:effectRef>
+          <a:fontRef idx="minor">
+            <a:schemeClr val="lt1"/>
+          </a:fontRef>
+        </p:style>
+        <p:txBody>
+          <a:bodyPr rtlCol="0" anchor="ctr"/>
+          <a:lstStyle/>
+          <a:p>
+            <a:pPr algn="ctr"/>
+          </a:p>
+        </p:txBody>
+      </p:sp>
+      <p:sp>
+        <p:nvSpPr>
+          <p:cNvPr id="13" name="TextBox 12"/>
+          <p:cNvSpPr txBox="1"/>
+          <p:nvPr/>
+        </p:nvSpPr>
+        <p:spPr>
+          <a:xfrm>
+            <a:off x="640080" y="5989320"/>
+            <a:ext cx="11018520" cy="566928"/>
+          </a:xfrm>
+          <a:prstGeom prst="rect">
+            <a:avLst/>
+          </a:prstGeom>
+          <a:noFill/>
+        </p:spPr>
+        <p:txBody>
+          <a:bodyPr wrap="square" anchor="ctr" lIns="73152" rIns="73152" tIns="36576" bIns="36576">
+            <a:noAutofit/>
+          </a:bodyPr>
+          <a:lstStyle/>
+          <a:p>
+            <a:pPr algn="l">
+              <a:lnSpc>
+                <a:spcPct val="115000"/>
+              </a:lnSpc>
+              <a:spcAft>
+                <a:spcPts val="0"/>
+              </a:spcAft>
+            </a:pPr>
+            <a:r>
+              <a:rPr sz="1600" b="0">
+                <a:solidFill>
+                  <a:srgbClr val="1F2937"/>
+                </a:solidFill>
+                <a:latin typeface="Consolas"/>
+                <a:ea typeface="Microsoft YaHei"/>
+                <a:cs typeface="Microsoft YaHei"/>
+              </a:rPr>
+              <a:t>FFLAGS=-gpu=lto,cuda13.0</a:t>
+            </a:r>
+            <a:r>
+              <a:rPr sz="1600" b="0">
+                <a:solidFill>
+                  <a:srgbClr val="1F2937"/>
+                </a:solidFill>
+                <a:latin typeface="Microsoft YaHei"/>
+                <a:ea typeface="Microsoft YaHei"/>
+                <a:cs typeface="Microsoft YaHei"/>
+              </a:rPr>
+              <a:t>（单写 </a:t>
+            </a:r>
+            <a:r>
+              <a:rPr sz="1600" b="0">
+                <a:solidFill>
+                  <a:srgbClr val="1F2937"/>
+                </a:solidFill>
+                <a:latin typeface="Consolas"/>
+                <a:ea typeface="Microsoft YaHei"/>
+                <a:cs typeface="Microsoft YaHei"/>
+              </a:rPr>
+              <a:t>-gpu=lto</a:t>
+            </a:r>
+            <a:r>
+              <a:rPr sz="1600" b="0">
+                <a:solidFill>
+                  <a:srgbClr val="1F2937"/>
+                </a:solidFill>
+                <a:latin typeface="Microsoft YaHei"/>
+                <a:ea typeface="Microsoft YaHei"/>
+                <a:cs typeface="Microsoft YaHei"/>
+              </a:rPr>
+              <a:t> 过不了 CMake 的编译器检查）；用了 LTO 就不要再加寄存器上限</a:t>
+            </a:r>
+          </a:p>
+        </p:txBody>
+      </p:sp>
+    </p:spTree>
+  </p:cSld>
+  <p:clrMapOvr>
+    <a:masterClrMapping/>
+  </p:clrMapOvr>
+</p:sld>
+</file>
+
+<file path=ppt/slides/slide6.xml><?xml version="1.0" encoding="utf-8"?>
+<p:sld xmlns:a="http://schemas.openxmlformats.org/drawingml/2006/main" xmlns:p="http://schemas.openxmlformats.org/presentationml/2006/main" xmlns:r="http://schemas.openxmlformats.org/officeDocument/2006/relationships">
+  <p:cSld>
+    <p:spTree>
+      <p:nvGrpSpPr>
+        <p:cNvPr id="1" name=""/>
+        <p:cNvGrpSpPr/>
+        <p:nvPr/>
+      </p:nvGrpSpPr>
+      <p:grpSpPr/>
+      <p:sp>
+        <p:nvSpPr>
+          <p:cNvPr id="2" name="Rectangle 1"/>
+          <p:cNvSpPr/>
+          <p:nvPr/>
+        </p:nvSpPr>
+        <p:spPr>
+          <a:xfrm>
+            <a:off x="274320" y="347472"/>
+            <a:ext cx="82296" cy="457200"/>
+          </a:xfrm>
+          <a:prstGeom prst="rect">
+            <a:avLst/>
+          </a:prstGeom>
+          <a:solidFill>
+            <a:srgbClr val="F97316"/>
+          </a:solidFill>
+          <a:ln>
+            <a:noFill/>
+          </a:ln>
+          <a:effectLst/>
+        </p:spPr>
+        <p:style>
+          <a:lnRef idx="1">
+            <a:schemeClr val="accent1"/>
+          </a:lnRef>
+          <a:fillRef idx="3">
+            <a:schemeClr val="accent1"/>
+          </a:fillRef>
+          <a:effectRef idx="2">
+            <a:schemeClr val="accent1"/>
+          </a:effectRef>
+          <a:fontRef idx="minor">
+            <a:schemeClr val="lt1"/>
+          </a:fontRef>
+        </p:style>
+        <p:txBody>
+          <a:bodyPr rtlCol="0" anchor="ctr"/>
+          <a:lstStyle/>
+          <a:p>
+            <a:pPr algn="ctr"/>
+          </a:p>
+        </p:txBody>
+      </p:sp>
+      <p:sp>
+        <p:nvSpPr>
+          <p:cNvPr id="3" name="TextBox 2"/>
+          <p:cNvSpPr txBox="1"/>
+          <p:nvPr/>
+        </p:nvSpPr>
+        <p:spPr>
+          <a:xfrm>
+            <a:off x="457200" y="237744"/>
+            <a:ext cx="9509760" cy="676656"/>
+          </a:xfrm>
+          <a:prstGeom prst="rect">
+            <a:avLst/>
+          </a:prstGeom>
+          <a:noFill/>
+        </p:spPr>
+        <p:txBody>
+          <a:bodyPr wrap="square" anchor="ctr" lIns="73152" rIns="73152" tIns="36576" bIns="36576">
+            <a:noAutofit/>
+          </a:bodyPr>
+          <a:lstStyle/>
+          <a:p>
+            <a:pPr algn="l">
+              <a:lnSpc>
+                <a:spcPct val="115000"/>
+              </a:lnSpc>
+              <a:spcAft>
+                <a:spcPts val="0"/>
+              </a:spcAft>
+            </a:pPr>
+            <a:r>
+              <a:rPr sz="2600" b="1">
+                <a:solidFill>
+                  <a:srgbClr val="1E3A5F"/>
+                </a:solidFill>
+                <a:latin typeface="Microsoft YaHei"/>
+                <a:ea typeface="Microsoft YaHei"/>
+                <a:cs typeface="Microsoft YaHei"/>
+              </a:rPr>
+              <a:t>第三层（续）LTO 在四个官方算例上都最快</a:t>
+            </a:r>
+          </a:p>
+        </p:txBody>
+      </p:sp>
+      <p:sp>
+        <p:nvSpPr>
+          <p:cNvPr id="4" name="TextBox 3"/>
+          <p:cNvSpPr txBox="1"/>
+          <p:nvPr/>
+        </p:nvSpPr>
+        <p:spPr>
+          <a:xfrm>
+            <a:off x="9784080" y="310896"/>
+            <a:ext cx="2103120" cy="457200"/>
+          </a:xfrm>
+          <a:prstGeom prst="rect">
+            <a:avLst/>
+          </a:prstGeom>
+          <a:noFill/>
+        </p:spPr>
+        <p:txBody>
+          <a:bodyPr wrap="square" anchor="ctr" lIns="73152" rIns="73152" tIns="36576" bIns="36576">
+            <a:noAutofit/>
+          </a:bodyPr>
+          <a:lstStyle/>
+          <a:p>
+            <a:pPr algn="r">
+              <a:lnSpc>
+                <a:spcPct val="115000"/>
+              </a:lnSpc>
+              <a:spcAft>
+                <a:spcPts val="0"/>
+              </a:spcAft>
+            </a:pPr>
+            <a:r>
+              <a:rPr sz="1200" b="0">
+                <a:solidFill>
+                  <a:srgbClr val="64748B"/>
+                </a:solidFill>
+                <a:latin typeface="Microsoft YaHei"/>
+                <a:ea typeface="Microsoft YaHei"/>
+                <a:cs typeface="Microsoft YaHei"/>
+              </a:rPr>
+              <a:t>第三层　6 / 11</a:t>
+            </a:r>
+          </a:p>
+        </p:txBody>
+      </p:sp>
+      <p:cxnSp>
+        <p:nvCxnSpPr>
+          <p:cNvPr id="5" name="Connector 4"/>
+          <p:cNvCxnSpPr/>
+          <p:nvPr/>
+        </p:nvCxnSpPr>
+        <p:spPr>
+          <a:xfrm>
+            <a:off x="457200" y="969264"/>
+            <a:ext cx="11274552" cy="0"/>
+          </a:xfrm>
+          <a:prstGeom prst="line">
+            <a:avLst/>
+          </a:prstGeom>
+          <a:ln w="12700">
+            <a:solidFill>
+              <a:srgbClr val="E2E8F0"/>
+            </a:solidFill>
+          </a:ln>
+        </p:spPr>
+        <p:style>
+          <a:lnRef idx="2">
+            <a:schemeClr val="accent1"/>
+          </a:lnRef>
+          <a:fillRef idx="0">
+            <a:schemeClr val="accent1"/>
+          </a:fillRef>
+          <a:effectRef idx="1">
+            <a:schemeClr val="accent1"/>
+          </a:effectRef>
+          <a:fontRef idx="minor">
+            <a:schemeClr val="tx1"/>
+          </a:fontRef>
+        </p:style>
+      </p:cxnSp>
+      <p:graphicFrame>
+        <p:nvGraphicFramePr>
+          <p:cNvPr id="6" name="Table 5"/>
+          <p:cNvGraphicFramePr>
+            <a:graphicFrameLocks noGrp="1"/>
+          </p:cNvGraphicFramePr>
+          <p:nvPr/>
+        </p:nvGraphicFramePr>
+        <p:xfrm>
+          <a:off x="548640" y="1325880"/>
+          <a:ext cx="11155680" cy="2834640"/>
+        </p:xfrm>
+        <a:graphic>
+          <a:graphicData uri="http://schemas.openxmlformats.org/drawingml/2006/table">
+            <a:tbl>
+              <a:tblPr firstRow="1" bandRow="1">
+                <a:tableStyleId>{5C22544A-7EE6-4342-B048-85BDC9FD1C3A}</a:tableStyleId>
+              </a:tblPr>
+              <a:tblGrid>
+                <a:gridCol w="2926080"/>
+                <a:gridCol w="1737360"/>
+                <a:gridCol w="1463040"/>
+                <a:gridCol w="1920240"/>
+                <a:gridCol w="3108960"/>
+              </a:tblGrid>
+              <a:tr h="566928">
+                <a:tc>
+                  <a:txBody>
+                    <a:bodyPr wrap="square" anchor="ctr" lIns="73152" rIns="73152" tIns="36576" bIns="36576">
+                      <a:noAutofit/>
+                    </a:bodyPr>
+                    <a:lstStyle/>
+                    <a:p>
+                      <a:pPr algn="l">
+                        <a:lnSpc>
+                          <a:spcPct val="115000"/>
+                        </a:lnSpc>
+                        <a:spcAft>
+                          <a:spcPts val="0"/>
+                        </a:spcAft>
+                      </a:pPr>
+                      <a:r>
+                        <a:rPr sz="1500" b="1">
+                          <a:solidFill>
+                            <a:srgbClr val="FFFFFF"/>
+                          </a:solidFill>
+                          <a:latin typeface="Microsoft YaHei"/>
+                          <a:ea typeface="Microsoft YaHei"/>
+                          <a:cs typeface="Microsoft YaHei"/>
+                        </a:rPr>
+                        <a:t>算例（单卡）</a:t>
+                      </a:r>
+                    </a:p>
+                  </a:txBody>
+                  <a:tcPr marL="91440" marR="91440" marT="27432" marB="27432" anchor="ctr">
+                    <a:solidFill>
+                      <a:srgbClr val="1E3A5F"/>
+                    </a:solidFill>
+                  </a:tcPr>
+                </a:tc>
+                <a:tc>
+                  <a:txBody>
+                    <a:bodyPr wrap="square" anchor="ctr" lIns="73152" rIns="73152" tIns="36576" bIns="36576">
+                      <a:noAutofit/>
+                    </a:bodyPr>
+                    <a:lstStyle/>
+                    <a:p>
+                      <a:pPr algn="l">
+                        <a:lnSpc>
+                          <a:spcPct val="115000"/>
+                        </a:lnSpc>
+                        <a:spcAft>
+                          <a:spcPts val="0"/>
+                        </a:spcAft>
+                      </a:pPr>
+                      <a:r>
+                        <a:rPr sz="1500" b="1">
+                          <a:solidFill>
+                            <a:srgbClr val="FFFFFF"/>
+                          </a:solidFill>
+                          <a:latin typeface="Microsoft YaHei"/>
+                          <a:ea typeface="Microsoft YaHei"/>
+                          <a:cs typeface="Microsoft YaHei"/>
+                        </a:rPr>
+                        <a:t>寄存器上限 160</a:t>
+                      </a:r>
+                    </a:p>
+                  </a:txBody>
+                  <a:tcPr marL="91440" marR="91440" marT="27432" marB="27432" anchor="ctr">
+                    <a:solidFill>
+                      <a:srgbClr val="1E3A5F"/>
+                    </a:solidFill>
+                  </a:tcPr>
+                </a:tc>
+                <a:tc>
+                  <a:txBody>
+                    <a:bodyPr wrap="square" anchor="ctr" lIns="73152" rIns="73152" tIns="36576" bIns="36576">
+                      <a:noAutofit/>
+                    </a:bodyPr>
+                    <a:lstStyle/>
+                    <a:p>
+                      <a:pPr algn="l">
+                        <a:lnSpc>
+                          <a:spcPct val="115000"/>
+                        </a:lnSpc>
+                        <a:spcAft>
+                          <a:spcPts val="0"/>
+                        </a:spcAft>
+                      </a:pPr>
+                      <a:r>
+                        <a:rPr sz="1500" b="1">
+                          <a:solidFill>
+                            <a:srgbClr val="FFFFFF"/>
+                          </a:solidFill>
+                          <a:latin typeface="Microsoft YaHei"/>
+                          <a:ea typeface="Microsoft YaHei"/>
+                          <a:cs typeface="Microsoft YaHei"/>
+                        </a:rPr>
+                        <a:t>只开 LTO</a:t>
+                      </a:r>
+                    </a:p>
+                  </a:txBody>
+                  <a:tcPr marL="91440" marR="91440" marT="27432" marB="27432" anchor="ctr">
+                    <a:solidFill>
+                      <a:srgbClr val="1E3A5F"/>
+                    </a:solidFill>
+                  </a:tcPr>
+                </a:tc>
+                <a:tc>
+                  <a:txBody>
+                    <a:bodyPr wrap="square" anchor="ctr" lIns="73152" rIns="73152" tIns="36576" bIns="36576">
+                      <a:noAutofit/>
+                    </a:bodyPr>
+                    <a:lstStyle/>
+                    <a:p>
+                      <a:pPr algn="l">
+                        <a:lnSpc>
+                          <a:spcPct val="115000"/>
+                        </a:lnSpc>
+                        <a:spcAft>
+                          <a:spcPts val="0"/>
+                        </a:spcAft>
+                      </a:pPr>
+                      <a:r>
+                        <a:rPr sz="1500" b="1">
+                          <a:solidFill>
+                            <a:srgbClr val="FFFFFF"/>
+                          </a:solidFill>
+                          <a:latin typeface="Microsoft YaHei"/>
+                          <a:ea typeface="Microsoft YaHei"/>
+                          <a:cs typeface="Microsoft YaHei"/>
+                        </a:rPr>
+                        <a:t>部分 LTO + 上限</a:t>
+                      </a:r>
+                    </a:p>
+                  </a:txBody>
+                  <a:tcPr marL="91440" marR="91440" marT="27432" marB="27432" anchor="ctr">
+                    <a:solidFill>
+                      <a:srgbClr val="1E3A5F"/>
+                    </a:solidFill>
+                  </a:tcPr>
+                </a:tc>
+                <a:tc>
+                  <a:txBody>
+                    <a:bodyPr wrap="square" anchor="ctr" lIns="73152" rIns="73152" tIns="36576" bIns="36576">
+                      <a:noAutofit/>
+                    </a:bodyPr>
+                    <a:lstStyle/>
+                    <a:p>
+                      <a:pPr algn="l">
+                        <a:lnSpc>
+                          <a:spcPct val="115000"/>
+                        </a:lnSpc>
+                        <a:spcAft>
+                          <a:spcPts val="0"/>
+                        </a:spcAft>
+                      </a:pPr>
+                      <a:r>
+                        <a:rPr sz="1500" b="1">
+                          <a:solidFill>
+                            <a:srgbClr val="FFFFFF"/>
+                          </a:solidFill>
+                          <a:latin typeface="Microsoft YaHei"/>
+                          <a:ea typeface="Microsoft YaHei"/>
+                          <a:cs typeface="Microsoft YaHei"/>
+                        </a:rPr>
+                        <a:t>输出</a:t>
+                      </a:r>
+                    </a:p>
+                  </a:txBody>
+                  <a:tcPr marL="91440" marR="91440" marT="27432" marB="27432" anchor="ctr">
+                    <a:solidFill>
+                      <a:srgbClr val="1E3A5F"/>
+                    </a:solidFill>
+                  </a:tcPr>
+                </a:tc>
+              </a:tr>
+              <a:tr h="566928">
+                <a:tc>
+                  <a:txBody>
+                    <a:bodyPr wrap="square" anchor="ctr" lIns="73152" rIns="73152" tIns="36576" bIns="36576">
+                      <a:noAutofit/>
+                    </a:bodyPr>
+                    <a:lstStyle/>
+                    <a:p>
+                      <a:pPr algn="l">
+                        <a:lnSpc>
+                          <a:spcPct val="115000"/>
+                        </a:lnSpc>
+                        <a:spcAft>
+                          <a:spcPts val="0"/>
+                        </a:spcAft>
+                      </a:pPr>
+                      <a:r>
+                        <a:rPr sz="1500" b="1">
+                          <a:solidFill>
+                            <a:srgbClr val="1F2937"/>
+                          </a:solidFill>
+                          <a:latin typeface="Microsoft YaHei"/>
+                          <a:ea typeface="Microsoft YaHei"/>
+                          <a:cs typeface="Microsoft YaHei"/>
+                        </a:rPr>
+                        <a:t>3D_performance_test</a:t>
+                      </a:r>
+                    </a:p>
+                  </a:txBody>
+                  <a:tcPr marL="91440" marR="91440" marT="27432" marB="27432" anchor="ctr">
+                    <a:solidFill>
+                      <a:srgbClr val="F8FAFC"/>
+                    </a:solidFill>
+                  </a:tcPr>
+                </a:tc>
+                <a:tc>
+                  <a:txBody>
+                    <a:bodyPr wrap="square" anchor="ctr" lIns="73152" rIns="73152" tIns="36576" bIns="36576">
+                      <a:noAutofit/>
+                    </a:bodyPr>
+                    <a:lstStyle/>
+                    <a:p>
+                      <a:pPr algn="l">
+                        <a:lnSpc>
+                          <a:spcPct val="115000"/>
+                        </a:lnSpc>
+                        <a:spcAft>
+                          <a:spcPts val="0"/>
+                        </a:spcAft>
+                      </a:pPr>
+                      <a:r>
+                        <a:rPr sz="1500" b="0">
+                          <a:solidFill>
+                            <a:srgbClr val="1F2937"/>
+                          </a:solidFill>
+                          <a:latin typeface="Microsoft YaHei"/>
+                          <a:ea typeface="Microsoft YaHei"/>
+                          <a:cs typeface="Microsoft YaHei"/>
+                        </a:rPr>
+                        <a:t>−6.7%</a:t>
+                      </a:r>
+                    </a:p>
+                  </a:txBody>
+                  <a:tcPr marL="91440" marR="91440" marT="27432" marB="27432" anchor="ctr">
+                    <a:solidFill>
+                      <a:srgbClr val="F8FAFC"/>
+                    </a:solidFill>
+                  </a:tcPr>
+                </a:tc>
+                <a:tc>
+                  <a:txBody>
+                    <a:bodyPr wrap="square" anchor="ctr" lIns="73152" rIns="73152" tIns="36576" bIns="36576">
+                      <a:noAutofit/>
+                    </a:bodyPr>
+                    <a:lstStyle/>
+                    <a:p>
+                      <a:pPr algn="l">
+                        <a:lnSpc>
+                          <a:spcPct val="115000"/>
+                        </a:lnSpc>
+                        <a:spcAft>
+                          <a:spcPts val="0"/>
+                        </a:spcAft>
+                      </a:pPr>
+                      <a:r>
+                        <a:rPr sz="1500" b="1">
+                          <a:solidFill>
+                            <a:srgbClr val="16A34A"/>
+                          </a:solidFill>
+                          <a:latin typeface="Microsoft YaHei"/>
+                          <a:ea typeface="Microsoft YaHei"/>
+                          <a:cs typeface="Microsoft YaHei"/>
+                        </a:rPr>
+                        <a:t>−24.0%</a:t>
+                      </a:r>
+                    </a:p>
+                  </a:txBody>
+                  <a:tcPr marL="91440" marR="91440" marT="27432" marB="27432" anchor="ctr">
+                    <a:solidFill>
+                      <a:srgbClr val="F8FAFC"/>
+                    </a:solidFill>
+                  </a:tcPr>
+                </a:tc>
+                <a:tc>
+                  <a:txBody>
+                    <a:bodyPr wrap="square" anchor="ctr" lIns="73152" rIns="73152" tIns="36576" bIns="36576">
+                      <a:noAutofit/>
+                    </a:bodyPr>
+                    <a:lstStyle/>
+                    <a:p>
+                      <a:pPr algn="l">
+                        <a:lnSpc>
+                          <a:spcPct val="115000"/>
+                        </a:lnSpc>
+                        <a:spcAft>
+                          <a:spcPts val="0"/>
+                        </a:spcAft>
+                      </a:pPr>
+                      <a:r>
+                        <a:rPr sz="1500" b="1">
+                          <a:solidFill>
+                            <a:srgbClr val="D97706"/>
+                          </a:solidFill>
+                          <a:latin typeface="Microsoft YaHei"/>
+                          <a:ea typeface="Microsoft YaHei"/>
+                          <a:cs typeface="Microsoft YaHei"/>
+                        </a:rPr>
+                        <a:t>−19.3%</a:t>
+                      </a:r>
+                    </a:p>
+                  </a:txBody>
+                  <a:tcPr marL="91440" marR="91440" marT="27432" marB="27432" anchor="ctr">
+                    <a:solidFill>
+                      <a:srgbClr val="F8FAFC"/>
+                    </a:solidFill>
+                  </a:tcPr>
+                </a:tc>
+                <a:tc>
+                  <a:txBody>
+                    <a:bodyPr wrap="square" anchor="ctr" lIns="73152" rIns="73152" tIns="36576" bIns="36576">
+                      <a:noAutofit/>
+                    </a:bodyPr>
+                    <a:lstStyle/>
+                    <a:p>
+                      <a:pPr algn="l">
+                        <a:lnSpc>
+                          <a:spcPct val="115000"/>
+                        </a:lnSpc>
+                        <a:spcAft>
+                          <a:spcPts val="0"/>
+                        </a:spcAft>
+                      </a:pPr>
+                      <a:r>
+                        <a:rPr sz="1500" b="1">
+                          <a:solidFill>
+                            <a:srgbClr val="64748B"/>
+                          </a:solidFill>
+                          <a:latin typeface="Microsoft YaHei"/>
+                          <a:ea typeface="Microsoft YaHei"/>
+                          <a:cs typeface="Microsoft YaHei"/>
+                        </a:rPr>
+                        <a:t>逐位一致</a:t>
+                      </a:r>
+                    </a:p>
+                  </a:txBody>
+                  <a:tcPr marL="91440" marR="91440" marT="27432" marB="27432" anchor="ctr">
+                    <a:solidFill>
+                      <a:srgbClr val="F8FAFC"/>
+                    </a:solidFill>
+                  </a:tcPr>
+                </a:tc>
+              </a:tr>
+              <a:tr h="566928">
+                <a:tc>
+                  <a:txBody>
+                    <a:bodyPr wrap="square" anchor="ctr" lIns="73152" rIns="73152" tIns="36576" bIns="36576">
+                      <a:noAutofit/>
+                    </a:bodyPr>
+                    <a:lstStyle/>
+                    <a:p>
+                      <a:pPr algn="l">
+                        <a:lnSpc>
+                          <a:spcPct val="115000"/>
+                        </a:lnSpc>
+                        <a:spcAft>
+                          <a:spcPts val="0"/>
+                        </a:spcAft>
+                      </a:pPr>
+                      <a:r>
+                        <a:rPr sz="1500" b="1">
+                          <a:solidFill>
+                            <a:srgbClr val="1F2937"/>
+                          </a:solidFill>
+                          <a:latin typeface="Microsoft YaHei"/>
+                          <a:ea typeface="Microsoft YaHei"/>
+                          <a:cs typeface="Microsoft YaHei"/>
+                        </a:rPr>
+                        <a:t>3D_sphbubcollapse</a:t>
+                      </a:r>
+                    </a:p>
+                  </a:txBody>
+                  <a:tcPr marL="91440" marR="91440" marT="27432" marB="27432" anchor="ctr">
+                    <a:solidFill>
+                      <a:srgbClr val="FFFFFF"/>
+                    </a:solidFill>
+                  </a:tcPr>
+                </a:tc>
+                <a:tc>
+                  <a:txBody>
+                    <a:bodyPr wrap="square" anchor="ctr" lIns="73152" rIns="73152" tIns="36576" bIns="36576">
+                      <a:noAutofit/>
+                    </a:bodyPr>
+                    <a:lstStyle/>
+                    <a:p>
+                      <a:pPr algn="l">
+                        <a:lnSpc>
+                          <a:spcPct val="115000"/>
+                        </a:lnSpc>
+                        <a:spcAft>
+                          <a:spcPts val="0"/>
+                        </a:spcAft>
+                      </a:pPr>
+                      <a:r>
+                        <a:rPr sz="1500" b="0">
+                          <a:solidFill>
+                            <a:srgbClr val="1F2937"/>
+                          </a:solidFill>
+                          <a:latin typeface="Microsoft YaHei"/>
+                          <a:ea typeface="Microsoft YaHei"/>
+                          <a:cs typeface="Microsoft YaHei"/>
+                        </a:rPr>
+                        <a:t>−6.1%</a:t>
+                      </a:r>
+                    </a:p>
+                  </a:txBody>
+                  <a:tcPr marL="91440" marR="91440" marT="27432" marB="27432" anchor="ctr">
+                    <a:solidFill>
+                      <a:srgbClr val="FFFFFF"/>
+                    </a:solidFill>
+                  </a:tcPr>
+                </a:tc>
+                <a:tc>
+                  <a:txBody>
+                    <a:bodyPr wrap="square" anchor="ctr" lIns="73152" rIns="73152" tIns="36576" bIns="36576">
+                      <a:noAutofit/>
+                    </a:bodyPr>
+                    <a:lstStyle/>
+                    <a:p>
+                      <a:pPr algn="l">
+                        <a:lnSpc>
+                          <a:spcPct val="115000"/>
+                        </a:lnSpc>
+                        <a:spcAft>
+                          <a:spcPts val="0"/>
+                        </a:spcAft>
+                      </a:pPr>
+                      <a:r>
+                        <a:rPr sz="1500" b="1">
+                          <a:solidFill>
+                            <a:srgbClr val="16A34A"/>
+                          </a:solidFill>
+                          <a:latin typeface="Microsoft YaHei"/>
+                          <a:ea typeface="Microsoft YaHei"/>
+                          <a:cs typeface="Microsoft YaHei"/>
+                        </a:rPr>
+                        <a:t>−20.3%</a:t>
+                      </a:r>
+                    </a:p>
+                  </a:txBody>
+                  <a:tcPr marL="91440" marR="91440" marT="27432" marB="27432" anchor="ctr">
+                    <a:solidFill>
+                      <a:srgbClr val="FFFFFF"/>
+                    </a:solidFill>
+                  </a:tcPr>
+                </a:tc>
+                <a:tc>
+                  <a:txBody>
+                    <a:bodyPr wrap="square" anchor="ctr" lIns="73152" rIns="73152" tIns="36576" bIns="36576">
+                      <a:noAutofit/>
+                    </a:bodyPr>
+                    <a:lstStyle/>
+                    <a:p>
+                      <a:pPr algn="l">
+                        <a:lnSpc>
+                          <a:spcPct val="115000"/>
+                        </a:lnSpc>
+                        <a:spcAft>
+                          <a:spcPts val="0"/>
+                        </a:spcAft>
+                      </a:pPr>
+                      <a:r>
+                        <a:rPr sz="1500" b="1">
+                          <a:solidFill>
+                            <a:srgbClr val="D97706"/>
+                          </a:solidFill>
+                          <a:latin typeface="Microsoft YaHei"/>
+                          <a:ea typeface="Microsoft YaHei"/>
+                          <a:cs typeface="Microsoft YaHei"/>
+                        </a:rPr>
+                        <a:t>−13.7%</a:t>
+                      </a:r>
+                    </a:p>
+                  </a:txBody>
+                  <a:tcPr marL="91440" marR="91440" marT="27432" marB="27432" anchor="ctr">
+                    <a:solidFill>
+                      <a:srgbClr val="FFFFFF"/>
+                    </a:solidFill>
+                  </a:tcPr>
+                </a:tc>
+                <a:tc>
+                  <a:txBody>
+                    <a:bodyPr wrap="square" anchor="ctr" lIns="73152" rIns="73152" tIns="36576" bIns="36576">
+                      <a:noAutofit/>
+                    </a:bodyPr>
+                    <a:lstStyle/>
+                    <a:p>
+                      <a:pPr algn="l">
+                        <a:lnSpc>
+                          <a:spcPct val="115000"/>
+                        </a:lnSpc>
+                        <a:spcAft>
+                          <a:spcPts val="0"/>
+                        </a:spcAft>
+                      </a:pPr>
+                      <a:r>
+                        <a:rPr sz="1500" b="1">
+                          <a:solidFill>
+                            <a:srgbClr val="64748B"/>
+                          </a:solidFill>
+                          <a:latin typeface="Microsoft YaHei"/>
+                          <a:ea typeface="Microsoft YaHei"/>
+                          <a:cs typeface="Microsoft YaHei"/>
+                        </a:rPr>
+                        <a:t>逐位一致</a:t>
+                      </a:r>
+                    </a:p>
+                  </a:txBody>
+                  <a:tcPr marL="91440" marR="91440" marT="27432" marB="27432" anchor="ctr">
+                    <a:solidFill>
+                      <a:srgbClr val="FFFFFF"/>
+                    </a:solidFill>
+                  </a:tcPr>
+                </a:tc>
+              </a:tr>
+              <a:tr h="566928">
+                <a:tc>
+                  <a:txBody>
+                    <a:bodyPr wrap="square" anchor="ctr" lIns="73152" rIns="73152" tIns="36576" bIns="36576">
+                      <a:noAutofit/>
+                    </a:bodyPr>
+                    <a:lstStyle/>
+                    <a:p>
+                      <a:pPr algn="l">
+                        <a:lnSpc>
+                          <a:spcPct val="115000"/>
+                        </a:lnSpc>
+                        <a:spcAft>
+                          <a:spcPts val="0"/>
+                        </a:spcAft>
+                      </a:pPr>
+                      <a:r>
+                        <a:rPr sz="1500" b="1">
+                          <a:solidFill>
+                            <a:srgbClr val="1F2937"/>
+                          </a:solidFill>
+                          <a:latin typeface="Microsoft YaHei"/>
+                          <a:ea typeface="Microsoft YaHei"/>
+                          <a:cs typeface="Microsoft YaHei"/>
+                        </a:rPr>
+                        <a:t>3D_IGR_TaylorGreenVortex</a:t>
+                      </a:r>
+                    </a:p>
+                  </a:txBody>
+                  <a:tcPr marL="91440" marR="91440" marT="27432" marB="27432" anchor="ctr">
+                    <a:solidFill>
+                      <a:srgbClr val="F8FAFC"/>
+                    </a:solidFill>
+                  </a:tcPr>
+                </a:tc>
+                <a:tc>
+                  <a:txBody>
+                    <a:bodyPr wrap="square" anchor="ctr" lIns="73152" rIns="73152" tIns="36576" bIns="36576">
+                      <a:noAutofit/>
+                    </a:bodyPr>
+                    <a:lstStyle/>
+                    <a:p>
+                      <a:pPr algn="l">
+                        <a:lnSpc>
+                          <a:spcPct val="115000"/>
+                        </a:lnSpc>
+                        <a:spcAft>
+                          <a:spcPts val="0"/>
+                        </a:spcAft>
+                      </a:pPr>
+                      <a:r>
+                        <a:rPr sz="1500" b="0">
+                          <a:solidFill>
+                            <a:srgbClr val="1F2937"/>
+                          </a:solidFill>
+                          <a:latin typeface="Microsoft YaHei"/>
+                          <a:ea typeface="Microsoft YaHei"/>
+                          <a:cs typeface="Microsoft YaHei"/>
+                        </a:rPr>
+                        <a:t>−3.8%</a:t>
+                      </a:r>
+                    </a:p>
+                  </a:txBody>
+                  <a:tcPr marL="91440" marR="91440" marT="27432" marB="27432" anchor="ctr">
+                    <a:solidFill>
+                      <a:srgbClr val="F8FAFC"/>
+                    </a:solidFill>
+                  </a:tcPr>
+                </a:tc>
+                <a:tc>
+                  <a:txBody>
+                    <a:bodyPr wrap="square" anchor="ctr" lIns="73152" rIns="73152" tIns="36576" bIns="36576">
+                      <a:noAutofit/>
+                    </a:bodyPr>
+                    <a:lstStyle/>
+                    <a:p>
+                      <a:pPr algn="l">
+                        <a:lnSpc>
+                          <a:spcPct val="115000"/>
+                        </a:lnSpc>
+                        <a:spcAft>
+                          <a:spcPts val="0"/>
+                        </a:spcAft>
+                      </a:pPr>
+                      <a:r>
+                        <a:rPr sz="1500" b="1">
+                          <a:solidFill>
+                            <a:srgbClr val="16A34A"/>
+                          </a:solidFill>
+                          <a:latin typeface="Microsoft YaHei"/>
+                          <a:ea typeface="Microsoft YaHei"/>
+                          <a:cs typeface="Microsoft YaHei"/>
+                        </a:rPr>
+                        <a:t>−28.4%</a:t>
+                      </a:r>
+                    </a:p>
+                  </a:txBody>
+                  <a:tcPr marL="91440" marR="91440" marT="27432" marB="27432" anchor="ctr">
+                    <a:solidFill>
+                      <a:srgbClr val="F8FAFC"/>
+                    </a:solidFill>
+                  </a:tcPr>
+                </a:tc>
+                <a:tc>
+                  <a:txBody>
+                    <a:bodyPr wrap="square" anchor="ctr" lIns="73152" rIns="73152" tIns="36576" bIns="36576">
+                      <a:noAutofit/>
+                    </a:bodyPr>
+                    <a:lstStyle/>
+                    <a:p>
+                      <a:pPr algn="l">
+                        <a:lnSpc>
+                          <a:spcPct val="115000"/>
+                        </a:lnSpc>
+                        <a:spcAft>
+                          <a:spcPts val="0"/>
+                        </a:spcAft>
+                      </a:pPr>
+                      <a:r>
+                        <a:rPr sz="1500" b="1">
+                          <a:solidFill>
+                            <a:srgbClr val="D97706"/>
+                          </a:solidFill>
+                          <a:latin typeface="Microsoft YaHei"/>
+                          <a:ea typeface="Microsoft YaHei"/>
+                          <a:cs typeface="Microsoft YaHei"/>
+                        </a:rPr>
+                        <a:t>−12.0%</a:t>
+                      </a:r>
+                    </a:p>
+                  </a:txBody>
+                  <a:tcPr marL="91440" marR="91440" marT="27432" marB="27432" anchor="ctr">
+                    <a:solidFill>
+                      <a:srgbClr val="F8FAFC"/>
+                    </a:solidFill>
+                  </a:tcPr>
+                </a:tc>
+                <a:tc>
+                  <a:txBody>
+                    <a:bodyPr wrap="square" anchor="ctr" lIns="73152" rIns="73152" tIns="36576" bIns="36576">
+                      <a:noAutofit/>
+                    </a:bodyPr>
+                    <a:lstStyle/>
+                    <a:p>
+                      <a:pPr algn="l">
+                        <a:lnSpc>
+                          <a:spcPct val="115000"/>
+                        </a:lnSpc>
+                        <a:spcAft>
+                          <a:spcPts val="0"/>
+                        </a:spcAft>
+                      </a:pPr>
+                      <a:r>
+                        <a:rPr sz="1500" b="1">
+                          <a:solidFill>
+                            <a:srgbClr val="64748B"/>
+                          </a:solidFill>
+                          <a:latin typeface="Microsoft YaHei"/>
+                          <a:ea typeface="Microsoft YaHei"/>
+                          <a:cs typeface="Microsoft YaHei"/>
+                        </a:rPr>
+                        <a:t>在基线自身波动内</a:t>
+                      </a:r>
+                    </a:p>
+                  </a:txBody>
+                  <a:tcPr marL="91440" marR="91440" marT="27432" marB="27432" anchor="ctr">
+                    <a:solidFill>
+                      <a:srgbClr val="F8FAFC"/>
+                    </a:solidFill>
+                  </a:tcPr>
+                </a:tc>
+              </a:tr>
+              <a:tr h="566928">
+                <a:tc>
+                  <a:txBody>
+                    <a:bodyPr wrap="square" anchor="ctr" lIns="73152" rIns="73152" tIns="36576" bIns="36576">
+                      <a:noAutofit/>
+                    </a:bodyPr>
+                    <a:lstStyle/>
+                    <a:p>
+                      <a:pPr algn="l">
+                        <a:lnSpc>
+                          <a:spcPct val="115000"/>
+                        </a:lnSpc>
+                        <a:spcAft>
+                          <a:spcPts val="0"/>
+                        </a:spcAft>
+                      </a:pPr>
+                      <a:r>
+                        <a:rPr sz="1500" b="1">
+                          <a:solidFill>
+                            <a:srgbClr val="1F2937"/>
+                          </a:solidFill>
+                          <a:latin typeface="Microsoft YaHei"/>
+                          <a:ea typeface="Microsoft YaHei"/>
+                          <a:cs typeface="Microsoft YaHei"/>
+                        </a:rPr>
+                        <a:t>3D_TaylorGreenVortex</a:t>
+                      </a:r>
+                    </a:p>
+                  </a:txBody>
+                  <a:tcPr marL="91440" marR="91440" marT="27432" marB="27432" anchor="ctr">
+                    <a:solidFill>
+                      <a:srgbClr val="FFFFFF"/>
+                    </a:solidFill>
+                  </a:tcPr>
+                </a:tc>
+                <a:tc>
+                  <a:txBody>
+                    <a:bodyPr wrap="square" anchor="ctr" lIns="73152" rIns="73152" tIns="36576" bIns="36576">
+                      <a:noAutofit/>
+                    </a:bodyPr>
+                    <a:lstStyle/>
+                    <a:p>
+                      <a:pPr algn="l">
+                        <a:lnSpc>
+                          <a:spcPct val="115000"/>
+                        </a:lnSpc>
+                        <a:spcAft>
+                          <a:spcPts val="0"/>
+                        </a:spcAft>
+                      </a:pPr>
+                      <a:r>
+                        <a:rPr sz="1500" b="0">
+                          <a:solidFill>
+                            <a:srgbClr val="1F2937"/>
+                          </a:solidFill>
+                          <a:latin typeface="Microsoft YaHei"/>
+                          <a:ea typeface="Microsoft YaHei"/>
+                          <a:cs typeface="Microsoft YaHei"/>
+                        </a:rPr>
+                        <a:t>−5.8%</a:t>
+                      </a:r>
+                    </a:p>
+                  </a:txBody>
+                  <a:tcPr marL="91440" marR="91440" marT="27432" marB="27432" anchor="ctr">
+                    <a:solidFill>
+                      <a:srgbClr val="FFFFFF"/>
+                    </a:solidFill>
+                  </a:tcPr>
+                </a:tc>
+                <a:tc>
+                  <a:txBody>
+                    <a:bodyPr wrap="square" anchor="ctr" lIns="73152" rIns="73152" tIns="36576" bIns="36576">
+                      <a:noAutofit/>
+                    </a:bodyPr>
+                    <a:lstStyle/>
+                    <a:p>
+                      <a:pPr algn="l">
+                        <a:lnSpc>
+                          <a:spcPct val="115000"/>
+                        </a:lnSpc>
+                        <a:spcAft>
+                          <a:spcPts val="0"/>
+                        </a:spcAft>
+                      </a:pPr>
+                      <a:r>
+                        <a:rPr sz="1500" b="1">
+                          <a:solidFill>
+                            <a:srgbClr val="16A34A"/>
+                          </a:solidFill>
+                          <a:latin typeface="Microsoft YaHei"/>
+                          <a:ea typeface="Microsoft YaHei"/>
+                          <a:cs typeface="Microsoft YaHei"/>
+                        </a:rPr>
+                        <a:t>−20.3%</a:t>
+                      </a:r>
+                    </a:p>
+                  </a:txBody>
+                  <a:tcPr marL="91440" marR="91440" marT="27432" marB="27432" anchor="ctr">
+                    <a:solidFill>
+                      <a:srgbClr val="FFFFFF"/>
+                    </a:solidFill>
+                  </a:tcPr>
+                </a:tc>
+                <a:tc>
+                  <a:txBody>
+                    <a:bodyPr wrap="square" anchor="ctr" lIns="73152" rIns="73152" tIns="36576" bIns="36576">
+                      <a:noAutofit/>
+                    </a:bodyPr>
+                    <a:lstStyle/>
+                    <a:p>
+                      <a:pPr algn="l">
+                        <a:lnSpc>
+                          <a:spcPct val="115000"/>
+                        </a:lnSpc>
+                        <a:spcAft>
+                          <a:spcPts val="0"/>
+                        </a:spcAft>
+                      </a:pPr>
+                      <a:r>
+                        <a:rPr sz="1500" b="1">
+                          <a:solidFill>
+                            <a:srgbClr val="D97706"/>
+                          </a:solidFill>
+                          <a:latin typeface="Microsoft YaHei"/>
+                          <a:ea typeface="Microsoft YaHei"/>
+                          <a:cs typeface="Microsoft YaHei"/>
+                        </a:rPr>
+                        <a:t>−11.8%</a:t>
+                      </a:r>
+                    </a:p>
+                  </a:txBody>
+                  <a:tcPr marL="91440" marR="91440" marT="27432" marB="27432" anchor="ctr">
+                    <a:solidFill>
+                      <a:srgbClr val="FFFFFF"/>
+                    </a:solidFill>
+                  </a:tcPr>
+                </a:tc>
+                <a:tc>
+                  <a:txBody>
+                    <a:bodyPr wrap="square" anchor="ctr" lIns="73152" rIns="73152" tIns="36576" bIns="36576">
+                      <a:noAutofit/>
+                    </a:bodyPr>
+                    <a:lstStyle/>
+                    <a:p>
+                      <a:pPr algn="l">
+                        <a:lnSpc>
+                          <a:spcPct val="115000"/>
+                        </a:lnSpc>
+                        <a:spcAft>
+                          <a:spcPts val="0"/>
+                        </a:spcAft>
+                      </a:pPr>
+                      <a:r>
+                        <a:rPr sz="1500" b="1">
+                          <a:solidFill>
+                            <a:srgbClr val="64748B"/>
+                          </a:solidFill>
+                          <a:latin typeface="Microsoft YaHei"/>
+                          <a:ea typeface="Microsoft YaHei"/>
+                          <a:cs typeface="Microsoft YaHei"/>
+                        </a:rPr>
+                        <a:t>逐位一致</a:t>
+                      </a:r>
+                    </a:p>
+                  </a:txBody>
+                  <a:tcPr marL="91440" marR="91440" marT="27432" marB="27432" anchor="ctr">
+                    <a:solidFill>
+                      <a:srgbClr val="FFFFFF"/>
+                    </a:solidFill>
+                  </a:tcPr>
+                </a:tc>
+              </a:tr>
+            </a:tbl>
+          </a:graphicData>
+        </a:graphic>
+      </p:graphicFrame>
+      <p:sp>
+        <p:nvSpPr>
+          <p:cNvPr id="7" name="TextBox 6"/>
+          <p:cNvSpPr txBox="1"/>
+          <p:nvPr/>
+        </p:nvSpPr>
+        <p:spPr>
+          <a:xfrm>
+            <a:off x="548640" y="4343400"/>
+            <a:ext cx="11155680" cy="1463040"/>
+          </a:xfrm>
+          <a:prstGeom prst="rect">
+            <a:avLst/>
+          </a:prstGeom>
+          <a:noFill/>
+        </p:spPr>
+        <p:txBody>
+          <a:bodyPr wrap="square" anchor="t" lIns="73152" rIns="73152" tIns="36576" bIns="36576">
+            <a:noAutofit/>
+          </a:bodyPr>
+          <a:lstStyle/>
+          <a:p>
+            <a:pPr algn="l">
+              <a:lnSpc>
+                <a:spcPct val="120000"/>
+              </a:lnSpc>
+              <a:spcAft>
+                <a:spcPts val="600"/>
+              </a:spcAft>
+            </a:pPr>
+            <a:r>
+              <a:rPr sz="1400" b="0">
+                <a:solidFill>
+                  <a:srgbClr val="1F2937"/>
+                </a:solidFill>
+                <a:latin typeface="Microsoft YaHei"/>
+                <a:ea typeface="Microsoft YaHei"/>
+                <a:cs typeface="Microsoft YaHei"/>
+              </a:rPr>
+              <a:t>•  每项 3 次平均，和同一算例、同一时段的基线比；后三个算例用缩短的官方算例副本</a:t>
+            </a:r>
+          </a:p>
+          <a:p>
+            <a:pPr algn="l">
+              <a:lnSpc>
+                <a:spcPct val="120000"/>
+              </a:lnSpc>
+              <a:spcAft>
+                <a:spcPts val="600"/>
+              </a:spcAft>
+            </a:pPr>
+            <a:r>
+              <a:rPr sz="1400" b="0">
+                <a:solidFill>
+                  <a:srgbClr val="1F2937"/>
+                </a:solidFill>
+                <a:latin typeface="Microsoft YaHei"/>
+                <a:ea typeface="Microsoft YaHei"/>
+                <a:cs typeface="Microsoft YaHei"/>
+              </a:rPr>
+              <a:t>•  部分 LTO：只让 </a:t>
+            </a:r>
+            <a:r>
+              <a:rPr sz="1400" b="0">
+                <a:solidFill>
+                  <a:srgbClr val="1F2937"/>
+                </a:solidFill>
+                <a:latin typeface="Consolas"/>
+                <a:ea typeface="Microsoft YaHei"/>
+                <a:cs typeface="Microsoft YaHei"/>
+              </a:rPr>
+              <a:t>m_weno</a:t>
+            </a:r>
+            <a:r>
+              <a:rPr sz="1400" b="0">
+                <a:solidFill>
+                  <a:srgbClr val="1F2937"/>
+                </a:solidFill>
+                <a:latin typeface="Microsoft YaHei"/>
+                <a:ea typeface="Microsoft YaHei"/>
+                <a:cs typeface="Microsoft YaHei"/>
+              </a:rPr>
+              <a:t> 不走 LTO、加寄存器上限 160（用编译器包装脚本实现），其他文件照常 LTO</a:t>
+            </a:r>
+          </a:p>
+          <a:p>
+            <a:pPr algn="l">
+              <a:lnSpc>
+                <a:spcPct val="120000"/>
+              </a:lnSpc>
+              <a:spcAft>
+                <a:spcPts val="600"/>
+              </a:spcAft>
+            </a:pPr>
+            <a:r>
+              <a:rPr sz="1400" b="0">
+                <a:solidFill>
+                  <a:srgbClr val="1F2937"/>
+                </a:solidFill>
+                <a:latin typeface="Microsoft YaHei"/>
+                <a:ea typeface="Microsoft YaHei"/>
+                <a:cs typeface="Microsoft YaHei"/>
+              </a:rPr>
+              <a:t>•  IGR 的基线每次运行结果都不同（相对差约 10</a:t>
+            </a:r>
+            <a:r>
+              <a:rPr sz="1400" b="0" baseline="30000">
+                <a:solidFill>
+                  <a:srgbClr val="1F2937"/>
+                </a:solidFill>
+                <a:latin typeface="Microsoft YaHei"/>
+                <a:ea typeface="Microsoft YaHei"/>
+                <a:cs typeface="Microsoft YaHei"/>
+              </a:rPr>
+              <a:t>−12</a:t>
+            </a:r>
+            <a:r>
+              <a:rPr sz="1400" b="0">
+                <a:solidFill>
+                  <a:srgbClr val="1F2937"/>
+                </a:solidFill>
+                <a:latin typeface="Microsoft YaHei"/>
+                <a:ea typeface="Microsoft YaHei"/>
+                <a:cs typeface="Microsoft YaHei"/>
+              </a:rPr>
+              <a:t>）；各版本和基线的差别都在这个范围内</a:t>
+            </a:r>
+          </a:p>
+        </p:txBody>
+      </p:sp>
+      <p:sp>
+        <p:nvSpPr>
+          <p:cNvPr id="8" name="Rectangle 7"/>
+          <p:cNvSpPr/>
+          <p:nvPr/>
+        </p:nvSpPr>
+        <p:spPr>
+          <a:xfrm>
+            <a:off x="457200" y="5989320"/>
+            <a:ext cx="11274552" cy="566928"/>
+          </a:xfrm>
+          <a:prstGeom prst="rect">
+            <a:avLst/>
+          </a:prstGeom>
+          <a:solidFill>
+            <a:srgbClr val="F1F5F9"/>
+          </a:solidFill>
+          <a:ln>
+            <a:noFill/>
+          </a:ln>
+          <a:effectLst/>
+        </p:spPr>
+        <p:style>
+          <a:lnRef idx="1">
+            <a:schemeClr val="accent1"/>
+          </a:lnRef>
+          <a:fillRef idx="3">
+            <a:schemeClr val="accent1"/>
+          </a:fillRef>
+          <a:effectRef idx="2">
+            <a:schemeClr val="accent1"/>
+          </a:effectRef>
+          <a:fontRef idx="minor">
+            <a:schemeClr val="lt1"/>
+          </a:fontRef>
+        </p:style>
+        <p:txBody>
+          <a:bodyPr rtlCol="0" anchor="ctr"/>
+          <a:lstStyle/>
+          <a:p>
+            <a:pPr algn="ctr"/>
+          </a:p>
+        </p:txBody>
+      </p:sp>
+      <p:sp>
+        <p:nvSpPr>
+          <p:cNvPr id="9" name="Rectangle 8"/>
+          <p:cNvSpPr/>
+          <p:nvPr/>
+        </p:nvSpPr>
+        <p:spPr>
+          <a:xfrm>
+            <a:off x="457200" y="5989320"/>
+            <a:ext cx="73152" cy="566928"/>
+          </a:xfrm>
+          <a:prstGeom prst="rect">
+            <a:avLst/>
+          </a:prstGeom>
+          <a:solidFill>
+            <a:srgbClr val="F97316"/>
+          </a:solidFill>
+          <a:ln>
+            <a:noFill/>
+          </a:ln>
+          <a:effectLst/>
+        </p:spPr>
+        <p:style>
+          <a:lnRef idx="1">
+            <a:schemeClr val="accent1"/>
+          </a:lnRef>
+          <a:fillRef idx="3">
+            <a:schemeClr val="accent1"/>
+          </a:fillRef>
+          <a:effectRef idx="2">
+            <a:schemeClr val="accent1"/>
+          </a:effectRef>
+          <a:fontRef idx="minor">
+            <a:schemeClr val="lt1"/>
+          </a:fontRef>
+        </p:style>
+        <p:txBody>
+          <a:bodyPr rtlCol="0" anchor="ctr"/>
+          <a:lstStyle/>
+          <a:p>
+            <a:pPr algn="ctr"/>
+          </a:p>
+        </p:txBody>
+      </p:sp>
+      <p:sp>
+        <p:nvSpPr>
+          <p:cNvPr id="10" name="TextBox 9"/>
+          <p:cNvSpPr txBox="1"/>
+          <p:nvPr/>
+        </p:nvSpPr>
+        <p:spPr>
+          <a:xfrm>
+            <a:off x="640080" y="5989320"/>
+            <a:ext cx="11018520" cy="566928"/>
+          </a:xfrm>
+          <a:prstGeom prst="rect">
+            <a:avLst/>
+          </a:prstGeom>
+          <a:noFill/>
+        </p:spPr>
+        <p:txBody>
+          <a:bodyPr wrap="square" anchor="ctr" lIns="73152" rIns="73152" tIns="36576" bIns="36576">
+            <a:noAutofit/>
+          </a:bodyPr>
+          <a:lstStyle/>
+          <a:p>
+            <a:pPr algn="l">
+              <a:lnSpc>
+                <a:spcPct val="115000"/>
+              </a:lnSpc>
+              <a:spcAft>
+                <a:spcPts val="0"/>
+              </a:spcAft>
+            </a:pPr>
+            <a:r>
+              <a:rPr sz="1600" b="0">
+                <a:solidFill>
+                  <a:srgbClr val="1F2937"/>
+                </a:solidFill>
+                <a:latin typeface="Microsoft YaHei"/>
+                <a:ea typeface="Microsoft YaHei"/>
+                <a:cs typeface="Microsoft YaHei"/>
+              </a:rPr>
+              <a:t>只开 LTO 在四个官方算例上都最快（快 20%–28%）；全局上限和部分 LTO + 上限都更慢</a:t>
+            </a:r>
+          </a:p>
+        </p:txBody>
+      </p:sp>
+    </p:spTree>
+  </p:cSld>
+  <p:clrMapOvr>
+    <a:masterClrMapping/>
+  </p:clrMapOvr>
+</p:sld>
+</file>
+
+<file path=ppt/slides/slide7.xml><?xml version="1.0" encoding="utf-8"?>
+<p:sld xmlns:a="http://schemas.openxmlformats.org/drawingml/2006/main" xmlns:p="http://schemas.openxmlformats.org/presentationml/2006/main" xmlns:r="http://schemas.openxmlformats.org/officeDocument/2006/relationships">
+  <p:cSld>
+    <p:spTree>
+      <p:nvGrpSpPr>
+        <p:cNvPr id="1" name=""/>
+        <p:cNvGrpSpPr/>
+        <p:nvPr/>
+      </p:nvGrpSpPr>
+      <p:grpSpPr/>
+      <p:sp>
+        <p:nvSpPr>
+          <p:cNvPr id="2" name="Rectangle 1"/>
+          <p:cNvSpPr/>
+          <p:nvPr/>
+        </p:nvSpPr>
+        <p:spPr>
+          <a:xfrm>
+            <a:off x="274320" y="347472"/>
+            <a:ext cx="82296" cy="457200"/>
+          </a:xfrm>
+          <a:prstGeom prst="rect">
+            <a:avLst/>
+          </a:prstGeom>
+          <a:solidFill>
+            <a:srgbClr val="F97316"/>
+          </a:solidFill>
+          <a:ln>
+            <a:noFill/>
+          </a:ln>
+          <a:effectLst/>
+        </p:spPr>
+        <p:style>
+          <a:lnRef idx="1">
+            <a:schemeClr val="accent1"/>
+          </a:lnRef>
+          <a:fillRef idx="3">
+            <a:schemeClr val="accent1"/>
+          </a:fillRef>
+          <a:effectRef idx="2">
+            <a:schemeClr val="accent1"/>
+          </a:effectRef>
+          <a:fontRef idx="minor">
+            <a:schemeClr val="lt1"/>
+          </a:fontRef>
+        </p:style>
+        <p:txBody>
+          <a:bodyPr rtlCol="0" anchor="ctr"/>
+          <a:lstStyle/>
+          <a:p>
+            <a:pPr algn="ctr"/>
+          </a:p>
+        </p:txBody>
+      </p:sp>
+      <p:sp>
+        <p:nvSpPr>
+          <p:cNvPr id="3" name="TextBox 2"/>
+          <p:cNvSpPr txBox="1"/>
+          <p:nvPr/>
+        </p:nvSpPr>
+        <p:spPr>
+          <a:xfrm>
+            <a:off x="457200" y="237744"/>
+            <a:ext cx="9509760" cy="676656"/>
+          </a:xfrm>
+          <a:prstGeom prst="rect">
+            <a:avLst/>
+          </a:prstGeom>
+          <a:noFill/>
+        </p:spPr>
+        <p:txBody>
+          <a:bodyPr wrap="square" anchor="ctr" lIns="73152" rIns="73152" tIns="36576" bIns="36576">
+            <a:noAutofit/>
+          </a:bodyPr>
+          <a:lstStyle/>
+          <a:p>
+            <a:pPr algn="l">
+              <a:lnSpc>
+                <a:spcPct val="115000"/>
+              </a:lnSpc>
+              <a:spcAft>
+                <a:spcPts val="0"/>
+              </a:spcAft>
+            </a:pPr>
+            <a:r>
+              <a:rPr sz="2600" b="1">
+                <a:solidFill>
+                  <a:srgbClr val="1E3A5F"/>
+                </a:solidFill>
+                <a:latin typeface="Microsoft YaHei"/>
+                <a:ea typeface="Microsoft YaHei"/>
+                <a:cs typeface="Microsoft YaHei"/>
+              </a:rPr>
+              <a:t>第三层（续）寄存器上限和其他选项</a:t>
+            </a:r>
+          </a:p>
+        </p:txBody>
+      </p:sp>
+      <p:sp>
+        <p:nvSpPr>
+          <p:cNvPr id="4" name="TextBox 3"/>
+          <p:cNvSpPr txBox="1"/>
+          <p:nvPr/>
+        </p:nvSpPr>
+        <p:spPr>
+          <a:xfrm>
+            <a:off x="9784080" y="310896"/>
+            <a:ext cx="2103120" cy="457200"/>
+          </a:xfrm>
+          <a:prstGeom prst="rect">
+            <a:avLst/>
+          </a:prstGeom>
+          <a:noFill/>
+        </p:spPr>
+        <p:txBody>
+          <a:bodyPr wrap="square" anchor="ctr" lIns="73152" rIns="73152" tIns="36576" bIns="36576">
+            <a:noAutofit/>
+          </a:bodyPr>
+          <a:lstStyle/>
+          <a:p>
+            <a:pPr algn="r">
+              <a:lnSpc>
+                <a:spcPct val="115000"/>
+              </a:lnSpc>
+              <a:spcAft>
+                <a:spcPts val="0"/>
+              </a:spcAft>
+            </a:pPr>
+            <a:r>
+              <a:rPr sz="1200" b="0">
+                <a:solidFill>
+                  <a:srgbClr val="64748B"/>
+                </a:solidFill>
+                <a:latin typeface="Microsoft YaHei"/>
+                <a:ea typeface="Microsoft YaHei"/>
+                <a:cs typeface="Microsoft YaHei"/>
+              </a:rPr>
+              <a:t>第三层　7 / 11</a:t>
             </a:r>
           </a:p>
         </p:txBody>
@@ -9818,13 +14298,13 @@
                       <a:r>
                         <a:rPr sz="1400" b="1">
                           <a:solidFill>
-                            <a:srgbClr val="D97706"/>
+                            <a:srgbClr val="64748B"/>
                           </a:solidFill>
                           <a:latin typeface="Microsoft YaHei"/>
                           <a:ea typeface="Microsoft YaHei"/>
                           <a:cs typeface="Microsoft YaHei"/>
                         </a:rPr>
-                        <a:t>最多快 1%，可能算错</a:t>
+                        <a:t>没效果：同步次数不变</a:t>
                       </a:r>
                     </a:p>
                   </a:txBody>
@@ -9930,28 +14410,6 @@
                           <a:ea typeface="Microsoft YaHei"/>
                           <a:cs typeface="Microsoft YaHei"/>
                         </a:rPr>
-                        <a:t>lto</a:t>
-                      </a:r>
-                      <a:r>
-                        <a:rPr sz="1400" b="1">
-                          <a:solidFill>
-                            <a:srgbClr val="1F2937"/>
-                          </a:solidFill>
-                          <a:latin typeface="Microsoft YaHei"/>
-                          <a:ea typeface="Microsoft YaHei"/>
-                          <a:cs typeface="Microsoft YaHei"/>
-                        </a:rPr>
-                        <a:t>、</a:t>
-                      </a:r>
-                      <a:r>
-                        <a:rPr sz="1400" b="1">
-                          <a:solidFill>
-                            <a:srgbClr val="1F2937"/>
-                          </a:solidFill>
-                          <a:latin typeface="Consolas"/>
-                          <a:ea typeface="Microsoft YaHei"/>
-                          <a:cs typeface="Microsoft YaHei"/>
-                        </a:rPr>
                         <a:t>cuda12.9</a:t>
                       </a:r>
                     </a:p>
@@ -10124,22 +14582,11 @@
                 <a:solidFill>
                   <a:srgbClr val="1F2937"/>
                 </a:solidFill>
-                <a:latin typeface="Consolas"/>
+                <a:latin typeface="Microsoft YaHei"/>
                 <a:ea typeface="Microsoft YaHei"/>
                 <a:cs typeface="Microsoft YaHei"/>
               </a:rPr>
-              <a:t>FFLAGS=-gpu=maxregcount:160</a:t>
-            </a:r>
-            <a:r>
-              <a:rPr sz="1600" b="0">
-                <a:solidFill>
-                  <a:srgbClr val="1F2937"/>
-                </a:solidFill>
-                <a:latin typeface="Microsoft YaHei"/>
-                <a:ea typeface="Microsoft YaHei"/>
-                <a:cs typeface="Microsoft YaHei"/>
-              </a:rPr>
-              <a:t>：输出逐位一致；2 卡快 6.5%，另两个官方算例快 6.3% 和 3.4%</a:t>
+              <a:t>寄存器上限 160 单独用快 6.1%、输出逐位一致，另两个官方算例快 6.3% 和 3.4%；和 LTO 叠加反而变慢</a:t>
             </a:r>
           </a:p>
         </p:txBody>
@@ -10152,7 +14599,7 @@
 </p:sld>
 </file>
 
-<file path=ppt/slides/slide6.xml><?xml version="1.0" encoding="utf-8"?>
+<file path=ppt/slides/slide8.xml><?xml version="1.0" encoding="utf-8"?>
 <p:sld xmlns:a="http://schemas.openxmlformats.org/drawingml/2006/main" xmlns:p="http://schemas.openxmlformats.org/presentationml/2006/main" xmlns:r="http://schemas.openxmlformats.org/officeDocument/2006/relationships">
   <p:cSld>
     <p:spTree>
@@ -10289,7 +14736,7 @@
                 <a:ea typeface="Microsoft YaHei"/>
                 <a:cs typeface="Microsoft YaHei"/>
               </a:rPr>
-              <a:t>第四层　6 / 9</a:t>
+              <a:t>第四层　8 / 11</a:t>
             </a:r>
           </a:p>
         </p:txBody>
@@ -10991,11 +15438,11 @@
                 <a:spcPct val="120000"/>
               </a:lnSpc>
               <a:spcAft>
-                <a:spcPts val="1400"/>
+                <a:spcPts val="1200"/>
               </a:spcAft>
             </a:pPr>
             <a:r>
-              <a:rPr sz="1600" b="0">
+              <a:rPr sz="1500" b="0">
                 <a:solidFill>
                   <a:srgbClr val="1F2937"/>
                 </a:solidFill>
@@ -11006,7 +15453,7 @@
               <a:t>•  </a:t>
             </a:r>
             <a:r>
-              <a:rPr sz="1600" b="1">
+              <a:rPr sz="1500" b="1">
                 <a:solidFill>
                   <a:srgbClr val="1F2937"/>
                 </a:solidFill>
@@ -11017,7 +15464,7 @@
               <a:t>做法</a:t>
             </a:r>
             <a:r>
-              <a:rPr sz="1600" b="0">
+              <a:rPr sz="1500" b="0">
                 <a:solidFill>
                   <a:srgbClr val="1F2937"/>
                 </a:solidFill>
@@ -11028,7 +15475,7 @@
               <a:t>：算例文件加一行 </a:t>
             </a:r>
             <a:r>
-              <a:rPr sz="1600" b="0">
+              <a:rPr sz="1500" b="0">
                 <a:solidFill>
                   <a:srgbClr val="1F2937"/>
                 </a:solidFill>
@@ -11037,6 +15484,17 @@
                 <a:cs typeface="Microsoft YaHei"/>
               </a:rPr>
               <a:t>"rdma_mpi": "T"</a:t>
+            </a:r>
+            <a:r>
+              <a:rPr sz="1500" b="0">
+                <a:solidFill>
+                  <a:srgbClr val="1F2937"/>
+                </a:solidFill>
+                <a:latin typeface="Microsoft YaHei"/>
+                <a:ea typeface="Microsoft YaHei"/>
+                <a:cs typeface="Microsoft YaHei"/>
+              </a:rPr>
+              <a:t>，不用重编</a:t>
             </a:r>
           </a:p>
           <a:p>
@@ -11045,11 +15503,11 @@
                 <a:spcPct val="120000"/>
               </a:lnSpc>
               <a:spcAft>
-                <a:spcPts val="1400"/>
+                <a:spcPts val="1200"/>
               </a:spcAft>
             </a:pPr>
             <a:r>
-              <a:rPr sz="1600" b="0">
+              <a:rPr sz="1500" b="0">
                 <a:solidFill>
                   <a:srgbClr val="1F2937"/>
                 </a:solidFill>
@@ -11060,7 +15518,7 @@
               <a:t>•  </a:t>
             </a:r>
             <a:r>
-              <a:rPr sz="1600" b="1">
+              <a:rPr sz="1500" b="1">
                 <a:solidFill>
                   <a:srgbClr val="1F2937"/>
                 </a:solidFill>
@@ -11068,10 +15526,10 @@
                 <a:ea typeface="Microsoft YaHei"/>
                 <a:cs typeface="Microsoft YaHei"/>
               </a:rPr>
-              <a:t>不用重编</a:t>
-            </a:r>
-            <a:r>
-              <a:rPr sz="1600" b="0">
+              <a:t>原理</a:t>
+            </a:r>
+            <a:r>
+              <a:rPr sz="1500" b="0">
                 <a:solidFill>
                   <a:srgbClr val="1F2937"/>
                 </a:solidFill>
@@ -11079,7 +15537,29 @@
                 <a:ea typeface="Microsoft YaHei"/>
                 <a:cs typeface="Microsoft YaHei"/>
               </a:rPr>
-              <a:t>：它不是 case-optimization 写死的参数</a:t>
+              <a:t>：显存地址直接交给 MPI；UCX 用 </a:t>
+            </a:r>
+            <a:r>
+              <a:rPr sz="1500" b="0">
+                <a:solidFill>
+                  <a:srgbClr val="1F2937"/>
+                </a:solidFill>
+                <a:latin typeface="Consolas"/>
+                <a:ea typeface="Microsoft YaHei"/>
+                <a:cs typeface="Microsoft YaHei"/>
+              </a:rPr>
+              <a:t>cuda_ipc</a:t>
+            </a:r>
+            <a:r>
+              <a:rPr sz="1500" b="0">
+                <a:solidFill>
+                  <a:srgbClr val="1F2937"/>
+                </a:solidFill>
+                <a:latin typeface="Microsoft YaHei"/>
+                <a:ea typeface="Microsoft YaHei"/>
+                <a:cs typeface="Microsoft YaHei"/>
+              </a:rPr>
+              <a:t>，两张卡经 NVLink 直接拷贝（已确认）</a:t>
             </a:r>
           </a:p>
           <a:p>
@@ -11088,11 +15568,11 @@
                 <a:spcPct val="120000"/>
               </a:lnSpc>
               <a:spcAft>
-                <a:spcPts val="1400"/>
+                <a:spcPts val="1200"/>
               </a:spcAft>
             </a:pPr>
             <a:r>
-              <a:rPr sz="1600" b="0">
+              <a:rPr sz="1500" b="0">
                 <a:solidFill>
                   <a:srgbClr val="1F2937"/>
                 </a:solidFill>
@@ -11103,7 +15583,7 @@
               <a:t>•  </a:t>
             </a:r>
             <a:r>
-              <a:rPr sz="1600" b="1">
+              <a:rPr sz="1500" b="1">
                 <a:solidFill>
                   <a:srgbClr val="1F2937"/>
                 </a:solidFill>
@@ -11111,10 +15591,10 @@
                 <a:ea typeface="Microsoft YaHei"/>
                 <a:cs typeface="Microsoft YaHei"/>
               </a:rPr>
-              <a:t>原理</a:t>
-            </a:r>
-            <a:r>
-              <a:rPr sz="1600" b="0">
+              <a:t>不是网络 RDMA</a:t>
+            </a:r>
+            <a:r>
+              <a:rPr sz="1500" b="0">
                 <a:solidFill>
                   <a:srgbClr val="1F2937"/>
                 </a:solidFill>
@@ -11122,7 +15602,7 @@
                 <a:ea typeface="Microsoft YaHei"/>
                 <a:cs typeface="Microsoft YaHei"/>
               </a:rPr>
-              <a:t>：两张卡经 NVLink 直接交换边界数据，不经主机中转</a:t>
+              <a:t>：单机是 GPU 点对点，跨机才走网卡</a:t>
             </a:r>
           </a:p>
           <a:p>
@@ -11131,11 +15611,11 @@
                 <a:spcPct val="120000"/>
               </a:lnSpc>
               <a:spcAft>
-                <a:spcPts val="1400"/>
+                <a:spcPts val="1200"/>
               </a:spcAft>
             </a:pPr>
             <a:r>
-              <a:rPr sz="1600" b="0">
+              <a:rPr sz="1500" b="0">
                 <a:solidFill>
                   <a:srgbClr val="1F2937"/>
                 </a:solidFill>
@@ -11146,7 +15626,7 @@
               <a:t>•  </a:t>
             </a:r>
             <a:r>
-              <a:rPr sz="1600" b="1">
+              <a:rPr sz="1500" b="1">
                 <a:solidFill>
                   <a:srgbClr val="1F2937"/>
                 </a:solidFill>
@@ -11157,7 +15637,7 @@
               <a:t>效果</a:t>
             </a:r>
             <a:r>
-              <a:rPr sz="1600" b="0">
+              <a:rPr sz="1500" b="0">
                 <a:solidFill>
                   <a:srgbClr val="1F2937"/>
                 </a:solidFill>
@@ -11174,11 +15654,11 @@
                 <a:spcPct val="120000"/>
               </a:lnSpc>
               <a:spcAft>
-                <a:spcPts val="1400"/>
+                <a:spcPts val="1200"/>
               </a:spcAft>
             </a:pPr>
             <a:r>
-              <a:rPr sz="1600" b="0">
+              <a:rPr sz="1500" b="0">
                 <a:solidFill>
                   <a:srgbClr val="1F2937"/>
                 </a:solidFill>
@@ -11189,7 +15669,7 @@
               <a:t>•  </a:t>
             </a:r>
             <a:r>
-              <a:rPr sz="1600" b="1">
+              <a:rPr sz="1500" b="1">
                 <a:solidFill>
                   <a:srgbClr val="1F2937"/>
                 </a:solidFill>
@@ -11200,7 +15680,7 @@
               <a:t>其他字段</a:t>
             </a:r>
             <a:r>
-              <a:rPr sz="1600" b="0">
+              <a:rPr sz="1500" b="0">
                 <a:solidFill>
                   <a:srgbClr val="1F2937"/>
                 </a:solidFill>
@@ -11211,7 +15691,7 @@
               <a:t>：</a:t>
             </a:r>
             <a:r>
-              <a:rPr sz="1600" b="0">
+              <a:rPr sz="1500" b="0">
                 <a:solidFill>
                   <a:srgbClr val="1F2937"/>
                 </a:solidFill>
@@ -11222,7 +15702,7 @@
               <a:t>parallel_io</a:t>
             </a:r>
             <a:r>
-              <a:rPr sz="1600" b="0">
+              <a:rPr sz="1500" b="0">
                 <a:solidFill>
                   <a:srgbClr val="1F2937"/>
                 </a:solidFill>
@@ -11233,7 +15713,7 @@
               <a:t>、</a:t>
             </a:r>
             <a:r>
-              <a:rPr sz="1600" b="0">
+              <a:rPr sz="1500" b="0">
                 <a:solidFill>
                   <a:srgbClr val="1F2937"/>
                 </a:solidFill>
@@ -11244,7 +15724,7 @@
               <a:t>file_per_process</a:t>
             </a:r>
             <a:r>
-              <a:rPr sz="1600" b="0">
+              <a:rPr sz="1500" b="0">
                 <a:solidFill>
                   <a:srgbClr val="1F2937"/>
                 </a:solidFill>
@@ -11255,7 +15735,7 @@
               <a:t>、</a:t>
             </a:r>
             <a:r>
-              <a:rPr sz="1600" b="0">
+              <a:rPr sz="1500" b="0">
                 <a:solidFill>
                   <a:srgbClr val="1F2937"/>
                 </a:solidFill>
@@ -11266,7 +15746,7 @@
               <a:t>t_step_save</a:t>
             </a:r>
             <a:r>
-              <a:rPr sz="1600" b="0">
+              <a:rPr sz="1500" b="0">
                 <a:solidFill>
                   <a:srgbClr val="1F2937"/>
                 </a:solidFill>
@@ -11419,7 +15899,7 @@
 </p:sld>
 </file>
 
-<file path=ppt/slides/slide7.xml><?xml version="1.0" encoding="utf-8"?>
+<file path=ppt/slides/slide9.xml><?xml version="1.0" encoding="utf-8"?>
 <p:sld xmlns:a="http://schemas.openxmlformats.org/drawingml/2006/main" xmlns:p="http://schemas.openxmlformats.org/presentationml/2006/main" xmlns:r="http://schemas.openxmlformats.org/officeDocument/2006/relationships">
   <p:cSld>
     <p:spTree>
@@ -11512,7 +15992,7 @@
                 <a:ea typeface="Microsoft YaHei"/>
                 <a:cs typeface="Microsoft YaHei"/>
               </a:rPr>
-              <a:t>第五层 启动方式：每卡 1 个 rank，绑 NUMA 0 的核</a:t>
+              <a:t>第五层 启动方式：每卡 1 个 rank，MPS 也不更快</a:t>
             </a:r>
           </a:p>
         </p:txBody>
@@ -11556,7 +16036,7 @@
                 <a:ea typeface="Microsoft YaHei"/>
                 <a:cs typeface="Microsoft YaHei"/>
               </a:rPr>
-              <a:t>第五层　7 / 9</a:t>
+              <a:t>第五层　9 / 11</a:t>
             </a:r>
           </a:p>
         </p:txBody>
@@ -11605,8 +16085,8 @@
           <p:nvPr/>
         </p:nvGraphicFramePr>
         <p:xfrm>
-          <a:off x="548640" y="1325880"/>
-          <a:ext cx="11091672" cy="2743200"/>
+          <a:off x="548640" y="1280160"/>
+          <a:ext cx="11091672" cy="3017520"/>
         </p:xfrm>
         <a:graphic>
           <a:graphicData uri="http://schemas.openxmlformats.org/drawingml/2006/table">
@@ -11616,11 +16096,11 @@
               </a:tblPr>
               <a:tblGrid>
                 <a:gridCol w="2377440"/>
-                <a:gridCol w="3840480"/>
-                <a:gridCol w="1645920"/>
-                <a:gridCol w="3227832"/>
+                <a:gridCol w="3657600"/>
+                <a:gridCol w="1554480"/>
+                <a:gridCol w="3502152"/>
               </a:tblGrid>
-              <a:tr h="548640">
+              <a:tr h="502920">
                 <a:tc>
                   <a:txBody>
                     <a:bodyPr wrap="square" anchor="ctr" lIns="73152" rIns="73152" tIns="36576" bIns="36576">
@@ -11758,7 +16238,7 @@
                   </a:tcPr>
                 </a:tc>
               </a:tr>
-              <a:tr h="548640">
+              <a:tr h="502920">
                 <a:tc>
                   <a:txBody>
                     <a:bodyPr wrap="square" anchor="ctr" lIns="73152" rIns="73152" tIns="36576" bIns="36576">
@@ -11851,7 +16331,7 @@
                           <a:ea typeface="Microsoft YaHei"/>
                           <a:cs typeface="Microsoft YaHei"/>
                         </a:rPr>
-                        <a:t>0.4535</a:t>
+                        <a:t>0.4538</a:t>
                       </a:r>
                     </a:p>
                   </a:txBody>
@@ -11896,7 +16376,294 @@
                   </a:tcPr>
                 </a:tc>
               </a:tr>
-              <a:tr h="548640">
+              <a:tr h="502920">
+                <a:tc>
+                  <a:txBody>
+                    <a:bodyPr wrap="square" anchor="ctr" lIns="73152" rIns="73152" tIns="36576" bIns="36576">
+                      <a:noAutofit/>
+                    </a:bodyPr>
+                    <a:lstStyle/>
+                    <a:p>
+                      <a:pPr algn="l">
+                        <a:lnSpc>
+                          <a:spcPct val="115000"/>
+                        </a:lnSpc>
+                        <a:spcAft>
+                          <a:spcPts val="0"/>
+                        </a:spcAft>
+                      </a:pPr>
+                      <a:r>
+                        <a:rPr sz="1500" b="1">
+                          <a:solidFill>
+                            <a:srgbClr val="1F2937"/>
+                          </a:solidFill>
+                          <a:latin typeface="Consolas"/>
+                          <a:ea typeface="Microsoft YaHei"/>
+                          <a:cs typeface="Microsoft YaHei"/>
+                        </a:rPr>
+                        <a:t>-n 2 -g 1</a:t>
+                      </a:r>
+                    </a:p>
+                  </a:txBody>
+                  <a:tcPr marL="91440" marR="91440" marT="27432" marB="27432" anchor="ctr">
+                    <a:solidFill>
+                      <a:srgbClr val="FFFFFF"/>
+                    </a:solidFill>
+                  </a:tcPr>
+                </a:tc>
+                <a:tc>
+                  <a:txBody>
+                    <a:bodyPr wrap="square" anchor="ctr" lIns="73152" rIns="73152" tIns="36576" bIns="36576">
+                      <a:noAutofit/>
+                    </a:bodyPr>
+                    <a:lstStyle/>
+                    <a:p>
+                      <a:pPr algn="l">
+                        <a:lnSpc>
+                          <a:spcPct val="115000"/>
+                        </a:lnSpc>
+                        <a:spcAft>
+                          <a:spcPts val="0"/>
+                        </a:spcAft>
+                      </a:pPr>
+                      <a:r>
+                        <a:rPr sz="1500" b="0">
+                          <a:solidFill>
+                            <a:srgbClr val="1F2937"/>
+                          </a:solidFill>
+                          <a:latin typeface="Microsoft YaHei"/>
+                          <a:ea typeface="Microsoft YaHei"/>
+                          <a:cs typeface="Microsoft YaHei"/>
+                        </a:rPr>
+                        <a:t>2 个 rank 共用 1 张卡</a:t>
+                      </a:r>
+                    </a:p>
+                  </a:txBody>
+                  <a:tcPr marL="91440" marR="91440" marT="27432" marB="27432" anchor="ctr">
+                    <a:solidFill>
+                      <a:srgbClr val="FFFFFF"/>
+                    </a:solidFill>
+                  </a:tcPr>
+                </a:tc>
+                <a:tc>
+                  <a:txBody>
+                    <a:bodyPr wrap="square" anchor="ctr" lIns="73152" rIns="73152" tIns="36576" bIns="36576">
+                      <a:noAutofit/>
+                    </a:bodyPr>
+                    <a:lstStyle/>
+                    <a:p>
+                      <a:pPr algn="l">
+                        <a:lnSpc>
+                          <a:spcPct val="115000"/>
+                        </a:lnSpc>
+                        <a:spcAft>
+                          <a:spcPts val="0"/>
+                        </a:spcAft>
+                      </a:pPr>
+                      <a:r>
+                        <a:rPr sz="1500" b="0">
+                          <a:solidFill>
+                            <a:srgbClr val="1F2937"/>
+                          </a:solidFill>
+                          <a:latin typeface="Microsoft YaHei"/>
+                          <a:ea typeface="Microsoft YaHei"/>
+                          <a:cs typeface="Microsoft YaHei"/>
+                        </a:rPr>
+                        <a:t>0.8421</a:t>
+                      </a:r>
+                    </a:p>
+                  </a:txBody>
+                  <a:tcPr marL="91440" marR="91440" marT="27432" marB="27432" anchor="ctr">
+                    <a:solidFill>
+                      <a:srgbClr val="FFFFFF"/>
+                    </a:solidFill>
+                  </a:tcPr>
+                </a:tc>
+                <a:tc>
+                  <a:txBody>
+                    <a:bodyPr wrap="square" anchor="ctr" lIns="73152" rIns="73152" tIns="36576" bIns="36576">
+                      <a:noAutofit/>
+                    </a:bodyPr>
+                    <a:lstStyle/>
+                    <a:p>
+                      <a:pPr algn="l">
+                        <a:lnSpc>
+                          <a:spcPct val="115000"/>
+                        </a:lnSpc>
+                        <a:spcAft>
+                          <a:spcPts val="0"/>
+                        </a:spcAft>
+                      </a:pPr>
+                      <a:r>
+                        <a:rPr sz="1500" b="1">
+                          <a:solidFill>
+                            <a:srgbClr val="DC2626"/>
+                          </a:solidFill>
+                          <a:latin typeface="Microsoft YaHei"/>
+                          <a:ea typeface="Microsoft YaHei"/>
+                          <a:cs typeface="Microsoft YaHei"/>
+                        </a:rPr>
+                        <a:t>慢 86%（分时切换）</a:t>
+                      </a:r>
+                    </a:p>
+                  </a:txBody>
+                  <a:tcPr marL="91440" marR="91440" marT="27432" marB="27432" anchor="ctr">
+                    <a:solidFill>
+                      <a:srgbClr val="FFFFFF"/>
+                    </a:solidFill>
+                  </a:tcPr>
+                </a:tc>
+              </a:tr>
+              <a:tr h="502920">
+                <a:tc>
+                  <a:txBody>
+                    <a:bodyPr wrap="square" anchor="ctr" lIns="73152" rIns="73152" tIns="36576" bIns="36576">
+                      <a:noAutofit/>
+                    </a:bodyPr>
+                    <a:lstStyle/>
+                    <a:p>
+                      <a:pPr algn="l">
+                        <a:lnSpc>
+                          <a:spcPct val="115000"/>
+                        </a:lnSpc>
+                        <a:spcAft>
+                          <a:spcPts val="0"/>
+                        </a:spcAft>
+                      </a:pPr>
+                      <a:r>
+                        <a:rPr sz="1500" b="1">
+                          <a:solidFill>
+                            <a:srgbClr val="1F2937"/>
+                          </a:solidFill>
+                          <a:latin typeface="Consolas"/>
+                          <a:ea typeface="Microsoft YaHei"/>
+                          <a:cs typeface="Microsoft YaHei"/>
+                        </a:rPr>
+                        <a:t>-n 2 -g 1</a:t>
+                      </a:r>
+                      <a:r>
+                        <a:rPr sz="1500" b="1">
+                          <a:solidFill>
+                            <a:srgbClr val="1F2937"/>
+                          </a:solidFill>
+                          <a:latin typeface="Microsoft YaHei"/>
+                          <a:ea typeface="Microsoft YaHei"/>
+                          <a:cs typeface="Microsoft YaHei"/>
+                        </a:rPr>
+                        <a:t> + MPS</a:t>
+                      </a:r>
+                    </a:p>
+                  </a:txBody>
+                  <a:tcPr marL="91440" marR="91440" marT="27432" marB="27432" anchor="ctr">
+                    <a:solidFill>
+                      <a:srgbClr val="F8FAFC"/>
+                    </a:solidFill>
+                  </a:tcPr>
+                </a:tc>
+                <a:tc>
+                  <a:txBody>
+                    <a:bodyPr wrap="square" anchor="ctr" lIns="73152" rIns="73152" tIns="36576" bIns="36576">
+                      <a:noAutofit/>
+                    </a:bodyPr>
+                    <a:lstStyle/>
+                    <a:p>
+                      <a:pPr algn="l">
+                        <a:lnSpc>
+                          <a:spcPct val="115000"/>
+                        </a:lnSpc>
+                        <a:spcAft>
+                          <a:spcPts val="0"/>
+                        </a:spcAft>
+                      </a:pPr>
+                      <a:r>
+                        <a:rPr sz="1500" b="0">
+                          <a:solidFill>
+                            <a:srgbClr val="1F2937"/>
+                          </a:solidFill>
+                          <a:latin typeface="Microsoft YaHei"/>
+                          <a:ea typeface="Microsoft YaHei"/>
+                          <a:cs typeface="Microsoft YaHei"/>
+                        </a:rPr>
+                        <a:t>同上，开 MPS</a:t>
+                      </a:r>
+                    </a:p>
+                  </a:txBody>
+                  <a:tcPr marL="91440" marR="91440" marT="27432" marB="27432" anchor="ctr">
+                    <a:solidFill>
+                      <a:srgbClr val="F8FAFC"/>
+                    </a:solidFill>
+                  </a:tcPr>
+                </a:tc>
+                <a:tc>
+                  <a:txBody>
+                    <a:bodyPr wrap="square" anchor="ctr" lIns="73152" rIns="73152" tIns="36576" bIns="36576">
+                      <a:noAutofit/>
+                    </a:bodyPr>
+                    <a:lstStyle/>
+                    <a:p>
+                      <a:pPr algn="l">
+                        <a:lnSpc>
+                          <a:spcPct val="115000"/>
+                        </a:lnSpc>
+                        <a:spcAft>
+                          <a:spcPts val="0"/>
+                        </a:spcAft>
+                      </a:pPr>
+                      <a:r>
+                        <a:rPr sz="1500" b="0">
+                          <a:solidFill>
+                            <a:srgbClr val="1F2937"/>
+                          </a:solidFill>
+                          <a:latin typeface="Microsoft YaHei"/>
+                          <a:ea typeface="Microsoft YaHei"/>
+                          <a:cs typeface="Microsoft YaHei"/>
+                        </a:rPr>
+                        <a:t>0.4852</a:t>
+                      </a:r>
+                    </a:p>
+                  </a:txBody>
+                  <a:tcPr marL="91440" marR="91440" marT="27432" marB="27432" anchor="ctr">
+                    <a:solidFill>
+                      <a:srgbClr val="F8FAFC"/>
+                    </a:solidFill>
+                  </a:tcPr>
+                </a:tc>
+                <a:tc>
+                  <a:txBody>
+                    <a:bodyPr wrap="square" anchor="ctr" lIns="73152" rIns="73152" tIns="36576" bIns="36576">
+                      <a:noAutofit/>
+                    </a:bodyPr>
+                    <a:lstStyle/>
+                    <a:p>
+                      <a:pPr algn="l">
+                        <a:lnSpc>
+                          <a:spcPct val="115000"/>
+                        </a:lnSpc>
+                        <a:spcAft>
+                          <a:spcPts val="0"/>
+                        </a:spcAft>
+                      </a:pPr>
+                      <a:r>
+                        <a:rPr sz="1500" b="1">
+                          <a:solidFill>
+                            <a:srgbClr val="D97706"/>
+                          </a:solidFill>
+                          <a:latin typeface="Microsoft YaHei"/>
+                          <a:ea typeface="Microsoft YaHei"/>
+                          <a:cs typeface="Microsoft YaHei"/>
+                        </a:rPr>
+                        <a:t>慢 6.9%</a:t>
+                      </a:r>
+                    </a:p>
+                  </a:txBody>
+                  <a:tcPr marL="91440" marR="91440" marT="27432" marB="27432" anchor="ctr">
+                    <a:solidFill>
+                      <a:srgbClr val="F8FAFC"/>
+                    </a:solidFill>
+                  </a:tcPr>
+                </a:tc>
+              </a:tr>
+              <a:tr h="502920">
                 <a:tc>
                   <a:txBody>
                     <a:bodyPr wrap="square" anchor="ctr" lIns="73152" rIns="73152" tIns="36576" bIns="36576">
@@ -11989,7 +16756,7 @@
                           <a:ea typeface="Microsoft YaHei"/>
                           <a:cs typeface="Microsoft YaHei"/>
                         </a:rPr>
-                        <a:t>0.2765</a:t>
+                        <a:t>0.2843</a:t>
                       </a:r>
                     </a:p>
                   </a:txBody>
@@ -12034,7 +16801,7 @@
                   </a:tcPr>
                 </a:tc>
               </a:tr>
-              <a:tr h="548640">
+              <a:tr h="502920">
                 <a:tc>
                   <a:txBody>
                     <a:bodyPr wrap="square" anchor="ctr" lIns="73152" rIns="73152" tIns="36576" bIns="36576">
@@ -12059,7 +16826,18 @@
                           <a:ea typeface="Microsoft YaHei"/>
                           <a:cs typeface="Microsoft YaHei"/>
                         </a:rPr>
-                        <a:t>-n 2 -g 1</a:t>
+                        <a:t>-n 4 -g 0 1</a:t>
+                      </a:r>
+                      <a:r>
+                        <a:rPr sz="1500" b="1">
+                          <a:solidFill>
+                            <a:srgbClr val="1F2937"/>
+                          </a:solidFill>
+                          <a:latin typeface="Microsoft YaHei"/>
+                          <a:ea typeface="Microsoft YaHei"/>
+                          <a:cs typeface="Microsoft YaHei"/>
+                        </a:rPr>
+                        <a:t> + MPS</a:t>
                       </a:r>
                     </a:p>
                   </a:txBody>
@@ -12093,7 +16871,7 @@
                           <a:ea typeface="Microsoft YaHei"/>
                           <a:cs typeface="Microsoft YaHei"/>
                         </a:rPr>
-                        <a:t>2 个 rank 共用 1 张卡</a:t>
+                        <a:t>每张卡 2 个 rank，开 MPS</a:t>
                       </a:r>
                     </a:p>
                   </a:txBody>
@@ -12127,7 +16905,7 @@
                           <a:ea typeface="Microsoft YaHei"/>
                           <a:cs typeface="Microsoft YaHei"/>
                         </a:rPr>
-                        <a:t>0.8254</a:t>
+                        <a:t>0.2876</a:t>
                       </a:r>
                     </a:p>
                   </a:txBody>
@@ -12155,13 +16933,13 @@
                       <a:r>
                         <a:rPr sz="1500" b="1">
                           <a:solidFill>
-                            <a:srgbClr val="DC2626"/>
+                            <a:srgbClr val="64748B"/>
                           </a:solidFill>
                           <a:latin typeface="Microsoft YaHei"/>
                           <a:ea typeface="Microsoft YaHei"/>
                           <a:cs typeface="Microsoft YaHei"/>
                         </a:rPr>
-                        <a:t>比单卡慢 82%</a:t>
+                        <a:t>+1.2%，在噪声内</a:t>
                       </a:r>
                     </a:p>
                   </a:txBody>
@@ -12172,144 +16950,6 @@
                   </a:tcPr>
                 </a:tc>
               </a:tr>
-              <a:tr h="548640">
-                <a:tc>
-                  <a:txBody>
-                    <a:bodyPr wrap="square" anchor="ctr" lIns="73152" rIns="73152" tIns="36576" bIns="36576">
-                      <a:noAutofit/>
-                    </a:bodyPr>
-                    <a:lstStyle/>
-                    <a:p>
-                      <a:pPr algn="l">
-                        <a:lnSpc>
-                          <a:spcPct val="115000"/>
-                        </a:lnSpc>
-                        <a:spcAft>
-                          <a:spcPts val="0"/>
-                        </a:spcAft>
-                      </a:pPr>
-                      <a:r>
-                        <a:rPr sz="1500" b="1">
-                          <a:solidFill>
-                            <a:srgbClr val="1F2937"/>
-                          </a:solidFill>
-                          <a:latin typeface="Microsoft YaHei"/>
-                          <a:ea typeface="Microsoft YaHei"/>
-                          <a:cs typeface="Microsoft YaHei"/>
-                        </a:rPr>
-                        <a:t>单卡不绑核</a:t>
-                      </a:r>
-                    </a:p>
-                  </a:txBody>
-                  <a:tcPr marL="91440" marR="91440" marT="27432" marB="27432" anchor="ctr">
-                    <a:solidFill>
-                      <a:srgbClr val="FFFFFF"/>
-                    </a:solidFill>
-                  </a:tcPr>
-                </a:tc>
-                <a:tc>
-                  <a:txBody>
-                    <a:bodyPr wrap="square" anchor="ctr" lIns="73152" rIns="73152" tIns="36576" bIns="36576">
-                      <a:noAutofit/>
-                    </a:bodyPr>
-                    <a:lstStyle/>
-                    <a:p>
-                      <a:pPr algn="l">
-                        <a:lnSpc>
-                          <a:spcPct val="115000"/>
-                        </a:lnSpc>
-                        <a:spcAft>
-                          <a:spcPts val="0"/>
-                        </a:spcAft>
-                      </a:pPr>
-                      <a:r>
-                        <a:rPr sz="1500" b="0">
-                          <a:solidFill>
-                            <a:srgbClr val="1F2937"/>
-                          </a:solidFill>
-                          <a:latin typeface="Microsoft YaHei"/>
-                          <a:ea typeface="Microsoft YaHei"/>
-                          <a:cs typeface="Microsoft YaHei"/>
-                        </a:rPr>
-                        <a:t>rank 不固定在某个 CPU 上</a:t>
-                      </a:r>
-                    </a:p>
-                  </a:txBody>
-                  <a:tcPr marL="91440" marR="91440" marT="27432" marB="27432" anchor="ctr">
-                    <a:solidFill>
-                      <a:srgbClr val="FFFFFF"/>
-                    </a:solidFill>
-                  </a:tcPr>
-                </a:tc>
-                <a:tc>
-                  <a:txBody>
-                    <a:bodyPr wrap="square" anchor="ctr" lIns="73152" rIns="73152" tIns="36576" bIns="36576">
-                      <a:noAutofit/>
-                    </a:bodyPr>
-                    <a:lstStyle/>
-                    <a:p>
-                      <a:pPr algn="l">
-                        <a:lnSpc>
-                          <a:spcPct val="115000"/>
-                        </a:lnSpc>
-                        <a:spcAft>
-                          <a:spcPts val="0"/>
-                        </a:spcAft>
-                      </a:pPr>
-                      <a:r>
-                        <a:rPr sz="1500" b="0">
-                          <a:solidFill>
-                            <a:srgbClr val="1F2937"/>
-                          </a:solidFill>
-                          <a:latin typeface="Microsoft YaHei"/>
-                          <a:ea typeface="Microsoft YaHei"/>
-                          <a:cs typeface="Microsoft YaHei"/>
-                        </a:rPr>
-                        <a:t>0.4553</a:t>
-                      </a:r>
-                    </a:p>
-                  </a:txBody>
-                  <a:tcPr marL="91440" marR="91440" marT="27432" marB="27432" anchor="ctr">
-                    <a:solidFill>
-                      <a:srgbClr val="FFFFFF"/>
-                    </a:solidFill>
-                  </a:tcPr>
-                </a:tc>
-                <a:tc>
-                  <a:txBody>
-                    <a:bodyPr wrap="square" anchor="ctr" lIns="73152" rIns="73152" tIns="36576" bIns="36576">
-                      <a:noAutofit/>
-                    </a:bodyPr>
-                    <a:lstStyle/>
-                    <a:p>
-                      <a:pPr algn="l">
-                        <a:lnSpc>
-                          <a:spcPct val="115000"/>
-                        </a:lnSpc>
-                        <a:spcAft>
-                          <a:spcPts val="0"/>
-                        </a:spcAft>
-                      </a:pPr>
-                      <a:r>
-                        <a:rPr sz="1500" b="1">
-                          <a:solidFill>
-                            <a:srgbClr val="64748B"/>
-                          </a:solidFill>
-                          <a:latin typeface="Microsoft YaHei"/>
-                          <a:ea typeface="Microsoft YaHei"/>
-                          <a:cs typeface="Microsoft YaHei"/>
-                        </a:rPr>
-                        <a:t>+0.4%，在噪声内</a:t>
-                      </a:r>
-                    </a:p>
-                  </a:txBody>
-                  <a:tcPr marL="91440" marR="91440" marT="27432" marB="27432" anchor="ctr">
-                    <a:solidFill>
-                      <a:srgbClr val="FFFFFF"/>
-                    </a:solidFill>
-                  </a:tcPr>
-                </a:tc>
-              </a:tr>
             </a:tbl>
           </a:graphicData>
         </a:graphic>
@@ -12322,8 +16962,8 @@
         </p:nvSpPr>
         <p:spPr>
           <a:xfrm>
-            <a:off x="548640" y="4343400"/>
-            <a:ext cx="11155680" cy="1554480"/>
+            <a:off x="548640" y="4480560"/>
+            <a:ext cx="11155680" cy="1463040"/>
           </a:xfrm>
           <a:prstGeom prst="rect">
             <a:avLst/>
@@ -12341,7 +16981,7 @@
                 <a:spcPct val="120000"/>
               </a:lnSpc>
               <a:spcAft>
-                <a:spcPts val="1200"/>
+                <a:spcPts val="600"/>
               </a:spcAft>
             </a:pPr>
             <a:r>
@@ -12353,29 +16993,7 @@
                 <a:ea typeface="Microsoft YaHei"/>
                 <a:cs typeface="Microsoft YaHei"/>
               </a:rPr>
-              <a:t>•  两张 GPU 都挂在 NUMA 0 上：rank 绑 CPU 1、3（Open MPI 4.1 写作 </a:t>
-            </a:r>
-            <a:r>
-              <a:rPr sz="1500" b="0">
-                <a:solidFill>
-                  <a:srgbClr val="1F2937"/>
-                </a:solidFill>
-                <a:latin typeface="Consolas"/>
-                <a:ea typeface="Microsoft YaHei"/>
-                <a:cs typeface="Microsoft YaHei"/>
-              </a:rPr>
-              <a:t>--cpu-list 1,3 --bind-to cpu-list:ordered</a:t>
-            </a:r>
-            <a:r>
-              <a:rPr sz="1500" b="0">
-                <a:solidFill>
-                  <a:srgbClr val="1F2937"/>
-                </a:solidFill>
-                <a:latin typeface="Microsoft YaHei"/>
-                <a:ea typeface="Microsoft YaHei"/>
-                <a:cs typeface="Microsoft YaHei"/>
-              </a:rPr>
-              <a:t>）</a:t>
+              <a:t>•  两张 GPU 都挂在 NUMA 0 上，每个 rank 绑一个 NUMA 0 的核；不绑核 +0.4%</a:t>
             </a:r>
           </a:p>
           <a:p>
@@ -12384,7 +17002,7 @@
                 <a:spcPct val="120000"/>
               </a:lnSpc>
               <a:spcAft>
-                <a:spcPts val="1200"/>
+                <a:spcPts val="600"/>
               </a:spcAft>
             </a:pPr>
             <a:r>
@@ -12396,7 +17014,7 @@
                 <a:ea typeface="Microsoft YaHei"/>
                 <a:cs typeface="Microsoft YaHei"/>
               </a:rPr>
-              <a:t>•  运行时环境变量（</a:t>
+              <a:t>•  Open MPI 4.1 写作 </a:t>
             </a:r>
             <a:r>
               <a:rPr sz="1500" b="0">
@@ -12407,8 +17025,18 @@
                 <a:ea typeface="Microsoft YaHei"/>
                 <a:cs typeface="Microsoft YaHei"/>
               </a:rPr>
-              <a:t>NV_ACC_*</a:t>
-            </a:r>
+              <a:t>--cpu-list 1,3 --bind-to cpu-list:ordered</a:t>
+            </a:r>
+          </a:p>
+          <a:p>
+            <a:pPr algn="l">
+              <a:lnSpc>
+                <a:spcPct val="120000"/>
+              </a:lnSpc>
+              <a:spcAft>
+                <a:spcPts val="600"/>
+              </a:spcAft>
+            </a:pPr>
             <a:r>
               <a:rPr sz="1500" b="0">
                 <a:solidFill>
@@ -12418,7 +17046,7 @@
                 <a:ea typeface="Microsoft YaHei"/>
                 <a:cs typeface="Microsoft YaHei"/>
               </a:rPr>
-              <a:t>、</a:t>
+              <a:t>•  MPS 不需要 root：用私有管道目录启动、跑完就关，不影响别人；开 </a:t>
             </a:r>
             <a:r>
               <a:rPr sz="1500" b="0">
@@ -12429,7 +17057,7 @@
                 <a:ea typeface="Microsoft YaHei"/>
                 <a:cs typeface="Microsoft YaHei"/>
               </a:rPr>
-              <a:t>UCX_*</a:t>
+              <a:t>rdma_mpi</a:t>
             </a:r>
             <a:r>
               <a:rPr sz="1500" b="0">
@@ -12440,7 +17068,7 @@
                 <a:ea typeface="Microsoft YaHei"/>
                 <a:cs typeface="Microsoft YaHei"/>
               </a:rPr>
-              <a:t>）没测，预计收益小</a:t>
+              <a:t> 时也只是持平</a:t>
             </a:r>
           </a:p>
         </p:txBody>
@@ -12572,1882 +17200,7 @@
                 <a:ea typeface="Microsoft YaHei"/>
                 <a:cs typeface="Microsoft YaHei"/>
               </a:rPr>
-              <a:t>每卡只放 1 个 rank；这些写法都不改变输出</a:t>
-            </a:r>
-          </a:p>
-        </p:txBody>
-      </p:sp>
-    </p:spTree>
-  </p:cSld>
-  <p:clrMapOvr>
-    <a:masterClrMapping/>
-  </p:clrMapOvr>
-</p:sld>
-</file>
-
-<file path=ppt/slides/slide8.xml><?xml version="1.0" encoding="utf-8"?>
-<p:sld xmlns:a="http://schemas.openxmlformats.org/drawingml/2006/main" xmlns:p="http://schemas.openxmlformats.org/presentationml/2006/main" xmlns:r="http://schemas.openxmlformats.org/officeDocument/2006/relationships">
-  <p:cSld>
-    <p:spTree>
-      <p:nvGrpSpPr>
-        <p:cNvPr id="1" name=""/>
-        <p:cNvGrpSpPr/>
-        <p:nvPr/>
-      </p:nvGrpSpPr>
-      <p:grpSpPr/>
-      <p:sp>
-        <p:nvSpPr>
-          <p:cNvPr id="2" name="Rectangle 1"/>
-          <p:cNvSpPr/>
-          <p:nvPr/>
-        </p:nvSpPr>
-        <p:spPr>
-          <a:xfrm>
-            <a:off x="274320" y="347472"/>
-            <a:ext cx="82296" cy="457200"/>
-          </a:xfrm>
-          <a:prstGeom prst="rect">
-            <a:avLst/>
-          </a:prstGeom>
-          <a:solidFill>
-            <a:srgbClr val="F97316"/>
-          </a:solidFill>
-          <a:ln>
-            <a:noFill/>
-          </a:ln>
-          <a:effectLst/>
-        </p:spPr>
-        <p:style>
-          <a:lnRef idx="1">
-            <a:schemeClr val="accent1"/>
-          </a:lnRef>
-          <a:fillRef idx="3">
-            <a:schemeClr val="accent1"/>
-          </a:fillRef>
-          <a:effectRef idx="2">
-            <a:schemeClr val="accent1"/>
-          </a:effectRef>
-          <a:fontRef idx="minor">
-            <a:schemeClr val="lt1"/>
-          </a:fontRef>
-        </p:style>
-        <p:txBody>
-          <a:bodyPr rtlCol="0" anchor="ctr"/>
-          <a:lstStyle/>
-          <a:p>
-            <a:pPr algn="ctr"/>
-          </a:p>
-        </p:txBody>
-      </p:sp>
-      <p:sp>
-        <p:nvSpPr>
-          <p:cNvPr id="3" name="TextBox 2"/>
-          <p:cNvSpPr txBox="1"/>
-          <p:nvPr/>
-        </p:nvSpPr>
-        <p:spPr>
-          <a:xfrm>
-            <a:off x="457200" y="237744"/>
-            <a:ext cx="9509760" cy="676656"/>
-          </a:xfrm>
-          <a:prstGeom prst="rect">
-            <a:avLst/>
-          </a:prstGeom>
-          <a:noFill/>
-        </p:spPr>
-        <p:txBody>
-          <a:bodyPr wrap="square" anchor="ctr" lIns="73152" rIns="73152" tIns="36576" bIns="36576">
-            <a:noAutofit/>
-          </a:bodyPr>
-          <a:lstStyle/>
-          <a:p>
-            <a:pPr algn="l">
-              <a:lnSpc>
-                <a:spcPct val="115000"/>
-              </a:lnSpc>
-              <a:spcAft>
-                <a:spcPts val="0"/>
-              </a:spcAft>
-            </a:pPr>
-            <a:r>
-              <a:rPr sz="2600" b="1">
-                <a:solidFill>
-                  <a:srgbClr val="1E3A5F"/>
-                </a:solidFill>
-                <a:latin typeface="Microsoft YaHei"/>
-                <a:ea typeface="Microsoft YaHei"/>
-                <a:cs typeface="Microsoft YaHei"/>
-              </a:rPr>
-              <a:t>第六层 GPU 系统设置：没有 root，只能记录</a:t>
-            </a:r>
-          </a:p>
-        </p:txBody>
-      </p:sp>
-      <p:sp>
-        <p:nvSpPr>
-          <p:cNvPr id="4" name="TextBox 3"/>
-          <p:cNvSpPr txBox="1"/>
-          <p:nvPr/>
-        </p:nvSpPr>
-        <p:spPr>
-          <a:xfrm>
-            <a:off x="9784080" y="310896"/>
-            <a:ext cx="2103120" cy="457200"/>
-          </a:xfrm>
-          <a:prstGeom prst="rect">
-            <a:avLst/>
-          </a:prstGeom>
-          <a:noFill/>
-        </p:spPr>
-        <p:txBody>
-          <a:bodyPr wrap="square" anchor="ctr" lIns="73152" rIns="73152" tIns="36576" bIns="36576">
-            <a:noAutofit/>
-          </a:bodyPr>
-          <a:lstStyle/>
-          <a:p>
-            <a:pPr algn="r">
-              <a:lnSpc>
-                <a:spcPct val="115000"/>
-              </a:lnSpc>
-              <a:spcAft>
-                <a:spcPts val="0"/>
-              </a:spcAft>
-            </a:pPr>
-            <a:r>
-              <a:rPr sz="1200" b="0">
-                <a:solidFill>
-                  <a:srgbClr val="64748B"/>
-                </a:solidFill>
-                <a:latin typeface="Microsoft YaHei"/>
-                <a:ea typeface="Microsoft YaHei"/>
-                <a:cs typeface="Microsoft YaHei"/>
-              </a:rPr>
-              <a:t>第六层　8 / 9</a:t>
-            </a:r>
-          </a:p>
-        </p:txBody>
-      </p:sp>
-      <p:cxnSp>
-        <p:nvCxnSpPr>
-          <p:cNvPr id="5" name="Connector 4"/>
-          <p:cNvCxnSpPr/>
-          <p:nvPr/>
-        </p:nvCxnSpPr>
-        <p:spPr>
-          <a:xfrm>
-            <a:off x="457200" y="969264"/>
-            <a:ext cx="11274552" cy="0"/>
-          </a:xfrm>
-          <a:prstGeom prst="line">
-            <a:avLst/>
-          </a:prstGeom>
-          <a:ln w="12700">
-            <a:solidFill>
-              <a:srgbClr val="E2E8F0"/>
-            </a:solidFill>
-          </a:ln>
-        </p:spPr>
-        <p:style>
-          <a:lnRef idx="2">
-            <a:schemeClr val="accent1"/>
-          </a:lnRef>
-          <a:fillRef idx="0">
-            <a:schemeClr val="accent1"/>
-          </a:fillRef>
-          <a:effectRef idx="1">
-            <a:schemeClr val="accent1"/>
-          </a:effectRef>
-          <a:fontRef idx="minor">
-            <a:schemeClr val="tx1"/>
-          </a:fontRef>
-        </p:style>
-      </p:cxnSp>
-      <p:graphicFrame>
-        <p:nvGraphicFramePr>
-          <p:cNvPr id="6" name="Table 5"/>
-          <p:cNvGraphicFramePr>
-            <a:graphicFrameLocks noGrp="1"/>
-          </p:cNvGraphicFramePr>
-          <p:nvPr/>
-        </p:nvGraphicFramePr>
-        <p:xfrm>
-          <a:off x="548640" y="1325880"/>
-          <a:ext cx="11091672" cy="2834640"/>
-        </p:xfrm>
-        <a:graphic>
-          <a:graphicData uri="http://schemas.openxmlformats.org/drawingml/2006/table">
-            <a:tbl>
-              <a:tblPr firstRow="1" bandRow="1">
-                <a:tableStyleId>{5C22544A-7EE6-4342-B048-85BDC9FD1C3A}</a:tableStyleId>
-              </a:tblPr>
-              <a:tblGrid>
-                <a:gridCol w="2194560"/>
-                <a:gridCol w="4206240"/>
-                <a:gridCol w="4690872"/>
-              </a:tblGrid>
-              <a:tr h="566928">
-                <a:tc>
-                  <a:txBody>
-                    <a:bodyPr wrap="square" anchor="ctr" lIns="73152" rIns="73152" tIns="36576" bIns="36576">
-                      <a:noAutofit/>
-                    </a:bodyPr>
-                    <a:lstStyle/>
-                    <a:p>
-                      <a:pPr algn="l">
-                        <a:lnSpc>
-                          <a:spcPct val="115000"/>
-                        </a:lnSpc>
-                        <a:spcAft>
-                          <a:spcPts val="0"/>
-                        </a:spcAft>
-                      </a:pPr>
-                      <a:r>
-                        <a:rPr sz="1500" b="1">
-                          <a:solidFill>
-                            <a:srgbClr val="FFFFFF"/>
-                          </a:solidFill>
-                          <a:latin typeface="Microsoft YaHei"/>
-                          <a:ea typeface="Microsoft YaHei"/>
-                          <a:cs typeface="Microsoft YaHei"/>
-                        </a:rPr>
-                        <a:t>项目</a:t>
-                      </a:r>
-                    </a:p>
-                  </a:txBody>
-                  <a:tcPr marL="91440" marR="91440" marT="27432" marB="27432" anchor="ctr">
-                    <a:solidFill>
-                      <a:srgbClr val="1E3A5F"/>
-                    </a:solidFill>
-                  </a:tcPr>
-                </a:tc>
-                <a:tc>
-                  <a:txBody>
-                    <a:bodyPr wrap="square" anchor="ctr" lIns="73152" rIns="73152" tIns="36576" bIns="36576">
-                      <a:noAutofit/>
-                    </a:bodyPr>
-                    <a:lstStyle/>
-                    <a:p>
-                      <a:pPr algn="l">
-                        <a:lnSpc>
-                          <a:spcPct val="115000"/>
-                        </a:lnSpc>
-                        <a:spcAft>
-                          <a:spcPts val="0"/>
-                        </a:spcAft>
-                      </a:pPr>
-                      <a:r>
-                        <a:rPr sz="1500" b="1">
-                          <a:solidFill>
-                            <a:srgbClr val="FFFFFF"/>
-                          </a:solidFill>
-                          <a:latin typeface="Microsoft YaHei"/>
-                          <a:ea typeface="Microsoft YaHei"/>
-                          <a:cs typeface="Microsoft YaHei"/>
-                        </a:rPr>
-                        <a:t>现状</a:t>
-                      </a:r>
-                    </a:p>
-                  </a:txBody>
-                  <a:tcPr marL="91440" marR="91440" marT="27432" marB="27432" anchor="ctr">
-                    <a:solidFill>
-                      <a:srgbClr val="1E3A5F"/>
-                    </a:solidFill>
-                  </a:tcPr>
-                </a:tc>
-                <a:tc>
-                  <a:txBody>
-                    <a:bodyPr wrap="square" anchor="ctr" lIns="73152" rIns="73152" tIns="36576" bIns="36576">
-                      <a:noAutofit/>
-                    </a:bodyPr>
-                    <a:lstStyle/>
-                    <a:p>
-                      <a:pPr algn="l">
-                        <a:lnSpc>
-                          <a:spcPct val="115000"/>
-                        </a:lnSpc>
-                        <a:spcAft>
-                          <a:spcPts val="0"/>
-                        </a:spcAft>
-                      </a:pPr>
-                      <a:r>
-                        <a:rPr sz="1500" b="1">
-                          <a:solidFill>
-                            <a:srgbClr val="FFFFFF"/>
-                          </a:solidFill>
-                          <a:latin typeface="Microsoft YaHei"/>
-                          <a:ea typeface="Microsoft YaHei"/>
-                          <a:cs typeface="Microsoft YaHei"/>
-                        </a:rPr>
-                        <a:t>能改吗</a:t>
-                      </a:r>
-                    </a:p>
-                  </a:txBody>
-                  <a:tcPr marL="91440" marR="91440" marT="27432" marB="27432" anchor="ctr">
-                    <a:solidFill>
-                      <a:srgbClr val="1E3A5F"/>
-                    </a:solidFill>
-                  </a:tcPr>
-                </a:tc>
-              </a:tr>
-              <a:tr h="566928">
-                <a:tc>
-                  <a:txBody>
-                    <a:bodyPr wrap="square" anchor="ctr" lIns="73152" rIns="73152" tIns="36576" bIns="36576">
-                      <a:noAutofit/>
-                    </a:bodyPr>
-                    <a:lstStyle/>
-                    <a:p>
-                      <a:pPr algn="l">
-                        <a:lnSpc>
-                          <a:spcPct val="115000"/>
-                        </a:lnSpc>
-                        <a:spcAft>
-                          <a:spcPts val="0"/>
-                        </a:spcAft>
-                      </a:pPr>
-                      <a:r>
-                        <a:rPr sz="1500" b="1">
-                          <a:solidFill>
-                            <a:srgbClr val="1F2937"/>
-                          </a:solidFill>
-                          <a:latin typeface="Microsoft YaHei"/>
-                          <a:ea typeface="Microsoft YaHei"/>
-                          <a:cs typeface="Microsoft YaHei"/>
-                        </a:rPr>
-                        <a:t>功耗上限</a:t>
-                      </a:r>
-                    </a:p>
-                  </a:txBody>
-                  <a:tcPr marL="91440" marR="91440" marT="27432" marB="27432" anchor="ctr">
-                    <a:solidFill>
-                      <a:srgbClr val="F8FAFC"/>
-                    </a:solidFill>
-                  </a:tcPr>
-                </a:tc>
-                <a:tc>
-                  <a:txBody>
-                    <a:bodyPr wrap="square" anchor="ctr" lIns="73152" rIns="73152" tIns="36576" bIns="36576">
-                      <a:noAutofit/>
-                    </a:bodyPr>
-                    <a:lstStyle/>
-                    <a:p>
-                      <a:pPr algn="l">
-                        <a:lnSpc>
-                          <a:spcPct val="115000"/>
-                        </a:lnSpc>
-                        <a:spcAft>
-                          <a:spcPts val="0"/>
-                        </a:spcAft>
-                      </a:pPr>
-                      <a:r>
-                        <a:rPr sz="1500" b="0">
-                          <a:solidFill>
-                            <a:srgbClr val="1F2937"/>
-                          </a:solidFill>
-                          <a:latin typeface="Microsoft YaHei"/>
-                          <a:ea typeface="Microsoft YaHei"/>
-                          <a:cs typeface="Microsoft YaHei"/>
-                        </a:rPr>
-                        <a:t>400 W，已是允许的最大值</a:t>
-                      </a:r>
-                    </a:p>
-                  </a:txBody>
-                  <a:tcPr marL="91440" marR="91440" marT="27432" marB="27432" anchor="ctr">
-                    <a:solidFill>
-                      <a:srgbClr val="F8FAFC"/>
-                    </a:solidFill>
-                  </a:tcPr>
-                </a:tc>
-                <a:tc>
-                  <a:txBody>
-                    <a:bodyPr wrap="square" anchor="ctr" lIns="73152" rIns="73152" tIns="36576" bIns="36576">
-                      <a:noAutofit/>
-                    </a:bodyPr>
-                    <a:lstStyle/>
-                    <a:p>
-                      <a:pPr algn="l">
-                        <a:lnSpc>
-                          <a:spcPct val="115000"/>
-                        </a:lnSpc>
-                        <a:spcAft>
-                          <a:spcPts val="0"/>
-                        </a:spcAft>
-                      </a:pPr>
-                      <a:r>
-                        <a:rPr sz="1500" b="1">
-                          <a:solidFill>
-                            <a:srgbClr val="DC2626"/>
-                          </a:solidFill>
-                          <a:latin typeface="Microsoft YaHei"/>
-                          <a:ea typeface="Microsoft YaHei"/>
-                          <a:cs typeface="Microsoft YaHei"/>
-                        </a:rPr>
-                        <a:t>不能再调高</a:t>
-                      </a:r>
-                    </a:p>
-                  </a:txBody>
-                  <a:tcPr marL="91440" marR="91440" marT="27432" marB="27432" anchor="ctr">
-                    <a:solidFill>
-                      <a:srgbClr val="F8FAFC"/>
-                    </a:solidFill>
-                  </a:tcPr>
-                </a:tc>
-              </a:tr>
-              <a:tr h="566928">
-                <a:tc>
-                  <a:txBody>
-                    <a:bodyPr wrap="square" anchor="ctr" lIns="73152" rIns="73152" tIns="36576" bIns="36576">
-                      <a:noAutofit/>
-                    </a:bodyPr>
-                    <a:lstStyle/>
-                    <a:p>
-                      <a:pPr algn="l">
-                        <a:lnSpc>
-                          <a:spcPct val="115000"/>
-                        </a:lnSpc>
-                        <a:spcAft>
-                          <a:spcPts val="0"/>
-                        </a:spcAft>
-                      </a:pPr>
-                      <a:r>
-                        <a:rPr sz="1500" b="1">
-                          <a:solidFill>
-                            <a:srgbClr val="1F2937"/>
-                          </a:solidFill>
-                          <a:latin typeface="Microsoft YaHei"/>
-                          <a:ea typeface="Microsoft YaHei"/>
-                          <a:cs typeface="Microsoft YaHei"/>
-                        </a:rPr>
-                        <a:t>GPU 时钟</a:t>
-                      </a:r>
-                    </a:p>
-                  </a:txBody>
-                  <a:tcPr marL="91440" marR="91440" marT="27432" marB="27432" anchor="ctr">
-                    <a:solidFill>
-                      <a:srgbClr val="FFFFFF"/>
-                    </a:solidFill>
-                  </a:tcPr>
-                </a:tc>
-                <a:tc>
-                  <a:txBody>
-                    <a:bodyPr wrap="square" anchor="ctr" lIns="73152" rIns="73152" tIns="36576" bIns="36576">
-                      <a:noAutofit/>
-                    </a:bodyPr>
-                    <a:lstStyle/>
-                    <a:p>
-                      <a:pPr algn="l">
-                        <a:lnSpc>
-                          <a:spcPct val="115000"/>
-                        </a:lnSpc>
-                        <a:spcAft>
-                          <a:spcPts val="0"/>
-                        </a:spcAft>
-                      </a:pPr>
-                      <a:r>
-                        <a:rPr sz="1500" b="0">
-                          <a:solidFill>
-                            <a:srgbClr val="1F2937"/>
-                          </a:solidFill>
-                          <a:latin typeface="Microsoft YaHei"/>
-                          <a:ea typeface="Microsoft YaHei"/>
-                          <a:cs typeface="Microsoft YaHei"/>
-                        </a:rPr>
-                        <a:t>没有锁定</a:t>
-                      </a:r>
-                    </a:p>
-                  </a:txBody>
-                  <a:tcPr marL="91440" marR="91440" marT="27432" marB="27432" anchor="ctr">
-                    <a:solidFill>
-                      <a:srgbClr val="FFFFFF"/>
-                    </a:solidFill>
-                  </a:tcPr>
-                </a:tc>
-                <a:tc>
-                  <a:txBody>
-                    <a:bodyPr wrap="square" anchor="ctr" lIns="73152" rIns="73152" tIns="36576" bIns="36576">
-                      <a:noAutofit/>
-                    </a:bodyPr>
-                    <a:lstStyle/>
-                    <a:p>
-                      <a:pPr algn="l">
-                        <a:lnSpc>
-                          <a:spcPct val="115000"/>
-                        </a:lnSpc>
-                        <a:spcAft>
-                          <a:spcPts val="0"/>
-                        </a:spcAft>
-                      </a:pPr>
-                      <a:r>
-                        <a:rPr sz="1500" b="1">
-                          <a:solidFill>
-                            <a:srgbClr val="DC2626"/>
-                          </a:solidFill>
-                          <a:latin typeface="Microsoft YaHei"/>
-                          <a:ea typeface="Microsoft YaHei"/>
-                          <a:cs typeface="Microsoft YaHei"/>
-                        </a:rPr>
-                        <a:t>锁频需要 root</a:t>
-                      </a:r>
-                    </a:p>
-                  </a:txBody>
-                  <a:tcPr marL="91440" marR="91440" marT="27432" marB="27432" anchor="ctr">
-                    <a:solidFill>
-                      <a:srgbClr val="FFFFFF"/>
-                    </a:solidFill>
-                  </a:tcPr>
-                </a:tc>
-              </a:tr>
-              <a:tr h="566928">
-                <a:tc>
-                  <a:txBody>
-                    <a:bodyPr wrap="square" anchor="ctr" lIns="73152" rIns="73152" tIns="36576" bIns="36576">
-                      <a:noAutofit/>
-                    </a:bodyPr>
-                    <a:lstStyle/>
-                    <a:p>
-                      <a:pPr algn="l">
-                        <a:lnSpc>
-                          <a:spcPct val="115000"/>
-                        </a:lnSpc>
-                        <a:spcAft>
-                          <a:spcPts val="0"/>
-                        </a:spcAft>
-                      </a:pPr>
-                      <a:r>
-                        <a:rPr sz="1500" b="1">
-                          <a:solidFill>
-                            <a:srgbClr val="1F2937"/>
-                          </a:solidFill>
-                          <a:latin typeface="Microsoft YaHei"/>
-                          <a:ea typeface="Microsoft YaHei"/>
-                          <a:cs typeface="Microsoft YaHei"/>
-                        </a:rPr>
-                        <a:t>持久模式</a:t>
-                      </a:r>
-                    </a:p>
-                  </a:txBody>
-                  <a:tcPr marL="91440" marR="91440" marT="27432" marB="27432" anchor="ctr">
-                    <a:solidFill>
-                      <a:srgbClr val="F8FAFC"/>
-                    </a:solidFill>
-                  </a:tcPr>
-                </a:tc>
-                <a:tc>
-                  <a:txBody>
-                    <a:bodyPr wrap="square" anchor="ctr" lIns="73152" rIns="73152" tIns="36576" bIns="36576">
-                      <a:noAutofit/>
-                    </a:bodyPr>
-                    <a:lstStyle/>
-                    <a:p>
-                      <a:pPr algn="l">
-                        <a:lnSpc>
-                          <a:spcPct val="115000"/>
-                        </a:lnSpc>
-                        <a:spcAft>
-                          <a:spcPts val="0"/>
-                        </a:spcAft>
-                      </a:pPr>
-                      <a:r>
-                        <a:rPr sz="1500" b="0">
-                          <a:solidFill>
-                            <a:srgbClr val="1F2937"/>
-                          </a:solidFill>
-                          <a:latin typeface="Microsoft YaHei"/>
-                          <a:ea typeface="Microsoft YaHei"/>
-                          <a:cs typeface="Microsoft YaHei"/>
-                        </a:rPr>
-                        <a:t>关闭</a:t>
-                      </a:r>
-                    </a:p>
-                  </a:txBody>
-                  <a:tcPr marL="91440" marR="91440" marT="27432" marB="27432" anchor="ctr">
-                    <a:solidFill>
-                      <a:srgbClr val="F8FAFC"/>
-                    </a:solidFill>
-                  </a:tcPr>
-                </a:tc>
-                <a:tc>
-                  <a:txBody>
-                    <a:bodyPr wrap="square" anchor="ctr" lIns="73152" rIns="73152" tIns="36576" bIns="36576">
-                      <a:noAutofit/>
-                    </a:bodyPr>
-                    <a:lstStyle/>
-                    <a:p>
-                      <a:pPr algn="l">
-                        <a:lnSpc>
-                          <a:spcPct val="115000"/>
-                        </a:lnSpc>
-                        <a:spcAft>
-                          <a:spcPts val="0"/>
-                        </a:spcAft>
-                      </a:pPr>
-                      <a:r>
-                        <a:rPr sz="1500" b="1">
-                          <a:solidFill>
-                            <a:srgbClr val="DC2626"/>
-                          </a:solidFill>
-                          <a:latin typeface="Microsoft YaHei"/>
-                          <a:ea typeface="Microsoft YaHei"/>
-                          <a:cs typeface="Microsoft YaHei"/>
-                        </a:rPr>
-                        <a:t>需要 root</a:t>
-                      </a:r>
-                    </a:p>
-                  </a:txBody>
-                  <a:tcPr marL="91440" marR="91440" marT="27432" marB="27432" anchor="ctr">
-                    <a:solidFill>
-                      <a:srgbClr val="F8FAFC"/>
-                    </a:solidFill>
-                  </a:tcPr>
-                </a:tc>
-              </a:tr>
-              <a:tr h="566928">
-                <a:tc>
-                  <a:txBody>
-                    <a:bodyPr wrap="square" anchor="ctr" lIns="73152" rIns="73152" tIns="36576" bIns="36576">
-                      <a:noAutofit/>
-                    </a:bodyPr>
-                    <a:lstStyle/>
-                    <a:p>
-                      <a:pPr algn="l">
-                        <a:lnSpc>
-                          <a:spcPct val="115000"/>
-                        </a:lnSpc>
-                        <a:spcAft>
-                          <a:spcPts val="0"/>
-                        </a:spcAft>
-                      </a:pPr>
-                      <a:r>
-                        <a:rPr sz="1500" b="1">
-                          <a:solidFill>
-                            <a:srgbClr val="1F2937"/>
-                          </a:solidFill>
-                          <a:latin typeface="Microsoft YaHei"/>
-                          <a:ea typeface="Microsoft YaHei"/>
-                          <a:cs typeface="Microsoft YaHei"/>
-                        </a:rPr>
-                        <a:t>MPS</a:t>
-                      </a:r>
-                    </a:p>
-                  </a:txBody>
-                  <a:tcPr marL="91440" marR="91440" marT="27432" marB="27432" anchor="ctr">
-                    <a:solidFill>
-                      <a:srgbClr val="FFFFFF"/>
-                    </a:solidFill>
-                  </a:tcPr>
-                </a:tc>
-                <a:tc>
-                  <a:txBody>
-                    <a:bodyPr wrap="square" anchor="ctr" lIns="73152" rIns="73152" tIns="36576" bIns="36576">
-                      <a:noAutofit/>
-                    </a:bodyPr>
-                    <a:lstStyle/>
-                    <a:p>
-                      <a:pPr algn="l">
-                        <a:lnSpc>
-                          <a:spcPct val="115000"/>
-                        </a:lnSpc>
-                        <a:spcAft>
-                          <a:spcPts val="0"/>
-                        </a:spcAft>
-                      </a:pPr>
-                      <a:r>
-                        <a:rPr sz="1500" b="0">
-                          <a:solidFill>
-                            <a:srgbClr val="1F2937"/>
-                          </a:solidFill>
-                          <a:latin typeface="Microsoft YaHei"/>
-                          <a:ea typeface="Microsoft YaHei"/>
-                          <a:cs typeface="Microsoft YaHei"/>
-                        </a:rPr>
-                        <a:t>装了，没有启动</a:t>
-                      </a:r>
-                    </a:p>
-                  </a:txBody>
-                  <a:tcPr marL="91440" marR="91440" marT="27432" marB="27432" anchor="ctr">
-                    <a:solidFill>
-                      <a:srgbClr val="FFFFFF"/>
-                    </a:solidFill>
-                  </a:tcPr>
-                </a:tc>
-                <a:tc>
-                  <a:txBody>
-                    <a:bodyPr wrap="square" anchor="ctr" lIns="73152" rIns="73152" tIns="36576" bIns="36576">
-                      <a:noAutofit/>
-                    </a:bodyPr>
-                    <a:lstStyle/>
-                    <a:p>
-                      <a:pPr algn="l">
-                        <a:lnSpc>
-                          <a:spcPct val="115000"/>
-                        </a:lnSpc>
-                        <a:spcAft>
-                          <a:spcPts val="0"/>
-                        </a:spcAft>
-                      </a:pPr>
-                      <a:r>
-                        <a:rPr sz="1500" b="1">
-                          <a:solidFill>
-                            <a:srgbClr val="D97706"/>
-                          </a:solidFill>
-                          <a:latin typeface="Microsoft YaHei"/>
-                          <a:ea typeface="Microsoft YaHei"/>
-                          <a:cs typeface="Microsoft YaHei"/>
-                        </a:rPr>
-                        <a:t>能启动，但会影响共用账号的其他人</a:t>
-                      </a:r>
-                    </a:p>
-                  </a:txBody>
-                  <a:tcPr marL="91440" marR="91440" marT="27432" marB="27432" anchor="ctr">
-                    <a:solidFill>
-                      <a:srgbClr val="FFFFFF"/>
-                    </a:solidFill>
-                  </a:tcPr>
-                </a:tc>
-              </a:tr>
-            </a:tbl>
-          </a:graphicData>
-        </a:graphic>
-      </p:graphicFrame>
-      <p:sp>
-        <p:nvSpPr>
-          <p:cNvPr id="7" name="TextBox 6"/>
-          <p:cNvSpPr txBox="1"/>
-          <p:nvPr/>
-        </p:nvSpPr>
-        <p:spPr>
-          <a:xfrm>
-            <a:off x="548640" y="4343400"/>
-            <a:ext cx="11155680" cy="1097280"/>
-          </a:xfrm>
-          <a:prstGeom prst="rect">
-            <a:avLst/>
-          </a:prstGeom>
-          <a:noFill/>
-        </p:spPr>
-        <p:txBody>
-          <a:bodyPr wrap="square" anchor="t" lIns="73152" rIns="73152" tIns="36576" bIns="36576">
-            <a:noAutofit/>
-          </a:bodyPr>
-          <a:lstStyle/>
-          <a:p>
-            <a:pPr algn="l">
-              <a:lnSpc>
-                <a:spcPct val="130000"/>
-              </a:lnSpc>
-              <a:spcAft>
-                <a:spcPts val="0"/>
-              </a:spcAft>
-            </a:pPr>
-            <a:r>
-              <a:rPr sz="1500" b="0">
-                <a:solidFill>
-                  <a:srgbClr val="64748B"/>
-                </a:solidFill>
-                <a:latin typeface="Microsoft YaHei"/>
-                <a:ea typeface="Microsoft YaHei"/>
-                <a:cs typeface="Microsoft YaHei"/>
-              </a:rPr>
-              <a:t>满载时功耗中位数 397 W（26 次采样里 18 次封顶），SM 时钟中位数 1770 MHz：GPU 基本顶在功耗上限上（mjx 采样）</a:t>
-            </a:r>
-          </a:p>
-        </p:txBody>
-      </p:sp>
-      <p:sp>
-        <p:nvSpPr>
-          <p:cNvPr id="8" name="Rectangle 7"/>
-          <p:cNvSpPr/>
-          <p:nvPr/>
-        </p:nvSpPr>
-        <p:spPr>
-          <a:xfrm>
-            <a:off x="457200" y="5989320"/>
-            <a:ext cx="11274552" cy="566928"/>
-          </a:xfrm>
-          <a:prstGeom prst="rect">
-            <a:avLst/>
-          </a:prstGeom>
-          <a:solidFill>
-            <a:srgbClr val="F1F5F9"/>
-          </a:solidFill>
-          <a:ln>
-            <a:noFill/>
-          </a:ln>
-          <a:effectLst/>
-        </p:spPr>
-        <p:style>
-          <a:lnRef idx="1">
-            <a:schemeClr val="accent1"/>
-          </a:lnRef>
-          <a:fillRef idx="3">
-            <a:schemeClr val="accent1"/>
-          </a:fillRef>
-          <a:effectRef idx="2">
-            <a:schemeClr val="accent1"/>
-          </a:effectRef>
-          <a:fontRef idx="minor">
-            <a:schemeClr val="lt1"/>
-          </a:fontRef>
-        </p:style>
-        <p:txBody>
-          <a:bodyPr rtlCol="0" anchor="ctr"/>
-          <a:lstStyle/>
-          <a:p>
-            <a:pPr algn="ctr"/>
-          </a:p>
-        </p:txBody>
-      </p:sp>
-      <p:sp>
-        <p:nvSpPr>
-          <p:cNvPr id="9" name="Rectangle 8"/>
-          <p:cNvSpPr/>
-          <p:nvPr/>
-        </p:nvSpPr>
-        <p:spPr>
-          <a:xfrm>
-            <a:off x="457200" y="5989320"/>
-            <a:ext cx="73152" cy="566928"/>
-          </a:xfrm>
-          <a:prstGeom prst="rect">
-            <a:avLst/>
-          </a:prstGeom>
-          <a:solidFill>
-            <a:srgbClr val="F97316"/>
-          </a:solidFill>
-          <a:ln>
-            <a:noFill/>
-          </a:ln>
-          <a:effectLst/>
-        </p:spPr>
-        <p:style>
-          <a:lnRef idx="1">
-            <a:schemeClr val="accent1"/>
-          </a:lnRef>
-          <a:fillRef idx="3">
-            <a:schemeClr val="accent1"/>
-          </a:fillRef>
-          <a:effectRef idx="2">
-            <a:schemeClr val="accent1"/>
-          </a:effectRef>
-          <a:fontRef idx="minor">
-            <a:schemeClr val="lt1"/>
-          </a:fontRef>
-        </p:style>
-        <p:txBody>
-          <a:bodyPr rtlCol="0" anchor="ctr"/>
-          <a:lstStyle/>
-          <a:p>
-            <a:pPr algn="ctr"/>
-          </a:p>
-        </p:txBody>
-      </p:sp>
-      <p:sp>
-        <p:nvSpPr>
-          <p:cNvPr id="10" name="TextBox 9"/>
-          <p:cNvSpPr txBox="1"/>
-          <p:nvPr/>
-        </p:nvSpPr>
-        <p:spPr>
-          <a:xfrm>
-            <a:off x="640080" y="5989320"/>
-            <a:ext cx="11018520" cy="566928"/>
-          </a:xfrm>
-          <a:prstGeom prst="rect">
-            <a:avLst/>
-          </a:prstGeom>
-          <a:noFill/>
-        </p:spPr>
-        <p:txBody>
-          <a:bodyPr wrap="square" anchor="ctr" lIns="73152" rIns="73152" tIns="36576" bIns="36576">
-            <a:noAutofit/>
-          </a:bodyPr>
-          <a:lstStyle/>
-          <a:p>
-            <a:pPr algn="l">
-              <a:lnSpc>
-                <a:spcPct val="115000"/>
-              </a:lnSpc>
-              <a:spcAft>
-                <a:spcPts val="0"/>
-              </a:spcAft>
-            </a:pPr>
-            <a:r>
-              <a:rPr sz="1600" b="0">
-                <a:solidFill>
-                  <a:srgbClr val="1F2937"/>
-                </a:solidFill>
-                <a:latin typeface="Microsoft YaHei"/>
-                <a:ea typeface="Microsoft YaHei"/>
-                <a:cs typeface="Microsoft YaHei"/>
-              </a:rPr>
-              <a:t>每次运行前后记录 GPU 的时钟、温度和功耗，用来排查异常结果</a:t>
-            </a:r>
-          </a:p>
-        </p:txBody>
-      </p:sp>
-    </p:spTree>
-  </p:cSld>
-  <p:clrMapOvr>
-    <a:masterClrMapping/>
-  </p:clrMapOvr>
-</p:sld>
-</file>
-
-<file path=ppt/slides/slide9.xml><?xml version="1.0" encoding="utf-8"?>
-<p:sld xmlns:a="http://schemas.openxmlformats.org/drawingml/2006/main" xmlns:p="http://schemas.openxmlformats.org/presentationml/2006/main" xmlns:r="http://schemas.openxmlformats.org/officeDocument/2006/relationships">
-  <p:cSld>
-    <p:spTree>
-      <p:nvGrpSpPr>
-        <p:cNvPr id="1" name=""/>
-        <p:cNvGrpSpPr/>
-        <p:nvPr/>
-      </p:nvGrpSpPr>
-      <p:grpSpPr/>
-      <p:sp>
-        <p:nvSpPr>
-          <p:cNvPr id="2" name="Rectangle 1"/>
-          <p:cNvSpPr/>
-          <p:nvPr/>
-        </p:nvSpPr>
-        <p:spPr>
-          <a:xfrm>
-            <a:off x="274320" y="347472"/>
-            <a:ext cx="82296" cy="457200"/>
-          </a:xfrm>
-          <a:prstGeom prst="rect">
-            <a:avLst/>
-          </a:prstGeom>
-          <a:solidFill>
-            <a:srgbClr val="F97316"/>
-          </a:solidFill>
-          <a:ln>
-            <a:noFill/>
-          </a:ln>
-          <a:effectLst/>
-        </p:spPr>
-        <p:style>
-          <a:lnRef idx="1">
-            <a:schemeClr val="accent1"/>
-          </a:lnRef>
-          <a:fillRef idx="3">
-            <a:schemeClr val="accent1"/>
-          </a:fillRef>
-          <a:effectRef idx="2">
-            <a:schemeClr val="accent1"/>
-          </a:effectRef>
-          <a:fontRef idx="minor">
-            <a:schemeClr val="lt1"/>
-          </a:fontRef>
-        </p:style>
-        <p:txBody>
-          <a:bodyPr rtlCol="0" anchor="ctr"/>
-          <a:lstStyle/>
-          <a:p>
-            <a:pPr algn="ctr"/>
-          </a:p>
-        </p:txBody>
-      </p:sp>
-      <p:sp>
-        <p:nvSpPr>
-          <p:cNvPr id="3" name="TextBox 2"/>
-          <p:cNvSpPr txBox="1"/>
-          <p:nvPr/>
-        </p:nvSpPr>
-        <p:spPr>
-          <a:xfrm>
-            <a:off x="457200" y="237744"/>
-            <a:ext cx="9509760" cy="676656"/>
-          </a:xfrm>
-          <a:prstGeom prst="rect">
-            <a:avLst/>
-          </a:prstGeom>
-          <a:noFill/>
-        </p:spPr>
-        <p:txBody>
-          <a:bodyPr wrap="square" anchor="ctr" lIns="73152" rIns="73152" tIns="36576" bIns="36576">
-            <a:noAutofit/>
-          </a:bodyPr>
-          <a:lstStyle/>
-          <a:p>
-            <a:pPr algn="l">
-              <a:lnSpc>
-                <a:spcPct val="115000"/>
-              </a:lnSpc>
-              <a:spcAft>
-                <a:spcPts val="0"/>
-              </a:spcAft>
-            </a:pPr>
-            <a:r>
-              <a:rPr sz="2600" b="1">
-                <a:solidFill>
-                  <a:srgbClr val="1E3A5F"/>
-                </a:solidFill>
-                <a:latin typeface="Microsoft YaHei"/>
-                <a:ea typeface="Microsoft YaHei"/>
-                <a:cs typeface="Microsoft YaHei"/>
-              </a:rPr>
-              <a:t>叠加起来：2 卡 1.98 倍，输出逐位一致</a:t>
-            </a:r>
-          </a:p>
-        </p:txBody>
-      </p:sp>
-      <p:sp>
-        <p:nvSpPr>
-          <p:cNvPr id="4" name="TextBox 3"/>
-          <p:cNvSpPr txBox="1"/>
-          <p:nvPr/>
-        </p:nvSpPr>
-        <p:spPr>
-          <a:xfrm>
-            <a:off x="9784080" y="310896"/>
-            <a:ext cx="2103120" cy="457200"/>
-          </a:xfrm>
-          <a:prstGeom prst="rect">
-            <a:avLst/>
-          </a:prstGeom>
-          <a:noFill/>
-        </p:spPr>
-        <p:txBody>
-          <a:bodyPr wrap="square" anchor="ctr" lIns="73152" rIns="73152" tIns="36576" bIns="36576">
-            <a:noAutofit/>
-          </a:bodyPr>
-          <a:lstStyle/>
-          <a:p>
-            <a:pPr algn="r">
-              <a:lnSpc>
-                <a:spcPct val="115000"/>
-              </a:lnSpc>
-              <a:spcAft>
-                <a:spcPts val="0"/>
-              </a:spcAft>
-            </a:pPr>
-            <a:r>
-              <a:rPr sz="1200" b="0">
-                <a:solidFill>
-                  <a:srgbClr val="64748B"/>
-                </a:solidFill>
-                <a:latin typeface="Microsoft YaHei"/>
-                <a:ea typeface="Microsoft YaHei"/>
-                <a:cs typeface="Microsoft YaHei"/>
-              </a:rPr>
-              <a:t>总结　9 / 9</a:t>
-            </a:r>
-          </a:p>
-        </p:txBody>
-      </p:sp>
-      <p:cxnSp>
-        <p:nvCxnSpPr>
-          <p:cNvPr id="5" name="Connector 4"/>
-          <p:cNvCxnSpPr/>
-          <p:nvPr/>
-        </p:nvCxnSpPr>
-        <p:spPr>
-          <a:xfrm>
-            <a:off x="457200" y="969264"/>
-            <a:ext cx="11274552" cy="0"/>
-          </a:xfrm>
-          <a:prstGeom prst="line">
-            <a:avLst/>
-          </a:prstGeom>
-          <a:ln w="12700">
-            <a:solidFill>
-              <a:srgbClr val="E2E8F0"/>
-            </a:solidFill>
-          </a:ln>
-        </p:spPr>
-        <p:style>
-          <a:lnRef idx="2">
-            <a:schemeClr val="accent1"/>
-          </a:lnRef>
-          <a:fillRef idx="0">
-            <a:schemeClr val="accent1"/>
-          </a:fillRef>
-          <a:effectRef idx="1">
-            <a:schemeClr val="accent1"/>
-          </a:effectRef>
-          <a:fontRef idx="minor">
-            <a:schemeClr val="tx1"/>
-          </a:fontRef>
-        </p:style>
-      </p:cxnSp>
-      <p:sp>
-        <p:nvSpPr>
-          <p:cNvPr id="6" name="TextBox 5"/>
-          <p:cNvSpPr txBox="1"/>
-          <p:nvPr/>
-        </p:nvSpPr>
-        <p:spPr>
-          <a:xfrm>
-            <a:off x="548640" y="1143000"/>
-            <a:ext cx="6583680" cy="365760"/>
-          </a:xfrm>
-          <a:prstGeom prst="rect">
-            <a:avLst/>
-          </a:prstGeom>
-          <a:noFill/>
-        </p:spPr>
-        <p:txBody>
-          <a:bodyPr wrap="square" anchor="t" lIns="73152" rIns="73152" tIns="36576" bIns="36576">
-            <a:noAutofit/>
-          </a:bodyPr>
-          <a:lstStyle/>
-          <a:p>
-            <a:pPr algn="l">
-              <a:lnSpc>
-                <a:spcPct val="115000"/>
-              </a:lnSpc>
-              <a:spcAft>
-                <a:spcPts val="0"/>
-              </a:spcAft>
-            </a:pPr>
-            <a:r>
-              <a:rPr sz="1400" b="0">
-                <a:solidFill>
-                  <a:srgbClr val="64748B"/>
-                </a:solidFill>
-                <a:latin typeface="Microsoft YaHei"/>
-                <a:ea typeface="Microsoft YaHei"/>
-                <a:cs typeface="Microsoft YaHei"/>
-              </a:rPr>
-              <a:t>相对单卡基线的加速比</a:t>
-            </a:r>
-          </a:p>
-        </p:txBody>
-      </p:sp>
-      <p:graphicFrame>
-        <p:nvGraphicFramePr>
-          <p:cNvPr id="7" name="Chart 6"/>
-          <p:cNvGraphicFramePr>
-            <a:graphicFrameLocks noGrp="1"/>
-          </p:cNvGraphicFramePr>
-          <p:nvPr/>
-        </p:nvGraphicFramePr>
-        <p:xfrm>
-          <a:off x="411480" y="1463040"/>
-          <a:ext cx="6812280" cy="4343400"/>
-        </p:xfrm>
-        <a:graphic>
-          <a:graphicData uri="http://schemas.openxmlformats.org/drawingml/2006/chart">
-            <c:chart xmlns:c="http://schemas.openxmlformats.org/drawingml/2006/chart" r:id="rId2"/>
-          </a:graphicData>
-        </a:graphic>
-      </p:graphicFrame>
-      <p:sp>
-        <p:nvSpPr>
-          <p:cNvPr id="8" name="Rectangle 7"/>
-          <p:cNvSpPr/>
-          <p:nvPr/>
-        </p:nvSpPr>
-        <p:spPr>
-          <a:xfrm>
-            <a:off x="7543800" y="1188720"/>
-            <a:ext cx="73152" cy="1371600"/>
-          </a:xfrm>
-          <a:prstGeom prst="rect">
-            <a:avLst/>
-          </a:prstGeom>
-          <a:solidFill>
-            <a:srgbClr val="16A34A"/>
-          </a:solidFill>
-          <a:ln>
-            <a:noFill/>
-          </a:ln>
-          <a:effectLst/>
-        </p:spPr>
-        <p:style>
-          <a:lnRef idx="1">
-            <a:schemeClr val="accent1"/>
-          </a:lnRef>
-          <a:fillRef idx="3">
-            <a:schemeClr val="accent1"/>
-          </a:fillRef>
-          <a:effectRef idx="2">
-            <a:schemeClr val="accent1"/>
-          </a:effectRef>
-          <a:fontRef idx="minor">
-            <a:schemeClr val="lt1"/>
-          </a:fontRef>
-        </p:style>
-        <p:txBody>
-          <a:bodyPr rtlCol="0" anchor="ctr"/>
-          <a:lstStyle/>
-          <a:p>
-            <a:pPr algn="ctr"/>
-          </a:p>
-        </p:txBody>
-      </p:sp>
-      <p:sp>
-        <p:nvSpPr>
-          <p:cNvPr id="9" name="TextBox 8"/>
-          <p:cNvSpPr txBox="1"/>
-          <p:nvPr/>
-        </p:nvSpPr>
-        <p:spPr>
-          <a:xfrm>
-            <a:off x="7726679" y="1170432"/>
-            <a:ext cx="4023360" cy="411480"/>
-          </a:xfrm>
-          <a:prstGeom prst="rect">
-            <a:avLst/>
-          </a:prstGeom>
-          <a:noFill/>
-        </p:spPr>
-        <p:txBody>
-          <a:bodyPr wrap="square" anchor="t" lIns="73152" rIns="73152" tIns="36576" bIns="36576">
-            <a:noAutofit/>
-          </a:bodyPr>
-          <a:lstStyle/>
-          <a:p>
-            <a:pPr algn="l">
-              <a:lnSpc>
-                <a:spcPct val="115000"/>
-              </a:lnSpc>
-              <a:spcAft>
-                <a:spcPts val="0"/>
-              </a:spcAft>
-            </a:pPr>
-            <a:r>
-              <a:rPr sz="1700" b="1">
-                <a:solidFill>
-                  <a:srgbClr val="16A34A"/>
-                </a:solidFill>
-                <a:latin typeface="Microsoft YaHei"/>
-                <a:ea typeface="Microsoft YaHei"/>
-                <a:cs typeface="Microsoft YaHei"/>
-              </a:rPr>
-              <a:t>推荐设置</a:t>
-            </a:r>
-          </a:p>
-        </p:txBody>
-      </p:sp>
-      <p:sp>
-        <p:nvSpPr>
-          <p:cNvPr id="10" name="TextBox 9"/>
-          <p:cNvSpPr txBox="1"/>
-          <p:nvPr/>
-        </p:nvSpPr>
-        <p:spPr>
-          <a:xfrm>
-            <a:off x="7726679" y="1572768"/>
-            <a:ext cx="4023360" cy="1005840"/>
-          </a:xfrm>
-          <a:prstGeom prst="rect">
-            <a:avLst/>
-          </a:prstGeom>
-          <a:noFill/>
-        </p:spPr>
-        <p:txBody>
-          <a:bodyPr wrap="square" anchor="t" lIns="73152" rIns="73152" tIns="36576" bIns="36576">
-            <a:noAutofit/>
-          </a:bodyPr>
-          <a:lstStyle/>
-          <a:p>
-            <a:pPr algn="l">
-              <a:lnSpc>
-                <a:spcPct val="115000"/>
-              </a:lnSpc>
-              <a:spcAft>
-                <a:spcPts val="300"/>
-              </a:spcAft>
-            </a:pPr>
-            <a:r>
-              <a:rPr sz="1400" b="0">
-                <a:solidFill>
-                  <a:srgbClr val="1F2937"/>
-                </a:solidFill>
-                <a:latin typeface="Consolas"/>
-                <a:ea typeface="Microsoft YaHei"/>
-                <a:cs typeface="Microsoft YaHei"/>
-              </a:rPr>
-              <a:t>FFLAGS=-gpu=maxregcount:160</a:t>
-            </a:r>
-          </a:p>
-          <a:p>
-            <a:pPr algn="l">
-              <a:lnSpc>
-                <a:spcPct val="115000"/>
-              </a:lnSpc>
-              <a:spcAft>
-                <a:spcPts val="300"/>
-              </a:spcAft>
-            </a:pPr>
-            <a:r>
-              <a:rPr sz="1400" b="0">
-                <a:solidFill>
-                  <a:srgbClr val="1F2937"/>
-                </a:solidFill>
-                <a:latin typeface="Microsoft YaHei"/>
-                <a:ea typeface="Microsoft YaHei"/>
-                <a:cs typeface="Microsoft YaHei"/>
-              </a:rPr>
-              <a:t>每卡 1 个 rank，绑 NUMA 0 的核</a:t>
-            </a:r>
-          </a:p>
-          <a:p>
-            <a:pPr algn="l">
-              <a:lnSpc>
-                <a:spcPct val="115000"/>
-              </a:lnSpc>
-              <a:spcAft>
-                <a:spcPts val="300"/>
-              </a:spcAft>
-            </a:pPr>
-            <a:r>
-              <a:rPr sz="1400" b="0">
-                <a:solidFill>
-                  <a:srgbClr val="1F2937"/>
-                </a:solidFill>
-                <a:latin typeface="Microsoft YaHei"/>
-                <a:ea typeface="Microsoft YaHei"/>
-                <a:cs typeface="Microsoft YaHei"/>
-              </a:rPr>
-              <a:t>（如果允许）</a:t>
-            </a:r>
-            <a:r>
-              <a:rPr sz="1400" b="0">
-                <a:solidFill>
-                  <a:srgbClr val="1F2937"/>
-                </a:solidFill>
-                <a:latin typeface="Consolas"/>
-                <a:ea typeface="Microsoft YaHei"/>
-                <a:cs typeface="Microsoft YaHei"/>
-              </a:rPr>
-              <a:t>rdma_mpi = 'T'</a:t>
-            </a:r>
-          </a:p>
-        </p:txBody>
-      </p:sp>
-      <p:sp>
-        <p:nvSpPr>
-          <p:cNvPr id="11" name="Rectangle 10"/>
-          <p:cNvSpPr/>
-          <p:nvPr/>
-        </p:nvSpPr>
-        <p:spPr>
-          <a:xfrm>
-            <a:off x="7543800" y="2761488"/>
-            <a:ext cx="73152" cy="1371600"/>
-          </a:xfrm>
-          <a:prstGeom prst="rect">
-            <a:avLst/>
-          </a:prstGeom>
-          <a:solidFill>
-            <a:srgbClr val="D97706"/>
-          </a:solidFill>
-          <a:ln>
-            <a:noFill/>
-          </a:ln>
-          <a:effectLst/>
-        </p:spPr>
-        <p:style>
-          <a:lnRef idx="1">
-            <a:schemeClr val="accent1"/>
-          </a:lnRef>
-          <a:fillRef idx="3">
-            <a:schemeClr val="accent1"/>
-          </a:fillRef>
-          <a:effectRef idx="2">
-            <a:schemeClr val="accent1"/>
-          </a:effectRef>
-          <a:fontRef idx="minor">
-            <a:schemeClr val="lt1"/>
-          </a:fontRef>
-        </p:style>
-        <p:txBody>
-          <a:bodyPr rtlCol="0" anchor="ctr"/>
-          <a:lstStyle/>
-          <a:p>
-            <a:pPr algn="ctr"/>
-          </a:p>
-        </p:txBody>
-      </p:sp>
-      <p:sp>
-        <p:nvSpPr>
-          <p:cNvPr id="12" name="TextBox 11"/>
-          <p:cNvSpPr txBox="1"/>
-          <p:nvPr/>
-        </p:nvSpPr>
-        <p:spPr>
-          <a:xfrm>
-            <a:off x="7726679" y="2743200"/>
-            <a:ext cx="4023360" cy="411480"/>
-          </a:xfrm>
-          <a:prstGeom prst="rect">
-            <a:avLst/>
-          </a:prstGeom>
-          <a:noFill/>
-        </p:spPr>
-        <p:txBody>
-          <a:bodyPr wrap="square" anchor="t" lIns="73152" rIns="73152" tIns="36576" bIns="36576">
-            <a:noAutofit/>
-          </a:bodyPr>
-          <a:lstStyle/>
-          <a:p>
-            <a:pPr algn="l">
-              <a:lnSpc>
-                <a:spcPct val="115000"/>
-              </a:lnSpc>
-              <a:spcAft>
-                <a:spcPts val="0"/>
-              </a:spcAft>
-            </a:pPr>
-            <a:r>
-              <a:rPr sz="1700" b="1">
-                <a:solidFill>
-                  <a:srgbClr val="D97706"/>
-                </a:solidFill>
-                <a:latin typeface="Microsoft YaHei"/>
-                <a:ea typeface="Microsoft YaHei"/>
-                <a:cs typeface="Microsoft YaHei"/>
-              </a:rPr>
-              <a:t>待测</a:t>
-            </a:r>
-          </a:p>
-        </p:txBody>
-      </p:sp>
-      <p:sp>
-        <p:nvSpPr>
-          <p:cNvPr id="13" name="TextBox 12"/>
-          <p:cNvSpPr txBox="1"/>
-          <p:nvPr/>
-        </p:nvSpPr>
-        <p:spPr>
-          <a:xfrm>
-            <a:off x="7726679" y="3145536"/>
-            <a:ext cx="4023360" cy="1005840"/>
-          </a:xfrm>
-          <a:prstGeom prst="rect">
-            <a:avLst/>
-          </a:prstGeom>
-          <a:noFill/>
-        </p:spPr>
-        <p:txBody>
-          <a:bodyPr wrap="square" anchor="t" lIns="73152" rIns="73152" tIns="36576" bIns="36576">
-            <a:noAutofit/>
-          </a:bodyPr>
-          <a:lstStyle/>
-          <a:p>
-            <a:pPr algn="l">
-              <a:lnSpc>
-                <a:spcPct val="115000"/>
-              </a:lnSpc>
-              <a:spcAft>
-                <a:spcPts val="300"/>
-              </a:spcAft>
-            </a:pPr>
-            <a:r>
-              <a:rPr sz="1400" b="0">
-                <a:solidFill>
-                  <a:srgbClr val="1F2937"/>
-                </a:solidFill>
-                <a:latin typeface="Microsoft YaHei"/>
-                <a:ea typeface="Microsoft YaHei"/>
-                <a:cs typeface="Microsoft YaHei"/>
-              </a:rPr>
-              <a:t>TGV 迁移验证：等 GPU 驱动恢复</a:t>
-            </a:r>
-          </a:p>
-          <a:p>
-            <a:pPr algn="l">
-              <a:lnSpc>
-                <a:spcPct val="115000"/>
-              </a:lnSpc>
-              <a:spcAft>
-                <a:spcPts val="300"/>
-              </a:spcAft>
-            </a:pPr>
-            <a:r>
-              <a:rPr sz="1400" b="0">
-                <a:solidFill>
-                  <a:srgbClr val="1F2937"/>
-                </a:solidFill>
-                <a:latin typeface="Consolas"/>
-                <a:ea typeface="Microsoft YaHei"/>
-                <a:cs typeface="Microsoft YaHei"/>
-              </a:rPr>
-              <a:t>-O3</a:t>
-            </a:r>
-            <a:r>
-              <a:rPr sz="1400" b="0">
-                <a:solidFill>
-                  <a:srgbClr val="1F2937"/>
-                </a:solidFill>
-                <a:latin typeface="Microsoft YaHei"/>
-                <a:ea typeface="Microsoft YaHei"/>
-                <a:cs typeface="Microsoft YaHei"/>
-              </a:rPr>
-              <a:t> 换成 </a:t>
-            </a:r>
-            <a:r>
-              <a:rPr sz="1400" b="0">
-                <a:solidFill>
-                  <a:srgbClr val="1F2937"/>
-                </a:solidFill>
-                <a:latin typeface="Consolas"/>
-                <a:ea typeface="Microsoft YaHei"/>
-                <a:cs typeface="Microsoft YaHei"/>
-              </a:rPr>
-              <a:t>-O2</a:t>
-            </a:r>
-          </a:p>
-          <a:p>
-            <a:pPr algn="l">
-              <a:lnSpc>
-                <a:spcPct val="115000"/>
-              </a:lnSpc>
-              <a:spcAft>
-                <a:spcPts val="300"/>
-              </a:spcAft>
-            </a:pPr>
-            <a:r>
-              <a:rPr sz="1400" b="0">
-                <a:solidFill>
-                  <a:srgbClr val="1F2937"/>
-                </a:solidFill>
-                <a:latin typeface="Microsoft YaHei"/>
-                <a:ea typeface="Microsoft YaHei"/>
-                <a:cs typeface="Microsoft YaHei"/>
-              </a:rPr>
-              <a:t>在团队基线 fbb3de20 上复测</a:t>
-            </a:r>
-          </a:p>
-        </p:txBody>
-      </p:sp>
-      <p:sp>
-        <p:nvSpPr>
-          <p:cNvPr id="14" name="Rectangle 13"/>
-          <p:cNvSpPr/>
-          <p:nvPr/>
-        </p:nvSpPr>
-        <p:spPr>
-          <a:xfrm>
-            <a:off x="7543800" y="4334256"/>
-            <a:ext cx="73152" cy="1371600"/>
-          </a:xfrm>
-          <a:prstGeom prst="rect">
-            <a:avLst/>
-          </a:prstGeom>
-          <a:solidFill>
-            <a:srgbClr val="1E3A5F"/>
-          </a:solidFill>
-          <a:ln>
-            <a:noFill/>
-          </a:ln>
-          <a:effectLst/>
-        </p:spPr>
-        <p:style>
-          <a:lnRef idx="1">
-            <a:schemeClr val="accent1"/>
-          </a:lnRef>
-          <a:fillRef idx="3">
-            <a:schemeClr val="accent1"/>
-          </a:fillRef>
-          <a:effectRef idx="2">
-            <a:schemeClr val="accent1"/>
-          </a:effectRef>
-          <a:fontRef idx="minor">
-            <a:schemeClr val="lt1"/>
-          </a:fontRef>
-        </p:style>
-        <p:txBody>
-          <a:bodyPr rtlCol="0" anchor="ctr"/>
-          <a:lstStyle/>
-          <a:p>
-            <a:pPr algn="ctr"/>
-          </a:p>
-        </p:txBody>
-      </p:sp>
-      <p:sp>
-        <p:nvSpPr>
-          <p:cNvPr id="15" name="TextBox 14"/>
-          <p:cNvSpPr txBox="1"/>
-          <p:nvPr/>
-        </p:nvSpPr>
-        <p:spPr>
-          <a:xfrm>
-            <a:off x="7726679" y="4315968"/>
-            <a:ext cx="4023360" cy="411480"/>
-          </a:xfrm>
-          <a:prstGeom prst="rect">
-            <a:avLst/>
-          </a:prstGeom>
-          <a:noFill/>
-        </p:spPr>
-        <p:txBody>
-          <a:bodyPr wrap="square" anchor="t" lIns="73152" rIns="73152" tIns="36576" bIns="36576">
-            <a:noAutofit/>
-          </a:bodyPr>
-          <a:lstStyle/>
-          <a:p>
-            <a:pPr algn="l">
-              <a:lnSpc>
-                <a:spcPct val="115000"/>
-              </a:lnSpc>
-              <a:spcAft>
-                <a:spcPts val="0"/>
-              </a:spcAft>
-            </a:pPr>
-            <a:r>
-              <a:rPr sz="1700" b="1">
-                <a:solidFill>
-                  <a:srgbClr val="1E3A5F"/>
-                </a:solidFill>
-                <a:latin typeface="Microsoft YaHei"/>
-                <a:ea typeface="Microsoft YaHei"/>
-                <a:cs typeface="Microsoft YaHei"/>
-              </a:rPr>
-              <a:t>待讨论</a:t>
-            </a:r>
-          </a:p>
-        </p:txBody>
-      </p:sp>
-      <p:sp>
-        <p:nvSpPr>
-          <p:cNvPr id="16" name="TextBox 15"/>
-          <p:cNvSpPr txBox="1"/>
-          <p:nvPr/>
-        </p:nvSpPr>
-        <p:spPr>
-          <a:xfrm>
-            <a:off x="7726679" y="4718304"/>
-            <a:ext cx="4023360" cy="1005840"/>
-          </a:xfrm>
-          <a:prstGeom prst="rect">
-            <a:avLst/>
-          </a:prstGeom>
-          <a:noFill/>
-        </p:spPr>
-        <p:txBody>
-          <a:bodyPr wrap="square" anchor="t" lIns="73152" rIns="73152" tIns="36576" bIns="36576">
-            <a:noAutofit/>
-          </a:bodyPr>
-          <a:lstStyle/>
-          <a:p>
-            <a:pPr algn="l">
-              <a:lnSpc>
-                <a:spcPct val="115000"/>
-              </a:lnSpc>
-              <a:spcAft>
-                <a:spcPts val="300"/>
-              </a:spcAft>
-            </a:pPr>
-            <a:r>
-              <a:rPr sz="1400" b="0">
-                <a:solidFill>
-                  <a:srgbClr val="1F2937"/>
-                </a:solidFill>
-                <a:latin typeface="Microsoft YaHei"/>
-                <a:ea typeface="Microsoft YaHei"/>
-                <a:cs typeface="Microsoft YaHei"/>
-              </a:rPr>
-              <a:t>寄存器上限要不要当默认设置</a:t>
-            </a:r>
-          </a:p>
-          <a:p>
-            <a:pPr algn="l">
-              <a:lnSpc>
-                <a:spcPct val="115000"/>
-              </a:lnSpc>
-              <a:spcAft>
-                <a:spcPts val="300"/>
-              </a:spcAft>
-            </a:pPr>
-            <a:r>
-              <a:rPr sz="1400" b="0">
-                <a:solidFill>
-                  <a:srgbClr val="1F2937"/>
-                </a:solidFill>
-                <a:latin typeface="Microsoft YaHei"/>
-                <a:ea typeface="Microsoft YaHei"/>
-                <a:cs typeface="Microsoft YaHei"/>
-              </a:rPr>
-              <a:t>能不能改算例里的性能字段</a:t>
-            </a:r>
-          </a:p>
-          <a:p>
-            <a:pPr algn="l">
-              <a:lnSpc>
-                <a:spcPct val="115000"/>
-              </a:lnSpc>
-              <a:spcAft>
-                <a:spcPts val="300"/>
-              </a:spcAft>
-            </a:pPr>
-            <a:r>
-              <a:rPr sz="1400" b="0">
-                <a:solidFill>
-                  <a:srgbClr val="1F2937"/>
-                </a:solidFill>
-                <a:latin typeface="Consolas"/>
-                <a:ea typeface="Microsoft YaHei"/>
-                <a:cs typeface="Microsoft YaHei"/>
-              </a:rPr>
-              <a:t>--single</a:t>
-            </a:r>
-            <a:r>
-              <a:rPr sz="1400" b="0">
-                <a:solidFill>
-                  <a:srgbClr val="1F2937"/>
-                </a:solidFill>
-                <a:latin typeface="Microsoft YaHei"/>
-                <a:ea typeface="Microsoft YaHei"/>
-                <a:cs typeface="Microsoft YaHei"/>
-              </a:rPr>
-              <a:t> 的精度能不能接受</a:t>
-            </a:r>
-          </a:p>
-        </p:txBody>
-      </p:sp>
-      <p:sp>
-        <p:nvSpPr>
-          <p:cNvPr id="17" name="Rectangle 16"/>
-          <p:cNvSpPr/>
-          <p:nvPr/>
-        </p:nvSpPr>
-        <p:spPr>
-          <a:xfrm>
-            <a:off x="457200" y="5989320"/>
-            <a:ext cx="11274552" cy="566928"/>
-          </a:xfrm>
-          <a:prstGeom prst="rect">
-            <a:avLst/>
-          </a:prstGeom>
-          <a:solidFill>
-            <a:srgbClr val="F1F5F9"/>
-          </a:solidFill>
-          <a:ln>
-            <a:noFill/>
-          </a:ln>
-          <a:effectLst/>
-        </p:spPr>
-        <p:style>
-          <a:lnRef idx="1">
-            <a:schemeClr val="accent1"/>
-          </a:lnRef>
-          <a:fillRef idx="3">
-            <a:schemeClr val="accent1"/>
-          </a:fillRef>
-          <a:effectRef idx="2">
-            <a:schemeClr val="accent1"/>
-          </a:effectRef>
-          <a:fontRef idx="minor">
-            <a:schemeClr val="lt1"/>
-          </a:fontRef>
-        </p:style>
-        <p:txBody>
-          <a:bodyPr rtlCol="0" anchor="ctr"/>
-          <a:lstStyle/>
-          <a:p>
-            <a:pPr algn="ctr"/>
-          </a:p>
-        </p:txBody>
-      </p:sp>
-      <p:sp>
-        <p:nvSpPr>
-          <p:cNvPr id="18" name="Rectangle 17"/>
-          <p:cNvSpPr/>
-          <p:nvPr/>
-        </p:nvSpPr>
-        <p:spPr>
-          <a:xfrm>
-            <a:off x="457200" y="5989320"/>
-            <a:ext cx="73152" cy="566928"/>
-          </a:xfrm>
-          <a:prstGeom prst="rect">
-            <a:avLst/>
-          </a:prstGeom>
-          <a:solidFill>
-            <a:srgbClr val="F97316"/>
-          </a:solidFill>
-          <a:ln>
-            <a:noFill/>
-          </a:ln>
-          <a:effectLst/>
-        </p:spPr>
-        <p:style>
-          <a:lnRef idx="1">
-            <a:schemeClr val="accent1"/>
-          </a:lnRef>
-          <a:fillRef idx="3">
-            <a:schemeClr val="accent1"/>
-          </a:fillRef>
-          <a:effectRef idx="2">
-            <a:schemeClr val="accent1"/>
-          </a:effectRef>
-          <a:fontRef idx="minor">
-            <a:schemeClr val="lt1"/>
-          </a:fontRef>
-        </p:style>
-        <p:txBody>
-          <a:bodyPr rtlCol="0" anchor="ctr"/>
-          <a:lstStyle/>
-          <a:p>
-            <a:pPr algn="ctr"/>
-          </a:p>
-        </p:txBody>
-      </p:sp>
-      <p:sp>
-        <p:nvSpPr>
-          <p:cNvPr id="19" name="TextBox 18"/>
-          <p:cNvSpPr txBox="1"/>
-          <p:nvPr/>
-        </p:nvSpPr>
-        <p:spPr>
-          <a:xfrm>
-            <a:off x="640080" y="5989320"/>
-            <a:ext cx="11018520" cy="566928"/>
-          </a:xfrm>
-          <a:prstGeom prst="rect">
-            <a:avLst/>
-          </a:prstGeom>
-          <a:noFill/>
-        </p:spPr>
-        <p:txBody>
-          <a:bodyPr wrap="square" anchor="ctr" lIns="73152" rIns="73152" tIns="36576" bIns="36576">
-            <a:noAutofit/>
-          </a:bodyPr>
-          <a:lstStyle/>
-          <a:p>
-            <a:pPr algn="l">
-              <a:lnSpc>
-                <a:spcPct val="115000"/>
-              </a:lnSpc>
-              <a:spcAft>
-                <a:spcPts val="0"/>
-              </a:spcAft>
-            </a:pPr>
-            <a:r>
-              <a:rPr sz="1600" b="0">
-                <a:solidFill>
-                  <a:srgbClr val="1F2937"/>
-                </a:solidFill>
-                <a:latin typeface="Microsoft YaHei"/>
-                <a:ea typeface="Microsoft YaHei"/>
-                <a:cs typeface="Microsoft YaHei"/>
-              </a:rPr>
-              <a:t>采用寄存器上限前，要带着它跑一遍 </a:t>
-            </a:r>
-            <a:r>
-              <a:rPr sz="1600" b="0">
-                <a:solidFill>
-                  <a:srgbClr val="1F2937"/>
-                </a:solidFill>
-                <a:latin typeface="Consolas"/>
-                <a:ea typeface="Microsoft YaHei"/>
-                <a:cs typeface="Microsoft YaHei"/>
-              </a:rPr>
-              <a:t>./mfc.sh test</a:t>
-            </a:r>
-            <a:r>
-              <a:rPr sz="1600" b="0">
-                <a:solidFill>
-                  <a:srgbClr val="1F2937"/>
-                </a:solidFill>
-                <a:latin typeface="Microsoft YaHei"/>
-                <a:ea typeface="Microsoft YaHei"/>
-                <a:cs typeface="Microsoft YaHei"/>
-              </a:rPr>
-              <a:t>，并在报告里向评委说明</a:t>
+              <a:t>MPS 救回了共用一张卡的大部分损失，但不比每卡 1 个 rank 快；这些写法都不改变输出</a:t>
             </a:r>
           </a:p>
         </p:txBody>
